--- a/EPTA/EPTA_Funding_Case_2025.pptx
+++ b/EPTA/EPTA_Funding_Case_2025.pptx
@@ -5,31 +5,33 @@
     <p:sldMasterId id="2147483648" r:id="rId1"/>
   </p:sldMasterIdLst>
   <p:notesMasterIdLst>
-    <p:notesMasterId r:id="rId24"/>
+    <p:notesMasterId r:id="rId26"/>
   </p:notesMasterIdLst>
   <p:sldIdLst>
     <p:sldId id="256" r:id="rId2"/>
     <p:sldId id="257" r:id="rId3"/>
     <p:sldId id="258" r:id="rId4"/>
-    <p:sldId id="259" r:id="rId5"/>
-    <p:sldId id="260" r:id="rId6"/>
-    <p:sldId id="261" r:id="rId7"/>
-    <p:sldId id="262" r:id="rId8"/>
-    <p:sldId id="263" r:id="rId9"/>
-    <p:sldId id="264" r:id="rId10"/>
-    <p:sldId id="265" r:id="rId11"/>
-    <p:sldId id="266" r:id="rId12"/>
-    <p:sldId id="267" r:id="rId13"/>
-    <p:sldId id="268" r:id="rId14"/>
-    <p:sldId id="269" r:id="rId15"/>
-    <p:sldId id="270" r:id="rId16"/>
-    <p:sldId id="271" r:id="rId17"/>
-    <p:sldId id="272" r:id="rId18"/>
-    <p:sldId id="273" r:id="rId19"/>
-    <p:sldId id="274" r:id="rId20"/>
-    <p:sldId id="275" r:id="rId21"/>
-    <p:sldId id="276" r:id="rId22"/>
-    <p:sldId id="277" r:id="rId23"/>
+    <p:sldId id="280" r:id="rId5"/>
+    <p:sldId id="259" r:id="rId6"/>
+    <p:sldId id="279" r:id="rId7"/>
+    <p:sldId id="281" r:id="rId8"/>
+    <p:sldId id="260" r:id="rId9"/>
+    <p:sldId id="261" r:id="rId10"/>
+    <p:sldId id="262" r:id="rId11"/>
+    <p:sldId id="263" r:id="rId12"/>
+    <p:sldId id="264" r:id="rId13"/>
+    <p:sldId id="265" r:id="rId14"/>
+    <p:sldId id="266" r:id="rId15"/>
+    <p:sldId id="267" r:id="rId16"/>
+    <p:sldId id="268" r:id="rId17"/>
+    <p:sldId id="269" r:id="rId18"/>
+    <p:sldId id="270" r:id="rId19"/>
+    <p:sldId id="271" r:id="rId20"/>
+    <p:sldId id="282" r:id="rId21"/>
+    <p:sldId id="272" r:id="rId22"/>
+    <p:sldId id="275" r:id="rId23"/>
+    <p:sldId id="276" r:id="rId24"/>
+    <p:sldId id="277" r:id="rId25"/>
   </p:sldIdLst>
   <p:sldSz cx="9144000" cy="5143500" type="screen16x9"/>
   <p:notesSz cx="5143500" cy="9144000"/>
@@ -2638,7 +2640,17 @@
   <c:chart>
     <c:autoTitleDeleted val="1"/>
     <c:plotArea>
-      <c:layout/>
+      <c:layout>
+        <c:manualLayout>
+          <c:layoutTarget val="inner"/>
+          <c:xMode val="edge"/>
+          <c:yMode val="edge"/>
+          <c:x val="5.0085705998706688E-2"/>
+          <c:y val="5.0803122265966755E-2"/>
+          <c:w val="0.93783699931530295"/>
+          <c:h val="0.69279001257655293"/>
+        </c:manualLayout>
+      </c:layout>
       <c:barChart>
         <c:barDir val="col"/>
         <c:grouping val="clustered"/>
@@ -4246,7 +4258,7 @@
           <a:p>
             <a:fld id="{F7021451-1387-4CA6-816F-3879F97B5CBC}" type="slidenum">
               <a:rPr lang="en-US"/>
-              <a:t>20</a:t>
+              <a:t>21</a:t>
             </a:fld>
             <a:endParaRPr lang="en-US"/>
           </a:p>
@@ -4330,7 +4342,7 @@
           <a:p>
             <a:fld id="{F7021451-1387-4CA6-816F-3879F97B5CBC}" type="slidenum">
               <a:rPr lang="en-US"/>
-              <a:t>21</a:t>
+              <a:t>22</a:t>
             </a:fld>
             <a:endParaRPr lang="en-US"/>
           </a:p>
@@ -4414,7 +4426,91 @@
           <a:p>
             <a:fld id="{F7021451-1387-4CA6-816F-3879F97B5CBC}" type="slidenum">
               <a:rPr lang="en-US"/>
-              <a:t>22</a:t>
+              <a:t>23</a:t>
+            </a:fld>
+            <a:endParaRPr lang="en-US"/>
+          </a:p>
+        </p:txBody>
+      </p:sp>
+    </p:spTree>
+    <p:extLst>
+      <p:ext uri="{BB962C8B-B14F-4D97-AF65-F5344CB8AC3E}">
+        <p14:creationId xmlns:p14="http://schemas.microsoft.com/office/powerpoint/2010/main" val="1024086991"/>
+      </p:ext>
+    </p:extLst>
+  </p:cSld>
+  <p:clrMapOvr>
+    <a:masterClrMapping/>
+  </p:clrMapOvr>
+</p:notes>
+</file>
+
+<file path=ppt/notesSlides/notesSlide23.xml><?xml version="1.0" encoding="utf-8"?>
+<p:notes xmlns:a="http://schemas.openxmlformats.org/drawingml/2006/main" xmlns:r="http://schemas.openxmlformats.org/officeDocument/2006/relationships" xmlns:p="http://schemas.openxmlformats.org/presentationml/2006/main">
+  <p:cSld>
+    <p:spTree>
+      <p:nvGrpSpPr>
+        <p:cNvPr id="1" name=""/>
+        <p:cNvGrpSpPr/>
+        <p:nvPr/>
+      </p:nvGrpSpPr>
+      <p:grpSpPr>
+        <a:xfrm>
+          <a:off x="0" y="0"/>
+          <a:ext cx="0" cy="0"/>
+          <a:chOff x="0" y="0"/>
+          <a:chExt cx="0" cy="0"/>
+        </a:xfrm>
+      </p:grpSpPr>
+      <p:sp>
+        <p:nvSpPr>
+          <p:cNvPr id="2" name="Slide Image Placeholder 1"/>
+          <p:cNvSpPr>
+            <a:spLocks noGrp="1" noRot="1" noChangeAspect="1"/>
+          </p:cNvSpPr>
+          <p:nvPr>
+            <p:ph type="sldImg"/>
+          </p:nvPr>
+        </p:nvSpPr>
+        <p:spPr/>
+      </p:sp>
+      <p:sp>
+        <p:nvSpPr>
+          <p:cNvPr id="3" name="Notes Placeholder 2"/>
+          <p:cNvSpPr>
+            <a:spLocks noGrp="1"/>
+          </p:cNvSpPr>
+          <p:nvPr>
+            <p:ph type="body" idx="1"/>
+          </p:nvPr>
+        </p:nvSpPr>
+        <p:spPr/>
+        <p:txBody>
+          <a:bodyPr/>
+          <a:lstStyle/>
+          <a:p>
+            <a:endParaRPr lang="en-US" dirty="0"/>
+          </a:p>
+        </p:txBody>
+      </p:sp>
+      <p:sp>
+        <p:nvSpPr>
+          <p:cNvPr id="4" name="Slide Number Placeholder 3"/>
+          <p:cNvSpPr>
+            <a:spLocks noGrp="1"/>
+          </p:cNvSpPr>
+          <p:nvPr>
+            <p:ph type="sldNum" sz="quarter" idx="10"/>
+          </p:nvPr>
+        </p:nvSpPr>
+        <p:spPr/>
+        <p:txBody>
+          <a:bodyPr/>
+          <a:lstStyle/>
+          <a:p>
+            <a:fld id="{F7021451-1387-4CA6-816F-3879F97B5CBC}" type="slidenum">
+              <a:rPr lang="en-US"/>
+              <a:t>24</a:t>
             </a:fld>
             <a:endParaRPr lang="en-US"/>
           </a:p>
@@ -4522,7 +4618,13 @@
   <p:cSld>
     <p:spTree>
       <p:nvGrpSpPr>
-        <p:cNvPr id="1" name=""/>
+        <p:cNvPr id="1" name="">
+          <a:extLst>
+            <a:ext uri="{FF2B5EF4-FFF2-40B4-BE49-F238E27FC236}">
+              <a16:creationId xmlns:a16="http://schemas.microsoft.com/office/drawing/2014/main" id="{9538997B-8F3E-B6EE-A6D3-2FD9C3F9C7A0}"/>
+            </a:ext>
+          </a:extLst>
+        </p:cNvPr>
         <p:cNvGrpSpPr/>
         <p:nvPr/>
       </p:nvGrpSpPr>
@@ -4536,7 +4638,13 @@
       </p:grpSpPr>
       <p:sp>
         <p:nvSpPr>
-          <p:cNvPr id="2" name="Slide Image Placeholder 1"/>
+          <p:cNvPr id="2" name="Slide Image Placeholder 1">
+            <a:extLst>
+              <a:ext uri="{FF2B5EF4-FFF2-40B4-BE49-F238E27FC236}">
+                <a16:creationId xmlns:a16="http://schemas.microsoft.com/office/drawing/2014/main" id="{FFCA11EB-6B2C-7A7E-E67A-B99D4B1B7FC0}"/>
+              </a:ext>
+            </a:extLst>
+          </p:cNvPr>
           <p:cNvSpPr>
             <a:spLocks noGrp="1" noRot="1" noChangeAspect="1"/>
           </p:cNvSpPr>
@@ -4548,7 +4656,13 @@
       </p:sp>
       <p:sp>
         <p:nvSpPr>
-          <p:cNvPr id="3" name="Notes Placeholder 2"/>
+          <p:cNvPr id="3" name="Notes Placeholder 2">
+            <a:extLst>
+              <a:ext uri="{FF2B5EF4-FFF2-40B4-BE49-F238E27FC236}">
+                <a16:creationId xmlns:a16="http://schemas.microsoft.com/office/drawing/2014/main" id="{C9EDD273-052D-9E55-3CA2-4EA62750A495}"/>
+              </a:ext>
+            </a:extLst>
+          </p:cNvPr>
           <p:cNvSpPr>
             <a:spLocks noGrp="1"/>
           </p:cNvSpPr>
@@ -4567,7 +4681,13 @@
       </p:sp>
       <p:sp>
         <p:nvSpPr>
-          <p:cNvPr id="4" name="Slide Number Placeholder 3"/>
+          <p:cNvPr id="4" name="Slide Number Placeholder 3">
+            <a:extLst>
+              <a:ext uri="{FF2B5EF4-FFF2-40B4-BE49-F238E27FC236}">
+                <a16:creationId xmlns:a16="http://schemas.microsoft.com/office/drawing/2014/main" id="{364ED1F0-9F44-C308-F2D8-F800B7A10BC6}"/>
+              </a:ext>
+            </a:extLst>
+          </p:cNvPr>
           <p:cNvSpPr>
             <a:spLocks noGrp="1"/>
           </p:cNvSpPr>
@@ -4591,7 +4711,7 @@
     </p:spTree>
     <p:extLst>
       <p:ext uri="{BB962C8B-B14F-4D97-AF65-F5344CB8AC3E}">
-        <p14:creationId xmlns:p14="http://schemas.microsoft.com/office/powerpoint/2010/main" val="1024086991"/>
+        <p14:creationId xmlns:p14="http://schemas.microsoft.com/office/powerpoint/2010/main" val="424675451"/>
       </p:ext>
     </p:extLst>
   </p:cSld>
@@ -4690,7 +4810,13 @@
   <p:cSld>
     <p:spTree>
       <p:nvGrpSpPr>
-        <p:cNvPr id="1" name=""/>
+        <p:cNvPr id="1" name="">
+          <a:extLst>
+            <a:ext uri="{FF2B5EF4-FFF2-40B4-BE49-F238E27FC236}">
+              <a16:creationId xmlns:a16="http://schemas.microsoft.com/office/drawing/2014/main" id="{CAE80FD2-D136-9BB2-687A-DEE567BA2D6A}"/>
+            </a:ext>
+          </a:extLst>
+        </p:cNvPr>
         <p:cNvGrpSpPr/>
         <p:nvPr/>
       </p:nvGrpSpPr>
@@ -4704,7 +4830,13 @@
       </p:grpSpPr>
       <p:sp>
         <p:nvSpPr>
-          <p:cNvPr id="2" name="Slide Image Placeholder 1"/>
+          <p:cNvPr id="2" name="Slide Image Placeholder 1">
+            <a:extLst>
+              <a:ext uri="{FF2B5EF4-FFF2-40B4-BE49-F238E27FC236}">
+                <a16:creationId xmlns:a16="http://schemas.microsoft.com/office/drawing/2014/main" id="{1AEF8CD8-A142-78EF-4FA5-F535F48B6F99}"/>
+              </a:ext>
+            </a:extLst>
+          </p:cNvPr>
           <p:cNvSpPr>
             <a:spLocks noGrp="1" noRot="1" noChangeAspect="1"/>
           </p:cNvSpPr>
@@ -4716,7 +4848,13 @@
       </p:sp>
       <p:sp>
         <p:nvSpPr>
-          <p:cNvPr id="3" name="Notes Placeholder 2"/>
+          <p:cNvPr id="3" name="Notes Placeholder 2">
+            <a:extLst>
+              <a:ext uri="{FF2B5EF4-FFF2-40B4-BE49-F238E27FC236}">
+                <a16:creationId xmlns:a16="http://schemas.microsoft.com/office/drawing/2014/main" id="{3B90DC4D-2FF2-8E86-779E-CB4C682F55C3}"/>
+              </a:ext>
+            </a:extLst>
+          </p:cNvPr>
           <p:cNvSpPr>
             <a:spLocks noGrp="1"/>
           </p:cNvSpPr>
@@ -4735,7 +4873,13 @@
       </p:sp>
       <p:sp>
         <p:nvSpPr>
-          <p:cNvPr id="4" name="Slide Number Placeholder 3"/>
+          <p:cNvPr id="4" name="Slide Number Placeholder 3">
+            <a:extLst>
+              <a:ext uri="{FF2B5EF4-FFF2-40B4-BE49-F238E27FC236}">
+                <a16:creationId xmlns:a16="http://schemas.microsoft.com/office/drawing/2014/main" id="{2DA0C15A-3AEE-21B5-5AC5-856C5A85605B}"/>
+              </a:ext>
+            </a:extLst>
+          </p:cNvPr>
           <p:cNvSpPr>
             <a:spLocks noGrp="1"/>
           </p:cNvSpPr>
@@ -4759,7 +4903,7 @@
     </p:spTree>
     <p:extLst>
       <p:ext uri="{BB962C8B-B14F-4D97-AF65-F5344CB8AC3E}">
-        <p14:creationId xmlns:p14="http://schemas.microsoft.com/office/powerpoint/2010/main" val="1024086991"/>
+        <p14:creationId xmlns:p14="http://schemas.microsoft.com/office/powerpoint/2010/main" val="2918251342"/>
       </p:ext>
     </p:extLst>
   </p:cSld>
@@ -4774,7 +4918,13 @@
   <p:cSld>
     <p:spTree>
       <p:nvGrpSpPr>
-        <p:cNvPr id="1" name=""/>
+        <p:cNvPr id="1" name="">
+          <a:extLst>
+            <a:ext uri="{FF2B5EF4-FFF2-40B4-BE49-F238E27FC236}">
+              <a16:creationId xmlns:a16="http://schemas.microsoft.com/office/drawing/2014/main" id="{7ACA9449-7B8E-63E2-5CD8-FEF63B96BDF3}"/>
+            </a:ext>
+          </a:extLst>
+        </p:cNvPr>
         <p:cNvGrpSpPr/>
         <p:nvPr/>
       </p:nvGrpSpPr>
@@ -4788,7 +4938,13 @@
       </p:grpSpPr>
       <p:sp>
         <p:nvSpPr>
-          <p:cNvPr id="2" name="Slide Image Placeholder 1"/>
+          <p:cNvPr id="2" name="Slide Image Placeholder 1">
+            <a:extLst>
+              <a:ext uri="{FF2B5EF4-FFF2-40B4-BE49-F238E27FC236}">
+                <a16:creationId xmlns:a16="http://schemas.microsoft.com/office/drawing/2014/main" id="{ACE28F14-89EC-C1A5-F2F0-69833DDFC762}"/>
+              </a:ext>
+            </a:extLst>
+          </p:cNvPr>
           <p:cNvSpPr>
             <a:spLocks noGrp="1" noRot="1" noChangeAspect="1"/>
           </p:cNvSpPr>
@@ -4800,7 +4956,13 @@
       </p:sp>
       <p:sp>
         <p:nvSpPr>
-          <p:cNvPr id="3" name="Notes Placeholder 2"/>
+          <p:cNvPr id="3" name="Notes Placeholder 2">
+            <a:extLst>
+              <a:ext uri="{FF2B5EF4-FFF2-40B4-BE49-F238E27FC236}">
+                <a16:creationId xmlns:a16="http://schemas.microsoft.com/office/drawing/2014/main" id="{09F4425D-2F49-5782-5696-D830CBE2DCEB}"/>
+              </a:ext>
+            </a:extLst>
+          </p:cNvPr>
           <p:cNvSpPr>
             <a:spLocks noGrp="1"/>
           </p:cNvSpPr>
@@ -4819,7 +4981,13 @@
       </p:sp>
       <p:sp>
         <p:nvSpPr>
-          <p:cNvPr id="4" name="Slide Number Placeholder 3"/>
+          <p:cNvPr id="4" name="Slide Number Placeholder 3">
+            <a:extLst>
+              <a:ext uri="{FF2B5EF4-FFF2-40B4-BE49-F238E27FC236}">
+                <a16:creationId xmlns:a16="http://schemas.microsoft.com/office/drawing/2014/main" id="{41034C29-7B1B-FC99-B3E1-C75A4DC6E251}"/>
+              </a:ext>
+            </a:extLst>
+          </p:cNvPr>
           <p:cNvSpPr>
             <a:spLocks noGrp="1"/>
           </p:cNvSpPr>
@@ -4843,7 +5011,7 @@
     </p:spTree>
     <p:extLst>
       <p:ext uri="{BB962C8B-B14F-4D97-AF65-F5344CB8AC3E}">
-        <p14:creationId xmlns:p14="http://schemas.microsoft.com/office/powerpoint/2010/main" val="1024086991"/>
+        <p14:creationId xmlns:p14="http://schemas.microsoft.com/office/powerpoint/2010/main" val="3300186690"/>
       </p:ext>
     </p:extLst>
   </p:cSld>
@@ -5597,6 +5765,36 @@
           </a:p>
         </p:txBody>
       </p:sp>
+      <p:pic>
+        <p:nvPicPr>
+          <p:cNvPr id="10" name="Picture 9">
+            <a:extLst>
+              <a:ext uri="{FF2B5EF4-FFF2-40B4-BE49-F238E27FC236}">
+                <a16:creationId xmlns:a16="http://schemas.microsoft.com/office/drawing/2014/main" id="{C7A26A3A-B819-168E-0F0E-699F46C6248D}"/>
+              </a:ext>
+            </a:extLst>
+          </p:cNvPr>
+          <p:cNvPicPr>
+            <a:picLocks noChangeAspect="1"/>
+          </p:cNvPicPr>
+          <p:nvPr/>
+        </p:nvPicPr>
+        <p:blipFill>
+          <a:blip r:embed="rId3"/>
+          <a:stretch>
+            <a:fillRect/>
+          </a:stretch>
+        </p:blipFill>
+        <p:spPr>
+          <a:xfrm>
+            <a:off x="5646420" y="0"/>
+            <a:ext cx="3497580" cy="4663440"/>
+          </a:xfrm>
+          <a:prstGeom prst="rect">
+            <a:avLst/>
+          </a:prstGeom>
+        </p:spPr>
+      </p:pic>
     </p:spTree>
   </p:cSld>
   <p:clrMapOvr>
@@ -5606,6 +5804,1149 @@
 </file>
 
 <file path=ppt/slides/slide10.xml><?xml version="1.0" encoding="utf-8"?>
+<p:sld xmlns:a="http://schemas.openxmlformats.org/drawingml/2006/main" xmlns:r="http://schemas.openxmlformats.org/officeDocument/2006/relationships" xmlns:p="http://schemas.openxmlformats.org/presentationml/2006/main">
+  <p:cSld name="Slide 7">
+    <p:bg>
+      <p:bgPr>
+        <a:solidFill>
+          <a:srgbClr val="F4F7FB"/>
+        </a:solidFill>
+        <a:effectLst/>
+      </p:bgPr>
+    </p:bg>
+    <p:spTree>
+      <p:nvGrpSpPr>
+        <p:cNvPr id="1" name=""/>
+        <p:cNvGrpSpPr/>
+        <p:nvPr/>
+      </p:nvGrpSpPr>
+      <p:grpSpPr>
+        <a:xfrm>
+          <a:off x="0" y="0"/>
+          <a:ext cx="0" cy="0"/>
+          <a:chOff x="0" y="0"/>
+          <a:chExt cx="0" cy="0"/>
+        </a:xfrm>
+      </p:grpSpPr>
+      <p:sp>
+        <p:nvSpPr>
+          <p:cNvPr id="2" name="Text 0"/>
+          <p:cNvSpPr/>
+          <p:nvPr/>
+        </p:nvSpPr>
+        <p:spPr>
+          <a:xfrm>
+            <a:off x="457200" y="228600"/>
+            <a:ext cx="8229600" cy="594360"/>
+          </a:xfrm>
+          <a:prstGeom prst="rect">
+            <a:avLst/>
+          </a:prstGeom>
+          <a:noFill/>
+          <a:ln/>
+        </p:spPr>
+        <p:txBody>
+          <a:bodyPr wrap="square" rtlCol="0" anchor="ctr"/>
+          <a:lstStyle/>
+          <a:p>
+            <a:pPr marL="0" indent="0">
+              <a:buNone/>
+            </a:pPr>
+            <a:r>
+              <a:rPr lang="en-US" sz="3000" b="1" dirty="0">
+                <a:solidFill>
+                  <a:srgbClr val="0A2342"/>
+                </a:solidFill>
+              </a:rPr>
+              <a:t>FY2025-26: A Record Year</a:t>
+            </a:r>
+            <a:endParaRPr lang="en-US" sz="3000" dirty="0"/>
+          </a:p>
+        </p:txBody>
+      </p:sp>
+      <p:sp>
+        <p:nvSpPr>
+          <p:cNvPr id="3" name="Shape 1"/>
+          <p:cNvSpPr/>
+          <p:nvPr/>
+        </p:nvSpPr>
+        <p:spPr>
+          <a:xfrm>
+            <a:off x="320040" y="1005840"/>
+            <a:ext cx="1965960" cy="1554480"/>
+          </a:xfrm>
+          <a:prstGeom prst="rect">
+            <a:avLst/>
+          </a:prstGeom>
+          <a:solidFill>
+            <a:srgbClr val="FFFFFF"/>
+          </a:solidFill>
+          <a:ln w="6350">
+            <a:solidFill>
+              <a:srgbClr val="E2E8F0"/>
+            </a:solidFill>
+            <a:prstDash val="solid"/>
+          </a:ln>
+          <a:effectLst>
+            <a:outerShdw blurRad="101600" dist="38100" dir="8100000" algn="bl" rotWithShape="0">
+              <a:srgbClr val="000000">
+                <a:alpha val="12000"/>
+              </a:srgbClr>
+            </a:outerShdw>
+          </a:effectLst>
+        </p:spPr>
+        <p:txBody>
+          <a:bodyPr/>
+          <a:lstStyle/>
+          <a:p>
+            <a:endParaRPr lang="en-US"/>
+          </a:p>
+        </p:txBody>
+      </p:sp>
+      <p:sp>
+        <p:nvSpPr>
+          <p:cNvPr id="4" name="Shape 2"/>
+          <p:cNvSpPr/>
+          <p:nvPr/>
+        </p:nvSpPr>
+        <p:spPr>
+          <a:xfrm>
+            <a:off x="320040" y="1005840"/>
+            <a:ext cx="1965960" cy="64008"/>
+          </a:xfrm>
+          <a:prstGeom prst="rect">
+            <a:avLst/>
+          </a:prstGeom>
+          <a:solidFill>
+            <a:srgbClr val="1A5C9C"/>
+          </a:solidFill>
+          <a:ln/>
+        </p:spPr>
+        <p:txBody>
+          <a:bodyPr/>
+          <a:lstStyle/>
+          <a:p>
+            <a:endParaRPr lang="en-US"/>
+          </a:p>
+        </p:txBody>
+      </p:sp>
+      <p:sp>
+        <p:nvSpPr>
+          <p:cNvPr id="5" name="Text 3"/>
+          <p:cNvSpPr/>
+          <p:nvPr/>
+        </p:nvSpPr>
+        <p:spPr>
+          <a:xfrm>
+            <a:off x="320040" y="1170432"/>
+            <a:ext cx="1965960" cy="685800"/>
+          </a:xfrm>
+          <a:prstGeom prst="rect">
+            <a:avLst/>
+          </a:prstGeom>
+          <a:noFill/>
+          <a:ln/>
+        </p:spPr>
+        <p:txBody>
+          <a:bodyPr wrap="square" lIns="0" tIns="0" rIns="0" bIns="0" rtlCol="0" anchor="ctr"/>
+          <a:lstStyle/>
+          <a:p>
+            <a:pPr marL="0" indent="0" algn="ctr">
+              <a:buNone/>
+            </a:pPr>
+            <a:r>
+              <a:rPr lang="en-US" sz="3800" b="1" dirty="0">
+                <a:solidFill>
+                  <a:srgbClr val="1A5C9C"/>
+                </a:solidFill>
+              </a:rPr>
+              <a:t>37,173</a:t>
+            </a:r>
+            <a:endParaRPr lang="en-US" sz="3800" dirty="0"/>
+          </a:p>
+        </p:txBody>
+      </p:sp>
+      <p:sp>
+        <p:nvSpPr>
+          <p:cNvPr id="6" name="Text 4"/>
+          <p:cNvSpPr/>
+          <p:nvPr/>
+        </p:nvSpPr>
+        <p:spPr>
+          <a:xfrm>
+            <a:off x="429768" y="1828800"/>
+            <a:ext cx="1746504" cy="320040"/>
+          </a:xfrm>
+          <a:prstGeom prst="rect">
+            <a:avLst/>
+          </a:prstGeom>
+          <a:noFill/>
+          <a:ln/>
+        </p:spPr>
+        <p:txBody>
+          <a:bodyPr wrap="square" lIns="0" tIns="0" rIns="0" bIns="0" rtlCol="0" anchor="ctr"/>
+          <a:lstStyle/>
+          <a:p>
+            <a:pPr marL="0" indent="0" algn="ctr">
+              <a:buNone/>
+            </a:pPr>
+            <a:r>
+              <a:rPr lang="en-US" sz="1300" b="1" dirty="0">
+                <a:solidFill>
+                  <a:srgbClr val="334155"/>
+                </a:solidFill>
+              </a:rPr>
+              <a:t>Riders to date</a:t>
+            </a:r>
+            <a:endParaRPr lang="en-US" sz="1300" dirty="0"/>
+          </a:p>
+        </p:txBody>
+      </p:sp>
+      <p:sp>
+        <p:nvSpPr>
+          <p:cNvPr id="7" name="Text 5"/>
+          <p:cNvSpPr/>
+          <p:nvPr/>
+        </p:nvSpPr>
+        <p:spPr>
+          <a:xfrm>
+            <a:off x="411480" y="2103120"/>
+            <a:ext cx="1783080" cy="228600"/>
+          </a:xfrm>
+          <a:prstGeom prst="rect">
+            <a:avLst/>
+          </a:prstGeom>
+          <a:noFill/>
+          <a:ln/>
+        </p:spPr>
+        <p:txBody>
+          <a:bodyPr wrap="square" lIns="0" tIns="0" rIns="0" bIns="0" rtlCol="0" anchor="ctr"/>
+          <a:lstStyle/>
+          <a:p>
+            <a:pPr marL="0" indent="0" algn="ctr">
+              <a:buNone/>
+            </a:pPr>
+            <a:r>
+              <a:rPr lang="en-US" sz="1000" dirty="0">
+                <a:solidFill>
+                  <a:srgbClr val="64748B"/>
+                </a:solidFill>
+              </a:rPr>
+              <a:t>Aug 2025 – May 2026</a:t>
+            </a:r>
+            <a:endParaRPr lang="en-US" sz="1000" dirty="0"/>
+          </a:p>
+        </p:txBody>
+      </p:sp>
+      <p:sp>
+        <p:nvSpPr>
+          <p:cNvPr id="8" name="Shape 6"/>
+          <p:cNvSpPr/>
+          <p:nvPr/>
+        </p:nvSpPr>
+        <p:spPr>
+          <a:xfrm>
+            <a:off x="2468880" y="1005840"/>
+            <a:ext cx="1965960" cy="1554480"/>
+          </a:xfrm>
+          <a:prstGeom prst="rect">
+            <a:avLst/>
+          </a:prstGeom>
+          <a:solidFill>
+            <a:srgbClr val="FFFFFF"/>
+          </a:solidFill>
+          <a:ln w="6350">
+            <a:solidFill>
+              <a:srgbClr val="E2E8F0"/>
+            </a:solidFill>
+            <a:prstDash val="solid"/>
+          </a:ln>
+          <a:effectLst>
+            <a:outerShdw blurRad="101600" dist="38100" dir="8100000" algn="bl" rotWithShape="0">
+              <a:srgbClr val="000000">
+                <a:alpha val="12000"/>
+              </a:srgbClr>
+            </a:outerShdw>
+          </a:effectLst>
+        </p:spPr>
+        <p:txBody>
+          <a:bodyPr/>
+          <a:lstStyle/>
+          <a:p>
+            <a:endParaRPr lang="en-US"/>
+          </a:p>
+        </p:txBody>
+      </p:sp>
+      <p:sp>
+        <p:nvSpPr>
+          <p:cNvPr id="9" name="Shape 7"/>
+          <p:cNvSpPr/>
+          <p:nvPr/>
+        </p:nvSpPr>
+        <p:spPr>
+          <a:xfrm>
+            <a:off x="2468880" y="1005840"/>
+            <a:ext cx="1965960" cy="64008"/>
+          </a:xfrm>
+          <a:prstGeom prst="rect">
+            <a:avLst/>
+          </a:prstGeom>
+          <a:solidFill>
+            <a:srgbClr val="1D9E75"/>
+          </a:solidFill>
+          <a:ln/>
+        </p:spPr>
+        <p:txBody>
+          <a:bodyPr/>
+          <a:lstStyle/>
+          <a:p>
+            <a:endParaRPr lang="en-US"/>
+          </a:p>
+        </p:txBody>
+      </p:sp>
+      <p:sp>
+        <p:nvSpPr>
+          <p:cNvPr id="10" name="Text 8"/>
+          <p:cNvSpPr/>
+          <p:nvPr/>
+        </p:nvSpPr>
+        <p:spPr>
+          <a:xfrm>
+            <a:off x="2468880" y="1170432"/>
+            <a:ext cx="1965960" cy="685800"/>
+          </a:xfrm>
+          <a:prstGeom prst="rect">
+            <a:avLst/>
+          </a:prstGeom>
+          <a:noFill/>
+          <a:ln/>
+        </p:spPr>
+        <p:txBody>
+          <a:bodyPr wrap="square" lIns="0" tIns="0" rIns="0" bIns="0" rtlCol="0" anchor="ctr"/>
+          <a:lstStyle/>
+          <a:p>
+            <a:pPr marL="0" indent="0" algn="ctr">
+              <a:buNone/>
+            </a:pPr>
+            <a:r>
+              <a:rPr lang="en-US" sz="3800" b="1" dirty="0">
+                <a:solidFill>
+                  <a:srgbClr val="1D9E75"/>
+                </a:solidFill>
+              </a:rPr>
+              <a:t>+19%</a:t>
+            </a:r>
+            <a:endParaRPr lang="en-US" sz="3800" dirty="0"/>
+          </a:p>
+        </p:txBody>
+      </p:sp>
+      <p:sp>
+        <p:nvSpPr>
+          <p:cNvPr id="11" name="Text 9"/>
+          <p:cNvSpPr/>
+          <p:nvPr/>
+        </p:nvSpPr>
+        <p:spPr>
+          <a:xfrm>
+            <a:off x="2578608" y="1828800"/>
+            <a:ext cx="1746504" cy="320040"/>
+          </a:xfrm>
+          <a:prstGeom prst="rect">
+            <a:avLst/>
+          </a:prstGeom>
+          <a:noFill/>
+          <a:ln/>
+        </p:spPr>
+        <p:txBody>
+          <a:bodyPr wrap="square" lIns="0" tIns="0" rIns="0" bIns="0" rtlCol="0" anchor="ctr"/>
+          <a:lstStyle/>
+          <a:p>
+            <a:pPr marL="0" indent="0" algn="ctr">
+              <a:buNone/>
+            </a:pPr>
+            <a:r>
+              <a:rPr lang="en-US" sz="1300" b="1" dirty="0">
+                <a:solidFill>
+                  <a:srgbClr val="334155"/>
+                </a:solidFill>
+              </a:rPr>
+              <a:t>Growth vs FY24-25</a:t>
+            </a:r>
+            <a:endParaRPr lang="en-US" sz="1300" dirty="0"/>
+          </a:p>
+        </p:txBody>
+      </p:sp>
+      <p:sp>
+        <p:nvSpPr>
+          <p:cNvPr id="12" name="Text 10"/>
+          <p:cNvSpPr/>
+          <p:nvPr/>
+        </p:nvSpPr>
+        <p:spPr>
+          <a:xfrm>
+            <a:off x="2560320" y="2103120"/>
+            <a:ext cx="1783080" cy="228600"/>
+          </a:xfrm>
+          <a:prstGeom prst="rect">
+            <a:avLst/>
+          </a:prstGeom>
+          <a:noFill/>
+          <a:ln/>
+        </p:spPr>
+        <p:txBody>
+          <a:bodyPr wrap="square" lIns="0" tIns="0" rIns="0" bIns="0" rtlCol="0" anchor="ctr"/>
+          <a:lstStyle/>
+          <a:p>
+            <a:pPr marL="0" indent="0" algn="ctr">
+              <a:buNone/>
+            </a:pPr>
+            <a:r>
+              <a:rPr lang="en-US" sz="1000" dirty="0">
+                <a:solidFill>
+                  <a:srgbClr val="64748B"/>
+                </a:solidFill>
+              </a:rPr>
+              <a:t>31,306 full-year prior</a:t>
+            </a:r>
+            <a:endParaRPr lang="en-US" sz="1000" dirty="0"/>
+          </a:p>
+        </p:txBody>
+      </p:sp>
+      <p:sp>
+        <p:nvSpPr>
+          <p:cNvPr id="13" name="Shape 11"/>
+          <p:cNvSpPr/>
+          <p:nvPr/>
+        </p:nvSpPr>
+        <p:spPr>
+          <a:xfrm>
+            <a:off x="4617720" y="1005840"/>
+            <a:ext cx="1965960" cy="1554480"/>
+          </a:xfrm>
+          <a:prstGeom prst="rect">
+            <a:avLst/>
+          </a:prstGeom>
+          <a:solidFill>
+            <a:srgbClr val="FFFFFF"/>
+          </a:solidFill>
+          <a:ln w="6350">
+            <a:solidFill>
+              <a:srgbClr val="E2E8F0"/>
+            </a:solidFill>
+            <a:prstDash val="solid"/>
+          </a:ln>
+          <a:effectLst>
+            <a:outerShdw blurRad="101600" dist="38100" dir="8100000" algn="bl" rotWithShape="0">
+              <a:srgbClr val="000000">
+                <a:alpha val="12000"/>
+              </a:srgbClr>
+            </a:outerShdw>
+          </a:effectLst>
+        </p:spPr>
+        <p:txBody>
+          <a:bodyPr/>
+          <a:lstStyle/>
+          <a:p>
+            <a:endParaRPr lang="en-US"/>
+          </a:p>
+        </p:txBody>
+      </p:sp>
+      <p:sp>
+        <p:nvSpPr>
+          <p:cNvPr id="14" name="Shape 12"/>
+          <p:cNvSpPr/>
+          <p:nvPr/>
+        </p:nvSpPr>
+        <p:spPr>
+          <a:xfrm>
+            <a:off x="4617720" y="1005840"/>
+            <a:ext cx="1965960" cy="64008"/>
+          </a:xfrm>
+          <a:prstGeom prst="rect">
+            <a:avLst/>
+          </a:prstGeom>
+          <a:solidFill>
+            <a:srgbClr val="D85A30"/>
+          </a:solidFill>
+          <a:ln/>
+        </p:spPr>
+        <p:txBody>
+          <a:bodyPr/>
+          <a:lstStyle/>
+          <a:p>
+            <a:endParaRPr lang="en-US"/>
+          </a:p>
+        </p:txBody>
+      </p:sp>
+      <p:sp>
+        <p:nvSpPr>
+          <p:cNvPr id="15" name="Text 13"/>
+          <p:cNvSpPr/>
+          <p:nvPr/>
+        </p:nvSpPr>
+        <p:spPr>
+          <a:xfrm>
+            <a:off x="4617720" y="1170432"/>
+            <a:ext cx="1965960" cy="685800"/>
+          </a:xfrm>
+          <a:prstGeom prst="rect">
+            <a:avLst/>
+          </a:prstGeom>
+          <a:noFill/>
+          <a:ln/>
+        </p:spPr>
+        <p:txBody>
+          <a:bodyPr wrap="square" lIns="0" tIns="0" rIns="0" bIns="0" rtlCol="0" anchor="ctr"/>
+          <a:lstStyle/>
+          <a:p>
+            <a:pPr marL="0" indent="0" algn="ctr">
+              <a:buNone/>
+            </a:pPr>
+            <a:r>
+              <a:rPr lang="en-US" sz="3800" b="1" dirty="0">
+                <a:solidFill>
+                  <a:srgbClr val="D85A30"/>
+                </a:solidFill>
+              </a:rPr>
+              <a:t>6,501</a:t>
+            </a:r>
+            <a:endParaRPr lang="en-US" sz="3800" dirty="0"/>
+          </a:p>
+        </p:txBody>
+      </p:sp>
+      <p:sp>
+        <p:nvSpPr>
+          <p:cNvPr id="16" name="Text 14"/>
+          <p:cNvSpPr/>
+          <p:nvPr/>
+        </p:nvSpPr>
+        <p:spPr>
+          <a:xfrm>
+            <a:off x="4727448" y="1828800"/>
+            <a:ext cx="1746504" cy="320040"/>
+          </a:xfrm>
+          <a:prstGeom prst="rect">
+            <a:avLst/>
+          </a:prstGeom>
+          <a:noFill/>
+          <a:ln/>
+        </p:spPr>
+        <p:txBody>
+          <a:bodyPr wrap="square" lIns="0" tIns="0" rIns="0" bIns="0" rtlCol="0" anchor="ctr"/>
+          <a:lstStyle/>
+          <a:p>
+            <a:pPr marL="0" indent="0" algn="ctr">
+              <a:buNone/>
+            </a:pPr>
+            <a:r>
+              <a:rPr lang="en-US" sz="1300" b="1" dirty="0">
+                <a:solidFill>
+                  <a:srgbClr val="334155"/>
+                </a:solidFill>
+              </a:rPr>
+              <a:t>February 2026</a:t>
+            </a:r>
+            <a:endParaRPr lang="en-US" sz="1300" dirty="0"/>
+          </a:p>
+        </p:txBody>
+      </p:sp>
+      <p:sp>
+        <p:nvSpPr>
+          <p:cNvPr id="17" name="Text 15"/>
+          <p:cNvSpPr/>
+          <p:nvPr/>
+        </p:nvSpPr>
+        <p:spPr>
+          <a:xfrm>
+            <a:off x="4709160" y="2103120"/>
+            <a:ext cx="1783080" cy="228600"/>
+          </a:xfrm>
+          <a:prstGeom prst="rect">
+            <a:avLst/>
+          </a:prstGeom>
+          <a:noFill/>
+          <a:ln/>
+        </p:spPr>
+        <p:txBody>
+          <a:bodyPr wrap="square" lIns="0" tIns="0" rIns="0" bIns="0" rtlCol="0" anchor="ctr"/>
+          <a:lstStyle/>
+          <a:p>
+            <a:pPr marL="0" indent="0" algn="ctr">
+              <a:buNone/>
+            </a:pPr>
+            <a:r>
+              <a:rPr lang="en-US" sz="1000" dirty="0">
+                <a:solidFill>
+                  <a:srgbClr val="64748B"/>
+                </a:solidFill>
+              </a:rPr>
+              <a:t>Highest single month ever</a:t>
+            </a:r>
+            <a:endParaRPr lang="en-US" sz="1000" dirty="0"/>
+          </a:p>
+        </p:txBody>
+      </p:sp>
+      <p:sp>
+        <p:nvSpPr>
+          <p:cNvPr id="18" name="Shape 16"/>
+          <p:cNvSpPr/>
+          <p:nvPr/>
+        </p:nvSpPr>
+        <p:spPr>
+          <a:xfrm>
+            <a:off x="6766560" y="1005840"/>
+            <a:ext cx="1965960" cy="1554480"/>
+          </a:xfrm>
+          <a:prstGeom prst="rect">
+            <a:avLst/>
+          </a:prstGeom>
+          <a:solidFill>
+            <a:srgbClr val="FFFFFF"/>
+          </a:solidFill>
+          <a:ln w="6350">
+            <a:solidFill>
+              <a:srgbClr val="E2E8F0"/>
+            </a:solidFill>
+            <a:prstDash val="solid"/>
+          </a:ln>
+          <a:effectLst>
+            <a:outerShdw blurRad="101600" dist="38100" dir="8100000" algn="bl" rotWithShape="0">
+              <a:srgbClr val="000000">
+                <a:alpha val="12000"/>
+              </a:srgbClr>
+            </a:outerShdw>
+          </a:effectLst>
+        </p:spPr>
+        <p:txBody>
+          <a:bodyPr/>
+          <a:lstStyle/>
+          <a:p>
+            <a:endParaRPr lang="en-US"/>
+          </a:p>
+        </p:txBody>
+      </p:sp>
+      <p:sp>
+        <p:nvSpPr>
+          <p:cNvPr id="19" name="Shape 17"/>
+          <p:cNvSpPr/>
+          <p:nvPr/>
+        </p:nvSpPr>
+        <p:spPr>
+          <a:xfrm>
+            <a:off x="6766560" y="1005840"/>
+            <a:ext cx="1965960" cy="64008"/>
+          </a:xfrm>
+          <a:prstGeom prst="rect">
+            <a:avLst/>
+          </a:prstGeom>
+          <a:solidFill>
+            <a:srgbClr val="BA7517"/>
+          </a:solidFill>
+          <a:ln/>
+        </p:spPr>
+        <p:txBody>
+          <a:bodyPr/>
+          <a:lstStyle/>
+          <a:p>
+            <a:endParaRPr lang="en-US"/>
+          </a:p>
+        </p:txBody>
+      </p:sp>
+      <p:sp>
+        <p:nvSpPr>
+          <p:cNvPr id="20" name="Text 18"/>
+          <p:cNvSpPr/>
+          <p:nvPr/>
+        </p:nvSpPr>
+        <p:spPr>
+          <a:xfrm>
+            <a:off x="6766560" y="1170432"/>
+            <a:ext cx="1965960" cy="685800"/>
+          </a:xfrm>
+          <a:prstGeom prst="rect">
+            <a:avLst/>
+          </a:prstGeom>
+          <a:noFill/>
+          <a:ln/>
+        </p:spPr>
+        <p:txBody>
+          <a:bodyPr wrap="square" lIns="0" tIns="0" rIns="0" bIns="0" rtlCol="0" anchor="ctr"/>
+          <a:lstStyle/>
+          <a:p>
+            <a:pPr marL="0" indent="0" algn="ctr">
+              <a:buNone/>
+            </a:pPr>
+            <a:r>
+              <a:rPr lang="en-US" sz="3800" b="1" dirty="0">
+                <a:solidFill>
+                  <a:srgbClr val="BA7517"/>
+                </a:solidFill>
+              </a:rPr>
+              <a:t>12.1+</a:t>
+            </a:r>
+            <a:endParaRPr lang="en-US" sz="3800" dirty="0"/>
+          </a:p>
+        </p:txBody>
+      </p:sp>
+      <p:sp>
+        <p:nvSpPr>
+          <p:cNvPr id="21" name="Text 19"/>
+          <p:cNvSpPr/>
+          <p:nvPr/>
+        </p:nvSpPr>
+        <p:spPr>
+          <a:xfrm>
+            <a:off x="6876288" y="1828800"/>
+            <a:ext cx="1746504" cy="320040"/>
+          </a:xfrm>
+          <a:prstGeom prst="rect">
+            <a:avLst/>
+          </a:prstGeom>
+          <a:noFill/>
+          <a:ln/>
+        </p:spPr>
+        <p:txBody>
+          <a:bodyPr wrap="square" lIns="0" tIns="0" rIns="0" bIns="0" rtlCol="0" anchor="ctr"/>
+          <a:lstStyle/>
+          <a:p>
+            <a:pPr marL="0" indent="0" algn="ctr">
+              <a:buNone/>
+            </a:pPr>
+            <a:r>
+              <a:rPr lang="en-US" sz="1300" b="1" dirty="0">
+                <a:solidFill>
+                  <a:srgbClr val="334155"/>
+                </a:solidFill>
+              </a:rPr>
+              <a:t>Riders per 100</a:t>
+            </a:r>
+            <a:endParaRPr lang="en-US" sz="1300" dirty="0"/>
+          </a:p>
+        </p:txBody>
+      </p:sp>
+      <p:sp>
+        <p:nvSpPr>
+          <p:cNvPr id="22" name="Text 20"/>
+          <p:cNvSpPr/>
+          <p:nvPr/>
+        </p:nvSpPr>
+        <p:spPr>
+          <a:xfrm>
+            <a:off x="6858000" y="2103120"/>
+            <a:ext cx="1783080" cy="228600"/>
+          </a:xfrm>
+          <a:prstGeom prst="rect">
+            <a:avLst/>
+          </a:prstGeom>
+          <a:noFill/>
+          <a:ln/>
+        </p:spPr>
+        <p:txBody>
+          <a:bodyPr wrap="square" lIns="0" tIns="0" rIns="0" bIns="0" rtlCol="0" anchor="ctr"/>
+          <a:lstStyle/>
+          <a:p>
+            <a:pPr marL="0" indent="0" algn="ctr">
+              <a:buNone/>
+            </a:pPr>
+            <a:r>
+              <a:rPr lang="en-US" sz="1000" dirty="0">
+                <a:solidFill>
+                  <a:srgbClr val="64748B"/>
+                </a:solidFill>
+              </a:rPr>
+              <a:t>Students enrolled</a:t>
+            </a:r>
+            <a:endParaRPr lang="en-US" sz="1000" dirty="0"/>
+          </a:p>
+        </p:txBody>
+      </p:sp>
+      <p:sp>
+        <p:nvSpPr>
+          <p:cNvPr id="23" name="Text 21"/>
+          <p:cNvSpPr/>
+          <p:nvPr/>
+        </p:nvSpPr>
+        <p:spPr>
+          <a:xfrm>
+            <a:off x="457200" y="2697480"/>
+            <a:ext cx="8229600" cy="320040"/>
+          </a:xfrm>
+          <a:prstGeom prst="rect">
+            <a:avLst/>
+          </a:prstGeom>
+          <a:noFill/>
+          <a:ln/>
+        </p:spPr>
+        <p:txBody>
+          <a:bodyPr wrap="square" rtlCol="0" anchor="ctr"/>
+          <a:lstStyle/>
+          <a:p>
+            <a:pPr marL="0" indent="0">
+              <a:buNone/>
+            </a:pPr>
+            <a:r>
+              <a:rPr lang="en-US" sz="1300" b="1" dirty="0">
+                <a:solidFill>
+                  <a:srgbClr val="334155"/>
+                </a:solidFill>
+              </a:rPr>
+              <a:t>Every month in FY25-26 exceeded the same month last year</a:t>
+            </a:r>
+            <a:endParaRPr lang="en-US" sz="1300" dirty="0"/>
+          </a:p>
+        </p:txBody>
+      </p:sp>
+      <p:graphicFrame>
+        <p:nvGraphicFramePr>
+          <p:cNvPr id="24" name="Chart 0"/>
+          <p:cNvGraphicFramePr/>
+          <p:nvPr/>
+        </p:nvGraphicFramePr>
+        <p:xfrm>
+          <a:off x="365760" y="3017520"/>
+          <a:ext cx="8412480" cy="1920240"/>
+        </p:xfrm>
+        <a:graphic>
+          <a:graphicData uri="http://schemas.openxmlformats.org/drawingml/2006/chart">
+            <c:chart xmlns:c="http://schemas.openxmlformats.org/drawingml/2006/chart" xmlns:r="http://schemas.openxmlformats.org/officeDocument/2006/relationships" r:id="rId3"/>
+          </a:graphicData>
+        </a:graphic>
+      </p:graphicFrame>
+    </p:spTree>
+  </p:cSld>
+  <p:clrMapOvr>
+    <a:masterClrMapping/>
+  </p:clrMapOvr>
+</p:sld>
+</file>
+
+<file path=ppt/slides/slide11.xml><?xml version="1.0" encoding="utf-8"?>
+<p:sld xmlns:a="http://schemas.openxmlformats.org/drawingml/2006/main" xmlns:r="http://schemas.openxmlformats.org/officeDocument/2006/relationships" xmlns:p="http://schemas.openxmlformats.org/presentationml/2006/main">
+  <p:cSld name="Slide 8">
+    <p:bg>
+      <p:bgPr>
+        <a:solidFill>
+          <a:srgbClr val="F4F7FB"/>
+        </a:solidFill>
+        <a:effectLst/>
+      </p:bgPr>
+    </p:bg>
+    <p:spTree>
+      <p:nvGrpSpPr>
+        <p:cNvPr id="1" name=""/>
+        <p:cNvGrpSpPr/>
+        <p:nvPr/>
+      </p:nvGrpSpPr>
+      <p:grpSpPr>
+        <a:xfrm>
+          <a:off x="0" y="0"/>
+          <a:ext cx="0" cy="0"/>
+          <a:chOff x="0" y="0"/>
+          <a:chExt cx="0" cy="0"/>
+        </a:xfrm>
+      </p:grpSpPr>
+      <p:sp>
+        <p:nvSpPr>
+          <p:cNvPr id="2" name="Text 0"/>
+          <p:cNvSpPr/>
+          <p:nvPr/>
+        </p:nvSpPr>
+        <p:spPr>
+          <a:xfrm>
+            <a:off x="457200" y="228600"/>
+            <a:ext cx="8229600" cy="548640"/>
+          </a:xfrm>
+          <a:prstGeom prst="rect">
+            <a:avLst/>
+          </a:prstGeom>
+          <a:noFill/>
+          <a:ln/>
+        </p:spPr>
+        <p:txBody>
+          <a:bodyPr wrap="square" rtlCol="0" anchor="ctr"/>
+          <a:lstStyle/>
+          <a:p>
+            <a:pPr marL="0" indent="0">
+              <a:buNone/>
+            </a:pPr>
+            <a:r>
+              <a:rPr lang="en-US" sz="2800" b="1" dirty="0">
+                <a:solidFill>
+                  <a:srgbClr val="0A2342"/>
+                </a:solidFill>
+              </a:rPr>
+              <a:t>Service Demand Across All Three Routes</a:t>
+            </a:r>
+            <a:endParaRPr lang="en-US" sz="2800" dirty="0"/>
+          </a:p>
+        </p:txBody>
+      </p:sp>
+      <p:sp>
+        <p:nvSpPr>
+          <p:cNvPr id="3" name="Text 1"/>
+          <p:cNvSpPr/>
+          <p:nvPr/>
+        </p:nvSpPr>
+        <p:spPr>
+          <a:xfrm>
+            <a:off x="457200" y="777240"/>
+            <a:ext cx="8229600" cy="274320"/>
+          </a:xfrm>
+          <a:prstGeom prst="rect">
+            <a:avLst/>
+          </a:prstGeom>
+          <a:noFill/>
+          <a:ln/>
+        </p:spPr>
+        <p:txBody>
+          <a:bodyPr wrap="square" rtlCol="0" anchor="ctr"/>
+          <a:lstStyle/>
+          <a:p>
+            <a:pPr marL="0" indent="0">
+              <a:buNone/>
+            </a:pPr>
+            <a:r>
+              <a:rPr lang="en-US" sz="1200" dirty="0">
+                <a:solidFill>
+                  <a:srgbClr val="64748B"/>
+                </a:solidFill>
+              </a:rPr>
+              <a:t>Monthly ridership by route — FY2024-25 (Aug–Feb, full data)</a:t>
+            </a:r>
+            <a:endParaRPr lang="en-US" sz="1200" dirty="0"/>
+          </a:p>
+        </p:txBody>
+      </p:sp>
+      <p:graphicFrame>
+        <p:nvGraphicFramePr>
+          <p:cNvPr id="4" name="Chart 0"/>
+          <p:cNvGraphicFramePr/>
+          <p:nvPr/>
+        </p:nvGraphicFramePr>
+        <p:xfrm>
+          <a:off x="365760" y="1097280"/>
+          <a:ext cx="8412480" cy="3383280"/>
+        </p:xfrm>
+        <a:graphic>
+          <a:graphicData uri="http://schemas.openxmlformats.org/drawingml/2006/chart">
+            <c:chart xmlns:c="http://schemas.openxmlformats.org/drawingml/2006/chart" xmlns:r="http://schemas.openxmlformats.org/officeDocument/2006/relationships" r:id="rId3"/>
+          </a:graphicData>
+        </a:graphic>
+      </p:graphicFrame>
+      <p:sp>
+        <p:nvSpPr>
+          <p:cNvPr id="5" name="Text 2"/>
+          <p:cNvSpPr/>
+          <p:nvPr/>
+        </p:nvSpPr>
+        <p:spPr>
+          <a:xfrm>
+            <a:off x="457200" y="4617720"/>
+            <a:ext cx="8229600" cy="411480"/>
+          </a:xfrm>
+          <a:prstGeom prst="rect">
+            <a:avLst/>
+          </a:prstGeom>
+          <a:noFill/>
+          <a:ln/>
+        </p:spPr>
+        <p:txBody>
+          <a:bodyPr wrap="square" rtlCol="0" anchor="ctr"/>
+          <a:lstStyle/>
+          <a:p>
+            <a:pPr marL="0" indent="0">
+              <a:buNone/>
+            </a:pPr>
+            <a:r>
+              <a:rPr lang="en-US" sz="1100" i="1" dirty="0">
+                <a:solidFill>
+                  <a:srgbClr val="64748B"/>
+                </a:solidFill>
+              </a:rPr>
+              <a:t>Ram Force One AM carries the majority of riders — but all three routes show consistent demand throughout the semester.</a:t>
+            </a:r>
+            <a:endParaRPr lang="en-US" sz="1100" dirty="0"/>
+          </a:p>
+        </p:txBody>
+      </p:sp>
+    </p:spTree>
+  </p:cSld>
+  <p:clrMapOvr>
+    <a:masterClrMapping/>
+  </p:clrMapOvr>
+</p:sld>
+</file>
+
+<file path=ppt/slides/slide12.xml><?xml version="1.0" encoding="utf-8"?>
+<p:sld xmlns:a="http://schemas.openxmlformats.org/drawingml/2006/main" xmlns:r="http://schemas.openxmlformats.org/officeDocument/2006/relationships" xmlns:p="http://schemas.openxmlformats.org/presentationml/2006/main">
+  <p:cSld name="Slide 9">
+    <p:bg>
+      <p:bgPr>
+        <a:solidFill>
+          <a:srgbClr val="0A2342"/>
+        </a:solidFill>
+        <a:effectLst/>
+      </p:bgPr>
+    </p:bg>
+    <p:spTree>
+      <p:nvGrpSpPr>
+        <p:cNvPr id="1" name=""/>
+        <p:cNvGrpSpPr/>
+        <p:nvPr/>
+      </p:nvGrpSpPr>
+      <p:grpSpPr>
+        <a:xfrm>
+          <a:off x="0" y="0"/>
+          <a:ext cx="0" cy="0"/>
+          <a:chOff x="0" y="0"/>
+          <a:chExt cx="0" cy="0"/>
+        </a:xfrm>
+      </p:grpSpPr>
+      <p:sp>
+        <p:nvSpPr>
+          <p:cNvPr id="2" name="Shape 0"/>
+          <p:cNvSpPr/>
+          <p:nvPr/>
+        </p:nvSpPr>
+        <p:spPr>
+          <a:xfrm>
+            <a:off x="0" y="0"/>
+            <a:ext cx="54864" cy="5143500"/>
+          </a:xfrm>
+          <a:prstGeom prst="rect">
+            <a:avLst/>
+          </a:prstGeom>
+          <a:solidFill>
+            <a:srgbClr val="1D9E75"/>
+          </a:solidFill>
+          <a:ln/>
+        </p:spPr>
+        <p:txBody>
+          <a:bodyPr/>
+          <a:lstStyle/>
+          <a:p>
+            <a:endParaRPr lang="en-US"/>
+          </a:p>
+        </p:txBody>
+      </p:sp>
+      <p:sp>
+        <p:nvSpPr>
+          <p:cNvPr id="3" name="Text 1"/>
+          <p:cNvSpPr/>
+          <p:nvPr/>
+        </p:nvSpPr>
+        <p:spPr>
+          <a:xfrm>
+            <a:off x="457200" y="1645920"/>
+            <a:ext cx="8229600" cy="1097280"/>
+          </a:xfrm>
+          <a:prstGeom prst="rect">
+            <a:avLst/>
+          </a:prstGeom>
+          <a:noFill/>
+          <a:ln/>
+        </p:spPr>
+        <p:txBody>
+          <a:bodyPr wrap="square" rtlCol="0" anchor="ctr"/>
+          <a:lstStyle/>
+          <a:p>
+            <a:pPr marL="0" indent="0">
+              <a:buNone/>
+            </a:pPr>
+            <a:r>
+              <a:rPr lang="en-US" sz="4000" b="1" dirty="0">
+                <a:solidFill>
+                  <a:srgbClr val="FFFFFF"/>
+                </a:solidFill>
+                <a:latin typeface="Calibri" pitchFamily="34" charset="0"/>
+                <a:ea typeface="Calibri" pitchFamily="34" charset="-122"/>
+                <a:cs typeface="Calibri" pitchFamily="34" charset="-120"/>
+              </a:rPr>
+              <a:t>Student Voice</a:t>
+            </a:r>
+            <a:endParaRPr lang="en-US" sz="4000" dirty="0"/>
+          </a:p>
+        </p:txBody>
+      </p:sp>
+      <p:sp>
+        <p:nvSpPr>
+          <p:cNvPr id="4" name="Text 2"/>
+          <p:cNvSpPr/>
+          <p:nvPr/>
+        </p:nvSpPr>
+        <p:spPr>
+          <a:xfrm>
+            <a:off x="457200" y="3105695"/>
+            <a:ext cx="8229600" cy="548640"/>
+          </a:xfrm>
+          <a:prstGeom prst="rect">
+            <a:avLst/>
+          </a:prstGeom>
+          <a:noFill/>
+          <a:ln/>
+        </p:spPr>
+        <p:txBody>
+          <a:bodyPr wrap="square" rtlCol="0" anchor="ctr"/>
+          <a:lstStyle/>
+          <a:p>
+            <a:pPr marL="0" indent="0">
+              <a:buNone/>
+            </a:pPr>
+            <a:r>
+              <a:rPr lang="en-US" sz="1800" dirty="0">
+                <a:solidFill>
+                  <a:srgbClr val="A0BDD8"/>
+                </a:solidFill>
+                <a:latin typeface="Calibri" pitchFamily="34" charset="0"/>
+                <a:ea typeface="Calibri" pitchFamily="34" charset="-122"/>
+                <a:cs typeface="Calibri" pitchFamily="34" charset="-120"/>
+              </a:rPr>
+              <a:t>445 students surveyed — Feb 17 through Mar 5, 2025.</a:t>
+            </a:r>
+            <a:endParaRPr lang="en-US" sz="1800" dirty="0"/>
+          </a:p>
+        </p:txBody>
+      </p:sp>
+      <p:pic>
+        <p:nvPicPr>
+          <p:cNvPr id="5" name="Picture 4">
+            <a:extLst>
+              <a:ext uri="{FF2B5EF4-FFF2-40B4-BE49-F238E27FC236}">
+                <a16:creationId xmlns:a16="http://schemas.microsoft.com/office/drawing/2014/main" id="{7BC07C36-AD20-9293-EBDD-DA49489A684C}"/>
+              </a:ext>
+            </a:extLst>
+          </p:cNvPr>
+          <p:cNvPicPr>
+            <a:picLocks noChangeAspect="1"/>
+          </p:cNvPicPr>
+          <p:nvPr/>
+        </p:nvPicPr>
+        <p:blipFill>
+          <a:blip r:embed="rId3"/>
+          <a:srcRect b="9684"/>
+          <a:stretch>
+            <a:fillRect/>
+          </a:stretch>
+        </p:blipFill>
+        <p:spPr>
+          <a:xfrm>
+            <a:off x="5636622" y="0"/>
+            <a:ext cx="3507377" cy="3167743"/>
+          </a:xfrm>
+          <a:prstGeom prst="rect">
+            <a:avLst/>
+          </a:prstGeom>
+        </p:spPr>
+      </p:pic>
+    </p:spTree>
+  </p:cSld>
+  <p:clrMapOvr>
+    <a:masterClrMapping/>
+  </p:clrMapOvr>
+</p:sld>
+</file>
+
+<file path=ppt/slides/slide13.xml><?xml version="1.0" encoding="utf-8"?>
 <p:sld xmlns:a="http://schemas.openxmlformats.org/drawingml/2006/main" xmlns:r="http://schemas.openxmlformats.org/officeDocument/2006/relationships" xmlns:p="http://schemas.openxmlformats.org/presentationml/2006/main">
   <p:cSld name="Slide 10">
     <p:bg>
@@ -6422,7 +7763,7 @@
 </p:sld>
 </file>
 
-<file path=ppt/slides/slide11.xml><?xml version="1.0" encoding="utf-8"?>
+<file path=ppt/slides/slide14.xml><?xml version="1.0" encoding="utf-8"?>
 <p:sld xmlns:a="http://schemas.openxmlformats.org/drawingml/2006/main" xmlns:r="http://schemas.openxmlformats.org/officeDocument/2006/relationships" xmlns:p="http://schemas.openxmlformats.org/presentationml/2006/main">
   <p:cSld name="Slide 11">
     <p:bg>
@@ -6846,7 +8187,7 @@
 </p:sld>
 </file>
 
-<file path=ppt/slides/slide12.xml><?xml version="1.0" encoding="utf-8"?>
+<file path=ppt/slides/slide15.xml><?xml version="1.0" encoding="utf-8"?>
 <p:sld xmlns:a="http://schemas.openxmlformats.org/drawingml/2006/main" xmlns:r="http://schemas.openxmlformats.org/officeDocument/2006/relationships" xmlns:p="http://schemas.openxmlformats.org/presentationml/2006/main">
   <p:cSld name="Slide 12">
     <p:bg>
@@ -7137,7 +8478,7 @@
 </p:sld>
 </file>
 
-<file path=ppt/slides/slide13.xml><?xml version="1.0" encoding="utf-8"?>
+<file path=ppt/slides/slide16.xml><?xml version="1.0" encoding="utf-8"?>
 <p:sld xmlns:a="http://schemas.openxmlformats.org/drawingml/2006/main" xmlns:r="http://schemas.openxmlformats.org/officeDocument/2006/relationships" xmlns:p="http://schemas.openxmlformats.org/presentationml/2006/main">
   <p:cSld name="Slide 13">
     <p:bg>
@@ -7710,6 +9051,37 @@
           </a:p>
         </p:txBody>
       </p:sp>
+      <p:pic>
+        <p:nvPicPr>
+          <p:cNvPr id="18" name="Picture 17">
+            <a:extLst>
+              <a:ext uri="{FF2B5EF4-FFF2-40B4-BE49-F238E27FC236}">
+                <a16:creationId xmlns:a16="http://schemas.microsoft.com/office/drawing/2014/main" id="{CB771204-A11B-8091-771F-535882E23D69}"/>
+              </a:ext>
+            </a:extLst>
+          </p:cNvPr>
+          <p:cNvPicPr>
+            <a:picLocks noChangeAspect="1"/>
+          </p:cNvPicPr>
+          <p:nvPr/>
+        </p:nvPicPr>
+        <p:blipFill>
+          <a:blip r:embed="rId3"/>
+          <a:srcRect l="39242" t="112" r="28234" b="-112"/>
+          <a:stretch>
+            <a:fillRect/>
+          </a:stretch>
+        </p:blipFill>
+        <p:spPr>
+          <a:xfrm>
+            <a:off x="6868612" y="1463040"/>
+            <a:ext cx="2001067" cy="3433420"/>
+          </a:xfrm>
+          <a:prstGeom prst="rect">
+            <a:avLst/>
+          </a:prstGeom>
+        </p:spPr>
+      </p:pic>
     </p:spTree>
   </p:cSld>
   <p:clrMapOvr>
@@ -7718,7 +9090,7 @@
 </p:sld>
 </file>
 
-<file path=ppt/slides/slide14.xml><?xml version="1.0" encoding="utf-8"?>
+<file path=ppt/slides/slide17.xml><?xml version="1.0" encoding="utf-8"?>
 <p:sld xmlns:a="http://schemas.openxmlformats.org/drawingml/2006/main" xmlns:r="http://schemas.openxmlformats.org/officeDocument/2006/relationships" xmlns:p="http://schemas.openxmlformats.org/presentationml/2006/main">
   <p:cSld name="Slide 14">
     <p:bg>
@@ -8249,6 +9621,96 @@
           </a:p>
         </p:txBody>
       </p:sp>
+      <p:pic>
+        <p:nvPicPr>
+          <p:cNvPr id="17" name="Picture 16">
+            <a:extLst>
+              <a:ext uri="{FF2B5EF4-FFF2-40B4-BE49-F238E27FC236}">
+                <a16:creationId xmlns:a16="http://schemas.microsoft.com/office/drawing/2014/main" id="{A992AC63-7043-850B-1AA7-1239F3F5CD6B}"/>
+              </a:ext>
+            </a:extLst>
+          </p:cNvPr>
+          <p:cNvPicPr>
+            <a:picLocks noChangeAspect="1"/>
+          </p:cNvPicPr>
+          <p:nvPr/>
+        </p:nvPicPr>
+        <p:blipFill>
+          <a:blip r:embed="rId3"/>
+          <a:stretch>
+            <a:fillRect/>
+          </a:stretch>
+        </p:blipFill>
+        <p:spPr>
+          <a:xfrm>
+            <a:off x="6858000" y="1463039"/>
+            <a:ext cx="2011680" cy="1476717"/>
+          </a:xfrm>
+          <a:prstGeom prst="rect">
+            <a:avLst/>
+          </a:prstGeom>
+        </p:spPr>
+      </p:pic>
+      <p:pic>
+        <p:nvPicPr>
+          <p:cNvPr id="19" name="Picture 18">
+            <a:extLst>
+              <a:ext uri="{FF2B5EF4-FFF2-40B4-BE49-F238E27FC236}">
+                <a16:creationId xmlns:a16="http://schemas.microsoft.com/office/drawing/2014/main" id="{DF82849A-FE9B-3A1A-1EAE-E7E0889A4B43}"/>
+              </a:ext>
+            </a:extLst>
+          </p:cNvPr>
+          <p:cNvPicPr>
+            <a:picLocks noChangeAspect="1"/>
+          </p:cNvPicPr>
+          <p:nvPr/>
+        </p:nvPicPr>
+        <p:blipFill>
+          <a:blip r:embed="rId4"/>
+          <a:stretch>
+            <a:fillRect/>
+          </a:stretch>
+        </p:blipFill>
+        <p:spPr>
+          <a:xfrm>
+            <a:off x="6876289" y="3617796"/>
+            <a:ext cx="2016368" cy="1368542"/>
+          </a:xfrm>
+          <a:prstGeom prst="rect">
+            <a:avLst/>
+          </a:prstGeom>
+        </p:spPr>
+      </p:pic>
+      <p:pic>
+        <p:nvPicPr>
+          <p:cNvPr id="21" name="Picture 20">
+            <a:extLst>
+              <a:ext uri="{FF2B5EF4-FFF2-40B4-BE49-F238E27FC236}">
+                <a16:creationId xmlns:a16="http://schemas.microsoft.com/office/drawing/2014/main" id="{75A4C92D-84A9-237B-276A-0B036624A991}"/>
+              </a:ext>
+            </a:extLst>
+          </p:cNvPr>
+          <p:cNvPicPr>
+            <a:picLocks noChangeAspect="1"/>
+          </p:cNvPicPr>
+          <p:nvPr/>
+        </p:nvPicPr>
+        <p:blipFill>
+          <a:blip r:embed="rId5"/>
+          <a:stretch>
+            <a:fillRect/>
+          </a:stretch>
+        </p:blipFill>
+        <p:spPr>
+          <a:xfrm>
+            <a:off x="6858000" y="2939756"/>
+            <a:ext cx="2023686" cy="678039"/>
+          </a:xfrm>
+          <a:prstGeom prst="rect">
+            <a:avLst/>
+          </a:prstGeom>
+        </p:spPr>
+      </p:pic>
     </p:spTree>
   </p:cSld>
   <p:clrMapOvr>
@@ -8257,7 +9719,7 @@
 </p:sld>
 </file>
 
-<file path=ppt/slides/slide15.xml><?xml version="1.0" encoding="utf-8"?>
+<file path=ppt/slides/slide18.xml><?xml version="1.0" encoding="utf-8"?>
 <p:sld xmlns:a="http://schemas.openxmlformats.org/drawingml/2006/main" xmlns:r="http://schemas.openxmlformats.org/officeDocument/2006/relationships" xmlns:p="http://schemas.openxmlformats.org/presentationml/2006/main">
   <p:cSld name="Slide 15">
     <p:bg>
@@ -8788,6 +10250,37 @@
           </a:p>
         </p:txBody>
       </p:sp>
+      <p:pic>
+        <p:nvPicPr>
+          <p:cNvPr id="17" name="Picture 16">
+            <a:extLst>
+              <a:ext uri="{FF2B5EF4-FFF2-40B4-BE49-F238E27FC236}">
+                <a16:creationId xmlns:a16="http://schemas.microsoft.com/office/drawing/2014/main" id="{FEAD7A06-A077-9E00-3CC7-097ABB0FF7B8}"/>
+              </a:ext>
+            </a:extLst>
+          </p:cNvPr>
+          <p:cNvPicPr>
+            <a:picLocks noChangeAspect="1"/>
+          </p:cNvPicPr>
+          <p:nvPr/>
+        </p:nvPicPr>
+        <p:blipFill>
+          <a:blip r:embed="rId3"/>
+          <a:srcRect t="8940" b="9091"/>
+          <a:stretch>
+            <a:fillRect/>
+          </a:stretch>
+        </p:blipFill>
+        <p:spPr>
+          <a:xfrm>
+            <a:off x="6876288" y="1373233"/>
+            <a:ext cx="2005500" cy="3562894"/>
+          </a:xfrm>
+          <a:prstGeom prst="rect">
+            <a:avLst/>
+          </a:prstGeom>
+        </p:spPr>
+      </p:pic>
     </p:spTree>
   </p:cSld>
   <p:clrMapOvr>
@@ -8796,7 +10289,7 @@
 </p:sld>
 </file>
 
-<file path=ppt/slides/slide16.xml><?xml version="1.0" encoding="utf-8"?>
+<file path=ppt/slides/slide19.xml><?xml version="1.0" encoding="utf-8"?>
 <p:sld xmlns:a="http://schemas.openxmlformats.org/drawingml/2006/main" xmlns:r="http://schemas.openxmlformats.org/officeDocument/2006/relationships" xmlns:p="http://schemas.openxmlformats.org/presentationml/2006/main">
   <p:cSld name="Slide 16">
     <p:bg>
@@ -8895,7 +10388,7 @@
         </p:nvSpPr>
         <p:spPr>
           <a:xfrm>
-            <a:off x="457200" y="2743200"/>
+            <a:off x="457200" y="3105695"/>
             <a:ext cx="8229600" cy="548640"/>
           </a:xfrm>
           <a:prstGeom prst="rect">
@@ -8926,1086 +10419,37 @@
           </a:p>
         </p:txBody>
       </p:sp>
-    </p:spTree>
-  </p:cSld>
-  <p:clrMapOvr>
-    <a:masterClrMapping/>
-  </p:clrMapOvr>
-</p:sld>
-</file>
-
-<file path=ppt/slides/slide17.xml><?xml version="1.0" encoding="utf-8"?>
-<p:sld xmlns:a="http://schemas.openxmlformats.org/drawingml/2006/main" xmlns:r="http://schemas.openxmlformats.org/officeDocument/2006/relationships" xmlns:p="http://schemas.openxmlformats.org/presentationml/2006/main">
-  <p:cSld name="Slide 17">
-    <p:bg>
-      <p:bgPr>
-        <a:solidFill>
-          <a:srgbClr val="F4F7FB"/>
-        </a:solidFill>
-        <a:effectLst/>
-      </p:bgPr>
-    </p:bg>
-    <p:spTree>
-      <p:nvGrpSpPr>
-        <p:cNvPr id="1" name=""/>
-        <p:cNvGrpSpPr/>
-        <p:nvPr/>
-      </p:nvGrpSpPr>
-      <p:grpSpPr>
-        <a:xfrm>
-          <a:off x="0" y="0"/>
-          <a:ext cx="0" cy="0"/>
-          <a:chOff x="0" y="0"/>
-          <a:chExt cx="0" cy="0"/>
-        </a:xfrm>
-      </p:grpSpPr>
-      <p:sp>
-        <p:nvSpPr>
-          <p:cNvPr id="2" name="Text 0"/>
-          <p:cNvSpPr/>
-          <p:nvPr/>
-        </p:nvSpPr>
-        <p:spPr>
-          <a:xfrm>
-            <a:off x="457200" y="182880"/>
-            <a:ext cx="8229600" cy="548640"/>
-          </a:xfrm>
-          <a:prstGeom prst="rect">
-            <a:avLst/>
-          </a:prstGeom>
-          <a:noFill/>
-          <a:ln/>
-        </p:spPr>
-        <p:txBody>
-          <a:bodyPr wrap="square" rtlCol="0" anchor="ctr"/>
-          <a:lstStyle/>
-          <a:p>
-            <a:pPr marL="0" indent="0">
-              <a:buNone/>
-            </a:pPr>
-            <a:r>
-              <a:rPr lang="en-US" sz="2800" b="1" dirty="0">
-                <a:solidFill>
-                  <a:srgbClr val="0A2342"/>
-                </a:solidFill>
-              </a:rPr>
-              <a:t>More Essential Per Student Than Ever</a:t>
-            </a:r>
-            <a:endParaRPr lang="en-US" sz="2800" dirty="0"/>
-          </a:p>
-        </p:txBody>
-      </p:sp>
-      <p:sp>
-        <p:nvSpPr>
-          <p:cNvPr id="3" name="Text 1"/>
-          <p:cNvSpPr/>
-          <p:nvPr/>
-        </p:nvSpPr>
-        <p:spPr>
-          <a:xfrm>
-            <a:off x="457200" y="731520"/>
-            <a:ext cx="8229600" cy="320040"/>
-          </a:xfrm>
-          <a:prstGeom prst="rect">
-            <a:avLst/>
-          </a:prstGeom>
-          <a:noFill/>
-          <a:ln/>
-        </p:spPr>
-        <p:txBody>
-          <a:bodyPr wrap="square" rtlCol="0" anchor="ctr"/>
-          <a:lstStyle/>
-          <a:p>
-            <a:pPr marL="0" indent="0">
-              <a:buNone/>
-            </a:pPr>
-            <a:r>
-              <a:rPr lang="en-US" sz="1300" dirty="0">
-                <a:solidFill>
-                  <a:srgbClr val="64748B"/>
-                </a:solidFill>
-              </a:rPr>
-              <a:t>Fall enrollment has fallen 30% since 2011 — yet ridership has grown. Students rely on EPTA more, not less.</a:t>
-            </a:r>
-            <a:endParaRPr lang="en-US" sz="1300" dirty="0"/>
-          </a:p>
-        </p:txBody>
-      </p:sp>
-      <p:graphicFrame>
-        <p:nvGraphicFramePr>
-          <p:cNvPr id="4" name="Chart 0"/>
-          <p:cNvGraphicFramePr/>
-          <p:nvPr/>
-        </p:nvGraphicFramePr>
-        <p:xfrm>
-          <a:off x="365760" y="1097280"/>
-          <a:ext cx="8412480" cy="2926080"/>
-        </p:xfrm>
-        <a:graphic>
-          <a:graphicData uri="http://schemas.openxmlformats.org/drawingml/2006/chart">
-            <c:chart xmlns:c="http://schemas.openxmlformats.org/drawingml/2006/chart" xmlns:r="http://schemas.openxmlformats.org/officeDocument/2006/relationships" r:id="rId3"/>
-          </a:graphicData>
-        </a:graphic>
-      </p:graphicFrame>
-      <p:sp>
-        <p:nvSpPr>
-          <p:cNvPr id="5" name="Shape 2"/>
-          <p:cNvSpPr/>
-          <p:nvPr/>
-        </p:nvSpPr>
-        <p:spPr>
-          <a:xfrm>
-            <a:off x="320040" y="4114800"/>
-            <a:ext cx="2651760" cy="914400"/>
-          </a:xfrm>
-          <a:prstGeom prst="rect">
-            <a:avLst/>
-          </a:prstGeom>
-          <a:solidFill>
-            <a:srgbClr val="FFFFFF"/>
-          </a:solidFill>
-          <a:ln w="6350">
-            <a:solidFill>
-              <a:srgbClr val="E2E8F0"/>
-            </a:solidFill>
-            <a:prstDash val="solid"/>
-          </a:ln>
-          <a:effectLst>
-            <a:outerShdw blurRad="101600" dist="38100" dir="8100000" algn="bl" rotWithShape="0">
-              <a:srgbClr val="000000">
-                <a:alpha val="12000"/>
-              </a:srgbClr>
-            </a:outerShdw>
-          </a:effectLst>
-        </p:spPr>
-        <p:txBody>
-          <a:bodyPr/>
-          <a:lstStyle/>
-          <a:p>
-            <a:endParaRPr lang="en-US"/>
-          </a:p>
-        </p:txBody>
-      </p:sp>
-      <p:sp>
-        <p:nvSpPr>
-          <p:cNvPr id="6" name="Shape 3"/>
-          <p:cNvSpPr/>
-          <p:nvPr/>
-        </p:nvSpPr>
-        <p:spPr>
-          <a:xfrm>
-            <a:off x="320040" y="4114800"/>
-            <a:ext cx="2651760" cy="64008"/>
-          </a:xfrm>
-          <a:prstGeom prst="rect">
-            <a:avLst/>
-          </a:prstGeom>
-          <a:solidFill>
-            <a:srgbClr val="D85A30"/>
-          </a:solidFill>
-          <a:ln/>
-        </p:spPr>
-        <p:txBody>
-          <a:bodyPr/>
-          <a:lstStyle/>
-          <a:p>
-            <a:endParaRPr lang="en-US"/>
-          </a:p>
-        </p:txBody>
-      </p:sp>
-      <p:sp>
-        <p:nvSpPr>
-          <p:cNvPr id="7" name="Text 4"/>
-          <p:cNvSpPr/>
-          <p:nvPr/>
-        </p:nvSpPr>
-        <p:spPr>
-          <a:xfrm>
-            <a:off x="320040" y="4279392"/>
-            <a:ext cx="2651760" cy="685800"/>
-          </a:xfrm>
-          <a:prstGeom prst="rect">
-            <a:avLst/>
-          </a:prstGeom>
-          <a:noFill/>
-          <a:ln/>
-        </p:spPr>
-        <p:txBody>
-          <a:bodyPr wrap="square" lIns="0" tIns="0" rIns="0" bIns="0" rtlCol="0" anchor="ctr"/>
-          <a:lstStyle/>
-          <a:p>
-            <a:pPr marL="0" indent="0" algn="ctr">
-              <a:buNone/>
-            </a:pPr>
-            <a:r>
-              <a:rPr lang="en-US" sz="3800" b="1" dirty="0">
-                <a:solidFill>
-                  <a:srgbClr val="D85A30"/>
-                </a:solidFill>
-              </a:rPr>
-              <a:t>-30%</a:t>
-            </a:r>
-            <a:endParaRPr lang="en-US" sz="3800" dirty="0"/>
-          </a:p>
-        </p:txBody>
-      </p:sp>
-      <p:sp>
-        <p:nvSpPr>
-          <p:cNvPr id="8" name="Text 5"/>
-          <p:cNvSpPr/>
-          <p:nvPr/>
-        </p:nvSpPr>
-        <p:spPr>
-          <a:xfrm>
-            <a:off x="429768" y="4937760"/>
-            <a:ext cx="2432304" cy="320040"/>
-          </a:xfrm>
-          <a:prstGeom prst="rect">
-            <a:avLst/>
-          </a:prstGeom>
-          <a:noFill/>
-          <a:ln/>
-        </p:spPr>
-        <p:txBody>
-          <a:bodyPr wrap="square" lIns="0" tIns="0" rIns="0" bIns="0" rtlCol="0" anchor="ctr"/>
-          <a:lstStyle/>
-          <a:p>
-            <a:pPr marL="0" indent="0" algn="ctr">
-              <a:buNone/>
-            </a:pPr>
-            <a:r>
-              <a:rPr lang="en-US" sz="1300" b="1" dirty="0">
-                <a:solidFill>
-                  <a:srgbClr val="334155"/>
-                </a:solidFill>
-              </a:rPr>
-              <a:t>Enrollment decline</a:t>
-            </a:r>
-            <a:endParaRPr lang="en-US" sz="1300" dirty="0"/>
-          </a:p>
-        </p:txBody>
-      </p:sp>
-      <p:sp>
-        <p:nvSpPr>
-          <p:cNvPr id="9" name="Text 6"/>
-          <p:cNvSpPr/>
-          <p:nvPr/>
-        </p:nvSpPr>
-        <p:spPr>
-          <a:xfrm>
-            <a:off x="411480" y="5212080"/>
-            <a:ext cx="2468880" cy="228600"/>
-          </a:xfrm>
-          <a:prstGeom prst="rect">
-            <a:avLst/>
-          </a:prstGeom>
-          <a:noFill/>
-          <a:ln/>
-        </p:spPr>
-        <p:txBody>
-          <a:bodyPr wrap="square" lIns="0" tIns="0" rIns="0" bIns="0" rtlCol="0" anchor="ctr"/>
-          <a:lstStyle/>
-          <a:p>
-            <a:pPr marL="0" indent="0" algn="ctr">
-              <a:buNone/>
-            </a:pPr>
-            <a:r>
-              <a:rPr lang="en-US" sz="1000" dirty="0">
-                <a:solidFill>
-                  <a:srgbClr val="64748B"/>
-                </a:solidFill>
-              </a:rPr>
-              <a:t>4,393 (2011) → 3,069 (2025)</a:t>
-            </a:r>
-            <a:endParaRPr lang="en-US" sz="1000" dirty="0"/>
-          </a:p>
-        </p:txBody>
-      </p:sp>
-      <p:sp>
-        <p:nvSpPr>
-          <p:cNvPr id="10" name="Shape 7"/>
-          <p:cNvSpPr/>
-          <p:nvPr/>
-        </p:nvSpPr>
-        <p:spPr>
-          <a:xfrm>
-            <a:off x="3246120" y="4114800"/>
-            <a:ext cx="2651760" cy="914400"/>
-          </a:xfrm>
-          <a:prstGeom prst="rect">
-            <a:avLst/>
-          </a:prstGeom>
-          <a:solidFill>
-            <a:srgbClr val="FFFFFF"/>
-          </a:solidFill>
-          <a:ln w="6350">
-            <a:solidFill>
-              <a:srgbClr val="E2E8F0"/>
-            </a:solidFill>
-            <a:prstDash val="solid"/>
-          </a:ln>
-          <a:effectLst>
-            <a:outerShdw blurRad="101600" dist="38100" dir="8100000" algn="bl" rotWithShape="0">
-              <a:srgbClr val="000000">
-                <a:alpha val="12000"/>
-              </a:srgbClr>
-            </a:outerShdw>
-          </a:effectLst>
-        </p:spPr>
-        <p:txBody>
-          <a:bodyPr/>
-          <a:lstStyle/>
-          <a:p>
-            <a:endParaRPr lang="en-US"/>
-          </a:p>
-        </p:txBody>
-      </p:sp>
-      <p:sp>
-        <p:nvSpPr>
-          <p:cNvPr id="11" name="Shape 8"/>
-          <p:cNvSpPr/>
-          <p:nvPr/>
-        </p:nvSpPr>
-        <p:spPr>
-          <a:xfrm>
-            <a:off x="3246120" y="4114800"/>
-            <a:ext cx="2651760" cy="64008"/>
-          </a:xfrm>
-          <a:prstGeom prst="rect">
-            <a:avLst/>
-          </a:prstGeom>
-          <a:solidFill>
-            <a:srgbClr val="1D9E75"/>
-          </a:solidFill>
-          <a:ln/>
-        </p:spPr>
-        <p:txBody>
-          <a:bodyPr/>
-          <a:lstStyle/>
-          <a:p>
-            <a:endParaRPr lang="en-US"/>
-          </a:p>
-        </p:txBody>
-      </p:sp>
-      <p:sp>
-        <p:nvSpPr>
-          <p:cNvPr id="12" name="Text 9"/>
-          <p:cNvSpPr/>
-          <p:nvPr/>
-        </p:nvSpPr>
-        <p:spPr>
-          <a:xfrm>
-            <a:off x="3246120" y="4279392"/>
-            <a:ext cx="2651760" cy="685800"/>
-          </a:xfrm>
-          <a:prstGeom prst="rect">
-            <a:avLst/>
-          </a:prstGeom>
-          <a:noFill/>
-          <a:ln/>
-        </p:spPr>
-        <p:txBody>
-          <a:bodyPr wrap="square" lIns="0" tIns="0" rIns="0" bIns="0" rtlCol="0" anchor="ctr"/>
-          <a:lstStyle/>
-          <a:p>
-            <a:pPr marL="0" indent="0" algn="ctr">
-              <a:buNone/>
-            </a:pPr>
-            <a:r>
-              <a:rPr lang="en-US" sz="3800" b="1" dirty="0">
-                <a:solidFill>
-                  <a:srgbClr val="1D9E75"/>
-                </a:solidFill>
-              </a:rPr>
-              <a:t>+163%</a:t>
-            </a:r>
-            <a:endParaRPr lang="en-US" sz="3800" dirty="0"/>
-          </a:p>
-        </p:txBody>
-      </p:sp>
-      <p:sp>
-        <p:nvSpPr>
-          <p:cNvPr id="13" name="Text 10"/>
-          <p:cNvSpPr/>
-          <p:nvPr/>
-        </p:nvSpPr>
-        <p:spPr>
-          <a:xfrm>
-            <a:off x="3355848" y="4937760"/>
-            <a:ext cx="2432304" cy="320040"/>
-          </a:xfrm>
-          <a:prstGeom prst="rect">
-            <a:avLst/>
-          </a:prstGeom>
-          <a:noFill/>
-          <a:ln/>
-        </p:spPr>
-        <p:txBody>
-          <a:bodyPr wrap="square" lIns="0" tIns="0" rIns="0" bIns="0" rtlCol="0" anchor="ctr"/>
-          <a:lstStyle/>
-          <a:p>
-            <a:pPr marL="0" indent="0" algn="ctr">
-              <a:buNone/>
-            </a:pPr>
-            <a:r>
-              <a:rPr lang="en-US" sz="1300" b="1" dirty="0">
-                <a:solidFill>
-                  <a:srgbClr val="334155"/>
-                </a:solidFill>
-              </a:rPr>
-              <a:t>Ridership per student</a:t>
-            </a:r>
-            <a:endParaRPr lang="en-US" sz="1300" dirty="0"/>
-          </a:p>
-        </p:txBody>
-      </p:sp>
-      <p:sp>
-        <p:nvSpPr>
-          <p:cNvPr id="14" name="Text 11"/>
-          <p:cNvSpPr/>
-          <p:nvPr/>
-        </p:nvSpPr>
-        <p:spPr>
-          <a:xfrm>
-            <a:off x="3337560" y="5212080"/>
-            <a:ext cx="2468880" cy="228600"/>
-          </a:xfrm>
-          <a:prstGeom prst="rect">
-            <a:avLst/>
-          </a:prstGeom>
-          <a:noFill/>
-          <a:ln/>
-        </p:spPr>
-        <p:txBody>
-          <a:bodyPr wrap="square" lIns="0" tIns="0" rIns="0" bIns="0" rtlCol="0" anchor="ctr"/>
-          <a:lstStyle/>
-          <a:p>
-            <a:pPr marL="0" indent="0" algn="ctr">
-              <a:buNone/>
-            </a:pPr>
-            <a:r>
-              <a:rPr lang="en-US" sz="1000" dirty="0">
-                <a:solidFill>
-                  <a:srgbClr val="64748B"/>
-                </a:solidFill>
-              </a:rPr>
-              <a:t>4.6 (FY11) → 12.1+ (FY26)</a:t>
-            </a:r>
-            <a:endParaRPr lang="en-US" sz="1000" dirty="0"/>
-          </a:p>
-        </p:txBody>
-      </p:sp>
-      <p:sp>
-        <p:nvSpPr>
-          <p:cNvPr id="15" name="Shape 12"/>
-          <p:cNvSpPr/>
-          <p:nvPr/>
-        </p:nvSpPr>
-        <p:spPr>
-          <a:xfrm>
-            <a:off x="6172200" y="4114800"/>
-            <a:ext cx="2651760" cy="914400"/>
-          </a:xfrm>
-          <a:prstGeom prst="rect">
-            <a:avLst/>
-          </a:prstGeom>
-          <a:solidFill>
-            <a:srgbClr val="FFFFFF"/>
-          </a:solidFill>
-          <a:ln w="6350">
-            <a:solidFill>
-              <a:srgbClr val="E2E8F0"/>
-            </a:solidFill>
-            <a:prstDash val="solid"/>
-          </a:ln>
-          <a:effectLst>
-            <a:outerShdw blurRad="101600" dist="38100" dir="8100000" algn="bl" rotWithShape="0">
-              <a:srgbClr val="000000">
-                <a:alpha val="12000"/>
-              </a:srgbClr>
-            </a:outerShdw>
-          </a:effectLst>
-        </p:spPr>
-        <p:txBody>
-          <a:bodyPr/>
-          <a:lstStyle/>
-          <a:p>
-            <a:endParaRPr lang="en-US"/>
-          </a:p>
-        </p:txBody>
-      </p:sp>
-      <p:sp>
-        <p:nvSpPr>
-          <p:cNvPr id="16" name="Shape 13"/>
-          <p:cNvSpPr/>
-          <p:nvPr/>
-        </p:nvSpPr>
-        <p:spPr>
-          <a:xfrm>
-            <a:off x="6172200" y="4114800"/>
-            <a:ext cx="2651760" cy="64008"/>
-          </a:xfrm>
-          <a:prstGeom prst="rect">
-            <a:avLst/>
-          </a:prstGeom>
-          <a:solidFill>
-            <a:srgbClr val="BA7517"/>
-          </a:solidFill>
-          <a:ln/>
-        </p:spPr>
-        <p:txBody>
-          <a:bodyPr/>
-          <a:lstStyle/>
-          <a:p>
-            <a:endParaRPr lang="en-US"/>
-          </a:p>
-        </p:txBody>
-      </p:sp>
-      <p:sp>
-        <p:nvSpPr>
-          <p:cNvPr id="17" name="Text 14"/>
-          <p:cNvSpPr/>
-          <p:nvPr/>
-        </p:nvSpPr>
-        <p:spPr>
-          <a:xfrm>
-            <a:off x="6172200" y="4279392"/>
-            <a:ext cx="2651760" cy="685800"/>
-          </a:xfrm>
-          <a:prstGeom prst="rect">
-            <a:avLst/>
-          </a:prstGeom>
-          <a:noFill/>
-          <a:ln/>
-        </p:spPr>
-        <p:txBody>
-          <a:bodyPr wrap="square" lIns="0" tIns="0" rIns="0" bIns="0" rtlCol="0" anchor="ctr"/>
-          <a:lstStyle/>
-          <a:p>
-            <a:pPr marL="0" indent="0" algn="ctr">
-              <a:buNone/>
-            </a:pPr>
-            <a:r>
-              <a:rPr lang="en-US" sz="3800" b="1" dirty="0">
-                <a:solidFill>
-                  <a:srgbClr val="BA7517"/>
-                </a:solidFill>
-              </a:rPr>
-              <a:t>3,069</a:t>
-            </a:r>
-            <a:endParaRPr lang="en-US" sz="3800" dirty="0"/>
-          </a:p>
-        </p:txBody>
-      </p:sp>
-      <p:sp>
-        <p:nvSpPr>
-          <p:cNvPr id="18" name="Text 15"/>
-          <p:cNvSpPr/>
-          <p:nvPr/>
-        </p:nvSpPr>
-        <p:spPr>
-          <a:xfrm>
-            <a:off x="6281928" y="4937760"/>
-            <a:ext cx="2432304" cy="320040"/>
-          </a:xfrm>
-          <a:prstGeom prst="rect">
-            <a:avLst/>
-          </a:prstGeom>
-          <a:noFill/>
-          <a:ln/>
-        </p:spPr>
-        <p:txBody>
-          <a:bodyPr wrap="square" lIns="0" tIns="0" rIns="0" bIns="0" rtlCol="0" anchor="ctr"/>
-          <a:lstStyle/>
-          <a:p>
-            <a:pPr marL="0" indent="0" algn="ctr">
-              <a:buNone/>
-            </a:pPr>
-            <a:r>
-              <a:rPr lang="en-US" sz="1300" b="1" dirty="0">
-                <a:solidFill>
-                  <a:srgbClr val="334155"/>
-                </a:solidFill>
-              </a:rPr>
-              <a:t>Students enrolled</a:t>
-            </a:r>
-            <a:endParaRPr lang="en-US" sz="1300" dirty="0"/>
-          </a:p>
-        </p:txBody>
-      </p:sp>
-      <p:sp>
-        <p:nvSpPr>
-          <p:cNvPr id="19" name="Text 16"/>
-          <p:cNvSpPr/>
-          <p:nvPr/>
-        </p:nvSpPr>
-        <p:spPr>
-          <a:xfrm>
-            <a:off x="6263640" y="5212080"/>
-            <a:ext cx="2468880" cy="228600"/>
-          </a:xfrm>
-          <a:prstGeom prst="rect">
-            <a:avLst/>
-          </a:prstGeom>
-          <a:noFill/>
-          <a:ln/>
-        </p:spPr>
-        <p:txBody>
-          <a:bodyPr wrap="square" lIns="0" tIns="0" rIns="0" bIns="0" rtlCol="0" anchor="ctr"/>
-          <a:lstStyle/>
-          <a:p>
-            <a:pPr marL="0" indent="0" algn="ctr">
-              <a:buNone/>
-            </a:pPr>
-            <a:r>
-              <a:rPr lang="en-US" sz="1000" dirty="0">
-                <a:solidFill>
-                  <a:srgbClr val="64748B"/>
-                </a:solidFill>
-              </a:rPr>
-              <a:t>Fall 2025 — lowest in 14 years</a:t>
-            </a:r>
-            <a:endParaRPr lang="en-US" sz="1000" dirty="0"/>
-          </a:p>
-        </p:txBody>
-      </p:sp>
-    </p:spTree>
-  </p:cSld>
-  <p:clrMapOvr>
-    <a:masterClrMapping/>
-  </p:clrMapOvr>
-</p:sld>
-</file>
-
-<file path=ppt/slides/slide18.xml><?xml version="1.0" encoding="utf-8"?>
-<p:sld xmlns:a="http://schemas.openxmlformats.org/drawingml/2006/main" xmlns:r="http://schemas.openxmlformats.org/officeDocument/2006/relationships" xmlns:p="http://schemas.openxmlformats.org/presentationml/2006/main">
-  <p:cSld name="Slide 18">
-    <p:bg>
-      <p:bgPr>
-        <a:solidFill>
-          <a:srgbClr val="0A2342"/>
-        </a:solidFill>
-        <a:effectLst/>
-      </p:bgPr>
-    </p:bg>
-    <p:spTree>
-      <p:nvGrpSpPr>
-        <p:cNvPr id="1" name=""/>
-        <p:cNvGrpSpPr/>
-        <p:nvPr/>
-      </p:nvGrpSpPr>
-      <p:grpSpPr>
-        <a:xfrm>
-          <a:off x="0" y="0"/>
-          <a:ext cx="0" cy="0"/>
-          <a:chOff x="0" y="0"/>
-          <a:chExt cx="0" cy="0"/>
-        </a:xfrm>
-      </p:grpSpPr>
-      <p:sp>
-        <p:nvSpPr>
-          <p:cNvPr id="2" name="Shape 0"/>
-          <p:cNvSpPr/>
-          <p:nvPr/>
-        </p:nvSpPr>
-        <p:spPr>
-          <a:xfrm>
-            <a:off x="0" y="0"/>
-            <a:ext cx="73152" cy="5143500"/>
-          </a:xfrm>
-          <a:prstGeom prst="rect">
-            <a:avLst/>
-          </a:prstGeom>
-          <a:solidFill>
-            <a:srgbClr val="3A86C8"/>
-          </a:solidFill>
-          <a:ln/>
-        </p:spPr>
-        <p:txBody>
-          <a:bodyPr/>
-          <a:lstStyle/>
-          <a:p>
-            <a:endParaRPr lang="en-US"/>
-          </a:p>
-        </p:txBody>
-      </p:sp>
-      <p:sp>
-        <p:nvSpPr>
-          <p:cNvPr id="3" name="Text 1"/>
-          <p:cNvSpPr/>
-          <p:nvPr/>
-        </p:nvSpPr>
-        <p:spPr>
-          <a:xfrm>
-            <a:off x="365760" y="1645920"/>
-            <a:ext cx="8229600" cy="914400"/>
-          </a:xfrm>
-          <a:prstGeom prst="rect">
-            <a:avLst/>
-          </a:prstGeom>
-          <a:noFill/>
-          <a:ln/>
-        </p:spPr>
-        <p:txBody>
-          <a:bodyPr wrap="square" rtlCol="0" anchor="ctr"/>
-          <a:lstStyle/>
-          <a:p>
-            <a:pPr marL="0" indent="0">
-              <a:buNone/>
-            </a:pPr>
-            <a:r>
-              <a:rPr lang="en-US" sz="3800" b="1" dirty="0">
-                <a:solidFill>
-                  <a:srgbClr val="FFFFFF"/>
-                </a:solidFill>
-              </a:rPr>
-              <a:t>The People Behind the Numbers</a:t>
-            </a:r>
-            <a:endParaRPr lang="en-US" sz="3800" dirty="0"/>
-          </a:p>
-        </p:txBody>
-      </p:sp>
-      <p:sp>
-        <p:nvSpPr>
-          <p:cNvPr id="4" name="Text 2"/>
-          <p:cNvSpPr/>
-          <p:nvPr/>
-        </p:nvSpPr>
-        <p:spPr>
-          <a:xfrm>
-            <a:off x="365760" y="2606040"/>
-            <a:ext cx="8229600" cy="502920"/>
-          </a:xfrm>
-          <a:prstGeom prst="rect">
-            <a:avLst/>
-          </a:prstGeom>
-          <a:noFill/>
-          <a:ln/>
-        </p:spPr>
-        <p:txBody>
-          <a:bodyPr wrap="square" rtlCol="0" anchor="ctr"/>
-          <a:lstStyle/>
-          <a:p>
-            <a:pPr marL="0" indent="0">
-              <a:buNone/>
-            </a:pPr>
-            <a:r>
-              <a:rPr lang="en-US" sz="1800" dirty="0">
-                <a:solidFill>
-                  <a:srgbClr val="A0BDD8"/>
-                </a:solidFill>
-              </a:rPr>
-              <a:t>Drivers, patrons, and the daily moments that make EPTA essential.</a:t>
-            </a:r>
-            <a:endParaRPr lang="en-US" sz="1800" dirty="0"/>
-          </a:p>
-        </p:txBody>
-      </p:sp>
-    </p:spTree>
-  </p:cSld>
-  <p:clrMapOvr>
-    <a:masterClrMapping/>
-  </p:clrMapOvr>
-</p:sld>
-</file>
-
-<file path=ppt/slides/slide19.xml><?xml version="1.0" encoding="utf-8"?>
-<p:sld xmlns:a="http://schemas.openxmlformats.org/drawingml/2006/main" xmlns:r="http://schemas.openxmlformats.org/officeDocument/2006/relationships" xmlns:p="http://schemas.openxmlformats.org/presentationml/2006/main">
-  <p:cSld name="Slide 19">
-    <p:bg>
-      <p:bgPr>
-        <a:solidFill>
-          <a:srgbClr val="1A1A2E"/>
-        </a:solidFill>
-        <a:effectLst/>
-      </p:bgPr>
-    </p:bg>
-    <p:spTree>
-      <p:nvGrpSpPr>
-        <p:cNvPr id="1" name=""/>
-        <p:cNvGrpSpPr/>
-        <p:nvPr/>
-      </p:nvGrpSpPr>
-      <p:grpSpPr>
-        <a:xfrm>
-          <a:off x="0" y="0"/>
-          <a:ext cx="0" cy="0"/>
-          <a:chOff x="0" y="0"/>
-          <a:chExt cx="0" cy="0"/>
-        </a:xfrm>
-      </p:grpSpPr>
-      <p:sp>
-        <p:nvSpPr>
-          <p:cNvPr id="2" name="Shape 0"/>
-          <p:cNvSpPr/>
-          <p:nvPr/>
-        </p:nvSpPr>
-        <p:spPr>
-          <a:xfrm>
-            <a:off x="137160" y="137160"/>
-            <a:ext cx="4343400" cy="2423160"/>
-          </a:xfrm>
-          <a:prstGeom prst="rect">
-            <a:avLst/>
-          </a:prstGeom>
-          <a:solidFill>
-            <a:srgbClr val="0D1A2D"/>
-          </a:solidFill>
-          <a:ln w="12700">
-            <a:solidFill>
-              <a:srgbClr val="2A3A5C"/>
-            </a:solidFill>
-            <a:prstDash val="solid"/>
-          </a:ln>
-        </p:spPr>
-        <p:txBody>
-          <a:bodyPr/>
-          <a:lstStyle/>
-          <a:p>
-            <a:endParaRPr lang="en-US"/>
-          </a:p>
-        </p:txBody>
-      </p:sp>
-      <p:sp>
-        <p:nvSpPr>
-          <p:cNvPr id="3" name="Text 1"/>
-          <p:cNvSpPr/>
-          <p:nvPr/>
-        </p:nvSpPr>
-        <p:spPr>
-          <a:xfrm>
-            <a:off x="274320" y="1143000"/>
-            <a:ext cx="4023360" cy="502920"/>
-          </a:xfrm>
-          <a:prstGeom prst="rect">
-            <a:avLst/>
-          </a:prstGeom>
-          <a:noFill/>
-          <a:ln/>
-        </p:spPr>
-        <p:txBody>
-          <a:bodyPr wrap="square" rtlCol="0" anchor="ctr"/>
-          <a:lstStyle/>
-          <a:p>
-            <a:pPr marL="0" indent="0" algn="ctr">
-              <a:buNone/>
-            </a:pPr>
-            <a:r>
-              <a:rPr lang="en-US" sz="1100" i="1" dirty="0">
-                <a:solidFill>
-                  <a:srgbClr val="4A6A8A"/>
-                </a:solidFill>
-              </a:rPr>
-              <a:t>📷  Bus patrons — peak morning boarding</a:t>
-            </a:r>
-            <a:endParaRPr lang="en-US" sz="1100" dirty="0"/>
-          </a:p>
-        </p:txBody>
-      </p:sp>
-      <p:sp>
-        <p:nvSpPr>
-          <p:cNvPr id="4" name="Shape 2"/>
-          <p:cNvSpPr/>
-          <p:nvPr/>
-        </p:nvSpPr>
-        <p:spPr>
-          <a:xfrm>
-            <a:off x="4663440" y="137160"/>
-            <a:ext cx="4343400" cy="2423160"/>
-          </a:xfrm>
-          <a:prstGeom prst="rect">
-            <a:avLst/>
-          </a:prstGeom>
-          <a:solidFill>
-            <a:srgbClr val="0D1A2D"/>
-          </a:solidFill>
-          <a:ln w="12700">
-            <a:solidFill>
-              <a:srgbClr val="2A3A5C"/>
-            </a:solidFill>
-            <a:prstDash val="solid"/>
-          </a:ln>
-        </p:spPr>
-        <p:txBody>
-          <a:bodyPr/>
-          <a:lstStyle/>
-          <a:p>
-            <a:endParaRPr lang="en-US"/>
-          </a:p>
-        </p:txBody>
-      </p:sp>
-      <p:sp>
-        <p:nvSpPr>
-          <p:cNvPr id="5" name="Text 3"/>
-          <p:cNvSpPr/>
-          <p:nvPr/>
-        </p:nvSpPr>
-        <p:spPr>
-          <a:xfrm>
-            <a:off x="4800600" y="1143000"/>
-            <a:ext cx="4023360" cy="502920"/>
-          </a:xfrm>
-          <a:prstGeom prst="rect">
-            <a:avLst/>
-          </a:prstGeom>
-          <a:noFill/>
-          <a:ln/>
-        </p:spPr>
-        <p:txBody>
-          <a:bodyPr wrap="square" rtlCol="0" anchor="ctr"/>
-          <a:lstStyle/>
-          <a:p>
-            <a:pPr marL="0" indent="0" algn="ctr">
-              <a:buNone/>
-            </a:pPr>
-            <a:r>
-              <a:rPr lang="en-US" sz="1100" i="1" dirty="0">
-                <a:solidFill>
-                  <a:srgbClr val="4A6A8A"/>
-                </a:solidFill>
-              </a:rPr>
-              <a:t>📷  Driver at wheel — Ram Force One</a:t>
-            </a:r>
-            <a:endParaRPr lang="en-US" sz="1100" dirty="0"/>
-          </a:p>
-        </p:txBody>
-      </p:sp>
-      <p:sp>
-        <p:nvSpPr>
-          <p:cNvPr id="6" name="Shape 4"/>
-          <p:cNvSpPr/>
-          <p:nvPr/>
-        </p:nvSpPr>
-        <p:spPr>
-          <a:xfrm>
-            <a:off x="137160" y="2743200"/>
-            <a:ext cx="4343400" cy="2423160"/>
-          </a:xfrm>
-          <a:prstGeom prst="rect">
-            <a:avLst/>
-          </a:prstGeom>
-          <a:solidFill>
-            <a:srgbClr val="0D1A2D"/>
-          </a:solidFill>
-          <a:ln w="12700">
-            <a:solidFill>
-              <a:srgbClr val="2A3A5C"/>
-            </a:solidFill>
-            <a:prstDash val="solid"/>
-          </a:ln>
-        </p:spPr>
-        <p:txBody>
-          <a:bodyPr/>
-          <a:lstStyle/>
-          <a:p>
-            <a:endParaRPr lang="en-US"/>
-          </a:p>
-        </p:txBody>
-      </p:sp>
-      <p:sp>
-        <p:nvSpPr>
-          <p:cNvPr id="7" name="Text 5"/>
-          <p:cNvSpPr/>
-          <p:nvPr/>
-        </p:nvSpPr>
-        <p:spPr>
-          <a:xfrm>
-            <a:off x="274320" y="3749040"/>
-            <a:ext cx="4023360" cy="502920"/>
-          </a:xfrm>
-          <a:prstGeom prst="rect">
-            <a:avLst/>
-          </a:prstGeom>
-          <a:noFill/>
-          <a:ln/>
-        </p:spPr>
-        <p:txBody>
-          <a:bodyPr wrap="square" rtlCol="0" anchor="ctr"/>
-          <a:lstStyle/>
-          <a:p>
-            <a:pPr marL="0" indent="0" algn="ctr">
-              <a:buNone/>
-            </a:pPr>
-            <a:r>
-              <a:rPr lang="en-US" sz="1100" i="1" dirty="0">
-                <a:solidFill>
-                  <a:srgbClr val="4A6A8A"/>
-                </a:solidFill>
-              </a:rPr>
-              <a:t>📷  H-Lot / parking — commuter overflow</a:t>
-            </a:r>
-            <a:endParaRPr lang="en-US" sz="1100" dirty="0"/>
-          </a:p>
-        </p:txBody>
-      </p:sp>
-      <p:sp>
-        <p:nvSpPr>
-          <p:cNvPr id="8" name="Shape 6"/>
-          <p:cNvSpPr/>
-          <p:nvPr/>
-        </p:nvSpPr>
-        <p:spPr>
-          <a:xfrm>
-            <a:off x="4663440" y="2743200"/>
-            <a:ext cx="4343400" cy="2423160"/>
-          </a:xfrm>
-          <a:prstGeom prst="rect">
-            <a:avLst/>
-          </a:prstGeom>
-          <a:solidFill>
-            <a:srgbClr val="0D1A2D"/>
-          </a:solidFill>
-          <a:ln w="12700">
-            <a:solidFill>
-              <a:srgbClr val="2A3A5C"/>
-            </a:solidFill>
-            <a:prstDash val="solid"/>
-          </a:ln>
-        </p:spPr>
-        <p:txBody>
-          <a:bodyPr/>
-          <a:lstStyle/>
-          <a:p>
-            <a:endParaRPr lang="en-US"/>
-          </a:p>
-        </p:txBody>
-      </p:sp>
-      <p:sp>
-        <p:nvSpPr>
-          <p:cNvPr id="9" name="Text 7"/>
-          <p:cNvSpPr/>
-          <p:nvPr/>
-        </p:nvSpPr>
-        <p:spPr>
-          <a:xfrm>
-            <a:off x="4800600" y="3749040"/>
-            <a:ext cx="4023360" cy="502920"/>
-          </a:xfrm>
-          <a:prstGeom prst="rect">
-            <a:avLst/>
-          </a:prstGeom>
-          <a:noFill/>
-          <a:ln/>
-        </p:spPr>
-        <p:txBody>
-          <a:bodyPr wrap="square" rtlCol="0" anchor="ctr"/>
-          <a:lstStyle/>
-          <a:p>
-            <a:pPr marL="0" indent="0" algn="ctr">
-              <a:buNone/>
-            </a:pPr>
-            <a:r>
-              <a:rPr lang="en-US" sz="1100" i="1" dirty="0">
-                <a:solidFill>
-                  <a:srgbClr val="4A6A8A"/>
-                </a:solidFill>
-              </a:rPr>
-              <a:t>📷  Students in cold / winter conditions</a:t>
-            </a:r>
-            <a:endParaRPr lang="en-US" sz="1100" dirty="0"/>
-          </a:p>
-        </p:txBody>
-      </p:sp>
+      <p:pic>
+        <p:nvPicPr>
+          <p:cNvPr id="5" name="Picture 4">
+            <a:extLst>
+              <a:ext uri="{FF2B5EF4-FFF2-40B4-BE49-F238E27FC236}">
+                <a16:creationId xmlns:a16="http://schemas.microsoft.com/office/drawing/2014/main" id="{CC894690-8E5B-2B47-9331-B6E9E33C3087}"/>
+              </a:ext>
+            </a:extLst>
+          </p:cNvPr>
+          <p:cNvPicPr>
+            <a:picLocks noChangeAspect="1"/>
+          </p:cNvPicPr>
+          <p:nvPr/>
+        </p:nvPicPr>
+        <p:blipFill>
+          <a:blip r:embed="rId3"/>
+          <a:srcRect b="9684"/>
+          <a:stretch>
+            <a:fillRect/>
+          </a:stretch>
+        </p:blipFill>
+        <p:spPr>
+          <a:xfrm>
+            <a:off x="5636622" y="0"/>
+            <a:ext cx="3507377" cy="3167743"/>
+          </a:xfrm>
+          <a:prstGeom prst="rect">
+            <a:avLst/>
+          </a:prstGeom>
+        </p:spPr>
+      </p:pic>
     </p:spTree>
   </p:cSld>
   <p:clrMapOvr>
@@ -11132,6 +11576,1152 @@
 
 <file path=ppt/slides/slide20.xml><?xml version="1.0" encoding="utf-8"?>
 <p:sld xmlns:a="http://schemas.openxmlformats.org/drawingml/2006/main" xmlns:r="http://schemas.openxmlformats.org/officeDocument/2006/relationships" xmlns:p="http://schemas.openxmlformats.org/presentationml/2006/main">
+  <p:cSld>
+    <p:bg>
+      <p:bgPr>
+        <a:solidFill>
+          <a:schemeClr val="bg1"/>
+        </a:solidFill>
+        <a:effectLst/>
+      </p:bgPr>
+    </p:bg>
+    <p:spTree>
+      <p:nvGrpSpPr>
+        <p:cNvPr id="1" name=""/>
+        <p:cNvGrpSpPr/>
+        <p:nvPr/>
+      </p:nvGrpSpPr>
+      <p:grpSpPr>
+        <a:xfrm>
+          <a:off x="0" y="0"/>
+          <a:ext cx="0" cy="0"/>
+          <a:chOff x="0" y="0"/>
+          <a:chExt cx="0" cy="0"/>
+        </a:xfrm>
+      </p:grpSpPr>
+      <p:sp useBgFill="1">
+        <p:nvSpPr>
+          <p:cNvPr id="19" name="Rectangle 18">
+            <a:extLst>
+              <a:ext uri="{FF2B5EF4-FFF2-40B4-BE49-F238E27FC236}">
+                <a16:creationId xmlns:a16="http://schemas.microsoft.com/office/drawing/2014/main" id="{A8384FB5-9ADC-4DDC-881B-597D56F5B15D}"/>
+              </a:ext>
+              <a:ext uri="{C183D7F6-B498-43B3-948B-1728B52AA6E4}">
+                <adec:decorative xmlns:adec="http://schemas.microsoft.com/office/drawing/2017/decorative" val="1"/>
+              </a:ext>
+            </a:extLst>
+          </p:cNvPr>
+          <p:cNvSpPr>
+            <a:spLocks noGrp="1" noRot="1" noChangeAspect="1" noMove="1" noResize="1" noEditPoints="1" noAdjustHandles="1" noChangeArrowheads="1" noChangeShapeType="1" noTextEdit="1"/>
+          </p:cNvSpPr>
+          <p:nvPr>
+            <p:extLst>
+              <p:ext uri="{386F3935-93C4-4BCD-93E2-E3B085C9AB24}">
+                <p16:designElem xmlns:p16="http://schemas.microsoft.com/office/powerpoint/2015/main" val="1"/>
+              </p:ext>
+            </p:extLst>
+          </p:nvPr>
+        </p:nvSpPr>
+        <p:spPr>
+          <a:xfrm>
+            <a:off x="0" y="0"/>
+            <a:ext cx="9144000" cy="5143500"/>
+          </a:xfrm>
+          <a:prstGeom prst="rect">
+            <a:avLst/>
+          </a:prstGeom>
+          <a:ln w="12700" cap="flat" cmpd="sng" algn="ctr">
+            <a:noFill/>
+            <a:prstDash val="solid"/>
+            <a:miter lim="800000"/>
+          </a:ln>
+          <a:effectLst/>
+          <a:extLst>
+            <a:ext uri="{91240B29-F687-4F45-9708-019B960494DF}">
+              <a14:hiddenLine xmlns:a14="http://schemas.microsoft.com/office/drawing/2010/main" w="12700" cap="flat" cmpd="sng" algn="ctr">
+                <a:solidFill>
+                  <a:schemeClr val="accent1">
+                    <a:shade val="50000"/>
+                  </a:schemeClr>
+                </a:solidFill>
+                <a:prstDash val="solid"/>
+                <a:miter lim="800000"/>
+              </a14:hiddenLine>
+            </a:ext>
+          </a:extLst>
+        </p:spPr>
+        <p:style>
+          <a:lnRef idx="2">
+            <a:schemeClr val="accent1">
+              <a:shade val="50000"/>
+            </a:schemeClr>
+          </a:lnRef>
+          <a:fillRef idx="1">
+            <a:schemeClr val="accent1"/>
+          </a:fillRef>
+          <a:effectRef idx="0">
+            <a:schemeClr val="accent1"/>
+          </a:effectRef>
+          <a:fontRef idx="minor">
+            <a:schemeClr val="lt1"/>
+          </a:fontRef>
+        </p:style>
+        <p:txBody>
+          <a:bodyPr rtlCol="0" anchor="ctr"/>
+          <a:lstStyle/>
+          <a:p>
+            <a:pPr algn="ctr"/>
+            <a:endParaRPr lang="en-US"/>
+          </a:p>
+        </p:txBody>
+      </p:sp>
+      <p:sp>
+        <p:nvSpPr>
+          <p:cNvPr id="21" name="Rectangle 20">
+            <a:extLst>
+              <a:ext uri="{FF2B5EF4-FFF2-40B4-BE49-F238E27FC236}">
+                <a16:creationId xmlns:a16="http://schemas.microsoft.com/office/drawing/2014/main" id="{1199E1B1-A8C0-4FE8-A5A8-1CB41D69F857}"/>
+              </a:ext>
+              <a:ext uri="{C183D7F6-B498-43B3-948B-1728B52AA6E4}">
+                <adec:decorative xmlns:adec="http://schemas.microsoft.com/office/drawing/2017/decorative" val="1"/>
+              </a:ext>
+            </a:extLst>
+          </p:cNvPr>
+          <p:cNvSpPr>
+            <a:spLocks noGrp="1" noRot="1" noChangeAspect="1" noMove="1" noResize="1" noEditPoints="1" noAdjustHandles="1" noChangeArrowheads="1" noChangeShapeType="1" noTextEdit="1"/>
+          </p:cNvSpPr>
+          <p:nvPr>
+            <p:extLst>
+              <p:ext uri="{386F3935-93C4-4BCD-93E2-E3B085C9AB24}">
+                <p16:designElem xmlns:p16="http://schemas.microsoft.com/office/powerpoint/2015/main" val="1"/>
+              </p:ext>
+            </p:extLst>
+          </p:nvPr>
+        </p:nvSpPr>
+        <p:spPr>
+          <a:xfrm rot="10800000" flipH="1">
+            <a:off x="1" y="0"/>
+            <a:ext cx="9143999" cy="1181966"/>
+          </a:xfrm>
+          <a:prstGeom prst="rect">
+            <a:avLst/>
+          </a:prstGeom>
+          <a:gradFill>
+            <a:gsLst>
+              <a:gs pos="0">
+                <a:srgbClr val="000000">
+                  <a:alpha val="96000"/>
+                </a:srgbClr>
+              </a:gs>
+              <a:gs pos="100000">
+                <a:schemeClr val="accent1">
+                  <a:lumMod val="75000"/>
+                </a:schemeClr>
+              </a:gs>
+            </a:gsLst>
+            <a:lin ang="6000000" scaled="0"/>
+          </a:gradFill>
+          <a:ln>
+            <a:noFill/>
+          </a:ln>
+        </p:spPr>
+        <p:style>
+          <a:lnRef idx="2">
+            <a:schemeClr val="accent1">
+              <a:shade val="50000"/>
+            </a:schemeClr>
+          </a:lnRef>
+          <a:fillRef idx="1">
+            <a:schemeClr val="accent1"/>
+          </a:fillRef>
+          <a:effectRef idx="0">
+            <a:schemeClr val="accent1"/>
+          </a:effectRef>
+          <a:fontRef idx="minor">
+            <a:schemeClr val="lt1"/>
+          </a:fontRef>
+        </p:style>
+        <p:txBody>
+          <a:bodyPr rtlCol="0" anchor="ctr"/>
+          <a:lstStyle/>
+          <a:p>
+            <a:pPr algn="ctr"/>
+            <a:endParaRPr lang="en-US"/>
+          </a:p>
+        </p:txBody>
+      </p:sp>
+      <p:sp>
+        <p:nvSpPr>
+          <p:cNvPr id="23" name="Rectangle 22">
+            <a:extLst>
+              <a:ext uri="{FF2B5EF4-FFF2-40B4-BE49-F238E27FC236}">
+                <a16:creationId xmlns:a16="http://schemas.microsoft.com/office/drawing/2014/main" id="{84A8DE83-DE75-4B41-9DB4-A7EC0B0DEC0B}"/>
+              </a:ext>
+              <a:ext uri="{C183D7F6-B498-43B3-948B-1728B52AA6E4}">
+                <adec:decorative xmlns:adec="http://schemas.microsoft.com/office/drawing/2017/decorative" val="1"/>
+              </a:ext>
+            </a:extLst>
+          </p:cNvPr>
+          <p:cNvSpPr>
+            <a:spLocks noGrp="1" noRot="1" noChangeAspect="1" noMove="1" noResize="1" noEditPoints="1" noAdjustHandles="1" noChangeArrowheads="1" noChangeShapeType="1" noTextEdit="1"/>
+          </p:cNvSpPr>
+          <p:nvPr>
+            <p:extLst>
+              <p:ext uri="{386F3935-93C4-4BCD-93E2-E3B085C9AB24}">
+                <p16:designElem xmlns:p16="http://schemas.microsoft.com/office/powerpoint/2015/main" val="1"/>
+              </p:ext>
+            </p:extLst>
+          </p:nvPr>
+        </p:nvSpPr>
+        <p:spPr>
+          <a:xfrm>
+            <a:off x="0" y="0"/>
+            <a:ext cx="6096642" cy="1181595"/>
+          </a:xfrm>
+          <a:prstGeom prst="rect">
+            <a:avLst/>
+          </a:prstGeom>
+          <a:gradFill>
+            <a:gsLst>
+              <a:gs pos="0">
+                <a:schemeClr val="accent1">
+                  <a:alpha val="41000"/>
+                </a:schemeClr>
+              </a:gs>
+              <a:gs pos="74000">
+                <a:schemeClr val="accent1">
+                  <a:lumMod val="60000"/>
+                  <a:lumOff val="40000"/>
+                  <a:alpha val="0"/>
+                </a:schemeClr>
+              </a:gs>
+            </a:gsLst>
+            <a:lin ang="8400000" scaled="0"/>
+          </a:gradFill>
+          <a:ln>
+            <a:noFill/>
+          </a:ln>
+        </p:spPr>
+        <p:style>
+          <a:lnRef idx="2">
+            <a:schemeClr val="accent1">
+              <a:shade val="50000"/>
+            </a:schemeClr>
+          </a:lnRef>
+          <a:fillRef idx="1">
+            <a:schemeClr val="accent1"/>
+          </a:fillRef>
+          <a:effectRef idx="0">
+            <a:schemeClr val="accent1"/>
+          </a:effectRef>
+          <a:fontRef idx="minor">
+            <a:schemeClr val="lt1"/>
+          </a:fontRef>
+        </p:style>
+        <p:txBody>
+          <a:bodyPr rtlCol="0" anchor="ctr"/>
+          <a:lstStyle/>
+          <a:p>
+            <a:pPr algn="ctr"/>
+            <a:endParaRPr lang="en-US"/>
+          </a:p>
+        </p:txBody>
+      </p:sp>
+      <p:sp>
+        <p:nvSpPr>
+          <p:cNvPr id="25" name="Rectangle 24">
+            <a:extLst>
+              <a:ext uri="{FF2B5EF4-FFF2-40B4-BE49-F238E27FC236}">
+                <a16:creationId xmlns:a16="http://schemas.microsoft.com/office/drawing/2014/main" id="{A7009A0A-BEF5-4EAC-AF15-E4F9F002E239}"/>
+              </a:ext>
+              <a:ext uri="{C183D7F6-B498-43B3-948B-1728B52AA6E4}">
+                <adec:decorative xmlns:adec="http://schemas.microsoft.com/office/drawing/2017/decorative" val="1"/>
+              </a:ext>
+            </a:extLst>
+          </p:cNvPr>
+          <p:cNvSpPr>
+            <a:spLocks noGrp="1" noRot="1" noChangeAspect="1" noMove="1" noResize="1" noEditPoints="1" noAdjustHandles="1" noChangeArrowheads="1" noChangeShapeType="1" noTextEdit="1"/>
+          </p:cNvSpPr>
+          <p:nvPr>
+            <p:extLst>
+              <p:ext uri="{386F3935-93C4-4BCD-93E2-E3B085C9AB24}">
+                <p16:designElem xmlns:p16="http://schemas.microsoft.com/office/powerpoint/2015/main" val="1"/>
+              </p:ext>
+            </p:extLst>
+          </p:nvPr>
+        </p:nvSpPr>
+        <p:spPr>
+          <a:xfrm flipH="1">
+            <a:off x="-2" y="0"/>
+            <a:ext cx="9144001" cy="1180732"/>
+          </a:xfrm>
+          <a:prstGeom prst="rect">
+            <a:avLst/>
+          </a:prstGeom>
+          <a:gradFill>
+            <a:gsLst>
+              <a:gs pos="0">
+                <a:srgbClr val="000000">
+                  <a:alpha val="63000"/>
+                </a:srgbClr>
+              </a:gs>
+              <a:gs pos="78000">
+                <a:schemeClr val="accent1">
+                  <a:alpha val="15000"/>
+                </a:schemeClr>
+              </a:gs>
+            </a:gsLst>
+            <a:lin ang="15600000" scaled="0"/>
+          </a:gradFill>
+          <a:ln>
+            <a:noFill/>
+          </a:ln>
+        </p:spPr>
+        <p:style>
+          <a:lnRef idx="2">
+            <a:schemeClr val="accent1">
+              <a:shade val="50000"/>
+            </a:schemeClr>
+          </a:lnRef>
+          <a:fillRef idx="1">
+            <a:schemeClr val="accent1"/>
+          </a:fillRef>
+          <a:effectRef idx="0">
+            <a:schemeClr val="accent1"/>
+          </a:effectRef>
+          <a:fontRef idx="minor">
+            <a:schemeClr val="lt1"/>
+          </a:fontRef>
+        </p:style>
+        <p:txBody>
+          <a:bodyPr rtlCol="0" anchor="ctr"/>
+          <a:lstStyle/>
+          <a:p>
+            <a:pPr algn="ctr"/>
+            <a:endParaRPr lang="en-US"/>
+          </a:p>
+        </p:txBody>
+      </p:sp>
+      <p:sp>
+        <p:nvSpPr>
+          <p:cNvPr id="4" name="Text 1">
+            <a:extLst>
+              <a:ext uri="{FF2B5EF4-FFF2-40B4-BE49-F238E27FC236}">
+                <a16:creationId xmlns:a16="http://schemas.microsoft.com/office/drawing/2014/main" id="{3166B150-CCF4-0BED-B7A1-A7C3A335EA15}"/>
+              </a:ext>
+            </a:extLst>
+          </p:cNvPr>
+          <p:cNvSpPr/>
+          <p:nvPr/>
+        </p:nvSpPr>
+        <p:spPr>
+          <a:xfrm>
+            <a:off x="524784" y="186028"/>
+            <a:ext cx="5297791" cy="869400"/>
+          </a:xfrm>
+          <a:prstGeom prst="rect">
+            <a:avLst/>
+          </a:prstGeom>
+        </p:spPr>
+        <p:txBody>
+          <a:bodyPr vert="horz" lIns="91440" tIns="45720" rIns="91440" bIns="45720" rtlCol="0" anchor="ctr">
+            <a:normAutofit/>
+          </a:bodyPr>
+          <a:lstStyle/>
+          <a:p>
+            <a:pPr marL="0" indent="0">
+              <a:lnSpc>
+                <a:spcPct val="90000"/>
+              </a:lnSpc>
+              <a:spcBef>
+                <a:spcPct val="0"/>
+              </a:spcBef>
+              <a:spcAft>
+                <a:spcPts val="600"/>
+              </a:spcAft>
+            </a:pPr>
+            <a:r>
+              <a:rPr lang="en-US" sz="2800" b="1" kern="1200">
+                <a:solidFill>
+                  <a:srgbClr val="FFFFFF"/>
+                </a:solidFill>
+                <a:latin typeface="+mj-lt"/>
+                <a:ea typeface="+mj-ea"/>
+                <a:cs typeface="+mj-cs"/>
+              </a:rPr>
+              <a:t>Increasing Ridership meets decreasing enrollment</a:t>
+            </a:r>
+            <a:endParaRPr lang="en-US" sz="2800" kern="1200">
+              <a:solidFill>
+                <a:srgbClr val="FFFFFF"/>
+              </a:solidFill>
+              <a:latin typeface="+mj-lt"/>
+              <a:ea typeface="+mj-ea"/>
+              <a:cs typeface="+mj-cs"/>
+            </a:endParaRPr>
+          </a:p>
+        </p:txBody>
+      </p:sp>
+      <p:pic>
+        <p:nvPicPr>
+          <p:cNvPr id="3" name="Picture 2">
+            <a:extLst>
+              <a:ext uri="{FF2B5EF4-FFF2-40B4-BE49-F238E27FC236}">
+                <a16:creationId xmlns:a16="http://schemas.microsoft.com/office/drawing/2014/main" id="{9746D6A9-FD35-FA11-35AD-4F4D94472C7B}"/>
+              </a:ext>
+            </a:extLst>
+          </p:cNvPr>
+          <p:cNvPicPr>
+            <a:picLocks noChangeAspect="1"/>
+          </p:cNvPicPr>
+          <p:nvPr/>
+        </p:nvPicPr>
+        <p:blipFill>
+          <a:blip r:embed="rId2"/>
+          <a:stretch>
+            <a:fillRect/>
+          </a:stretch>
+        </p:blipFill>
+        <p:spPr>
+          <a:xfrm>
+            <a:off x="324168" y="1530103"/>
+            <a:ext cx="8495662" cy="3228352"/>
+          </a:xfrm>
+          <a:prstGeom prst="rect">
+            <a:avLst/>
+          </a:prstGeom>
+        </p:spPr>
+      </p:pic>
+      <p:sp>
+        <p:nvSpPr>
+          <p:cNvPr id="5" name="Shape 0">
+            <a:extLst>
+              <a:ext uri="{FF2B5EF4-FFF2-40B4-BE49-F238E27FC236}">
+                <a16:creationId xmlns:a16="http://schemas.microsoft.com/office/drawing/2014/main" id="{8F6A6998-7EFA-DC57-EB62-7EB6A7DECC89}"/>
+              </a:ext>
+            </a:extLst>
+          </p:cNvPr>
+          <p:cNvSpPr/>
+          <p:nvPr/>
+        </p:nvSpPr>
+        <p:spPr>
+          <a:xfrm>
+            <a:off x="0" y="0"/>
+            <a:ext cx="54864" cy="5143500"/>
+          </a:xfrm>
+          <a:prstGeom prst="rect">
+            <a:avLst/>
+          </a:prstGeom>
+          <a:solidFill>
+            <a:srgbClr val="1D9E75"/>
+          </a:solidFill>
+          <a:ln/>
+        </p:spPr>
+        <p:txBody>
+          <a:bodyPr/>
+          <a:lstStyle/>
+          <a:p>
+            <a:endParaRPr lang="en-US"/>
+          </a:p>
+        </p:txBody>
+      </p:sp>
+    </p:spTree>
+    <p:extLst>
+      <p:ext uri="{BB962C8B-B14F-4D97-AF65-F5344CB8AC3E}">
+        <p14:creationId xmlns:p14="http://schemas.microsoft.com/office/powerpoint/2010/main" val="3448543337"/>
+      </p:ext>
+    </p:extLst>
+  </p:cSld>
+  <p:clrMapOvr>
+    <a:masterClrMapping/>
+  </p:clrMapOvr>
+</p:sld>
+</file>
+
+<file path=ppt/slides/slide21.xml><?xml version="1.0" encoding="utf-8"?>
+<p:sld xmlns:a="http://schemas.openxmlformats.org/drawingml/2006/main" xmlns:r="http://schemas.openxmlformats.org/officeDocument/2006/relationships" xmlns:p="http://schemas.openxmlformats.org/presentationml/2006/main">
+  <p:cSld name="Slide 17">
+    <p:bg>
+      <p:bgPr>
+        <a:solidFill>
+          <a:srgbClr val="F4F7FB"/>
+        </a:solidFill>
+        <a:effectLst/>
+      </p:bgPr>
+    </p:bg>
+    <p:spTree>
+      <p:nvGrpSpPr>
+        <p:cNvPr id="1" name=""/>
+        <p:cNvGrpSpPr/>
+        <p:nvPr/>
+      </p:nvGrpSpPr>
+      <p:grpSpPr>
+        <a:xfrm>
+          <a:off x="0" y="0"/>
+          <a:ext cx="0" cy="0"/>
+          <a:chOff x="0" y="0"/>
+          <a:chExt cx="0" cy="0"/>
+        </a:xfrm>
+      </p:grpSpPr>
+      <p:sp>
+        <p:nvSpPr>
+          <p:cNvPr id="2" name="Text 0"/>
+          <p:cNvSpPr/>
+          <p:nvPr/>
+        </p:nvSpPr>
+        <p:spPr>
+          <a:xfrm>
+            <a:off x="457200" y="182880"/>
+            <a:ext cx="8229600" cy="548640"/>
+          </a:xfrm>
+          <a:prstGeom prst="rect">
+            <a:avLst/>
+          </a:prstGeom>
+          <a:noFill/>
+          <a:ln/>
+        </p:spPr>
+        <p:txBody>
+          <a:bodyPr wrap="square" rtlCol="0" anchor="ctr"/>
+          <a:lstStyle/>
+          <a:p>
+            <a:pPr marL="0" indent="0">
+              <a:buNone/>
+            </a:pPr>
+            <a:r>
+              <a:rPr lang="en-US" sz="2800" b="1" dirty="0">
+                <a:solidFill>
+                  <a:srgbClr val="0A2342"/>
+                </a:solidFill>
+              </a:rPr>
+              <a:t>More Essential Per Student Than Ever</a:t>
+            </a:r>
+            <a:endParaRPr lang="en-US" sz="2800" dirty="0"/>
+          </a:p>
+        </p:txBody>
+      </p:sp>
+      <p:sp>
+        <p:nvSpPr>
+          <p:cNvPr id="3" name="Text 1"/>
+          <p:cNvSpPr/>
+          <p:nvPr/>
+        </p:nvSpPr>
+        <p:spPr>
+          <a:xfrm>
+            <a:off x="457200" y="731520"/>
+            <a:ext cx="8229600" cy="320040"/>
+          </a:xfrm>
+          <a:prstGeom prst="rect">
+            <a:avLst/>
+          </a:prstGeom>
+          <a:noFill/>
+          <a:ln/>
+        </p:spPr>
+        <p:txBody>
+          <a:bodyPr wrap="square" rtlCol="0" anchor="ctr"/>
+          <a:lstStyle/>
+          <a:p>
+            <a:pPr marL="0" indent="0">
+              <a:buNone/>
+            </a:pPr>
+            <a:r>
+              <a:rPr lang="en-US" sz="1300" dirty="0">
+                <a:solidFill>
+                  <a:srgbClr val="64748B"/>
+                </a:solidFill>
+              </a:rPr>
+              <a:t>Fall enrollment has fallen 30% since 2011 — yet ridership has grown. Students rely on EPTA more, not less.</a:t>
+            </a:r>
+            <a:endParaRPr lang="en-US" sz="1300" dirty="0"/>
+          </a:p>
+        </p:txBody>
+      </p:sp>
+      <p:graphicFrame>
+        <p:nvGraphicFramePr>
+          <p:cNvPr id="4" name="Chart 0"/>
+          <p:cNvGraphicFramePr/>
+          <p:nvPr>
+            <p:extLst>
+              <p:ext uri="{D42A27DB-BD31-4B8C-83A1-F6EECF244321}">
+                <p14:modId xmlns:p14="http://schemas.microsoft.com/office/powerpoint/2010/main" val="4073993336"/>
+              </p:ext>
+            </p:extLst>
+          </p:nvPr>
+        </p:nvGraphicFramePr>
+        <p:xfrm>
+          <a:off x="365760" y="1097280"/>
+          <a:ext cx="8412480" cy="2697480"/>
+        </p:xfrm>
+        <a:graphic>
+          <a:graphicData uri="http://schemas.openxmlformats.org/drawingml/2006/chart">
+            <c:chart xmlns:c="http://schemas.openxmlformats.org/drawingml/2006/chart" xmlns:r="http://schemas.openxmlformats.org/officeDocument/2006/relationships" r:id="rId3"/>
+          </a:graphicData>
+        </a:graphic>
+      </p:graphicFrame>
+      <p:sp>
+        <p:nvSpPr>
+          <p:cNvPr id="5" name="Shape 2"/>
+          <p:cNvSpPr/>
+          <p:nvPr/>
+        </p:nvSpPr>
+        <p:spPr>
+          <a:xfrm>
+            <a:off x="320040" y="4114800"/>
+            <a:ext cx="2651760" cy="914400"/>
+          </a:xfrm>
+          <a:prstGeom prst="rect">
+            <a:avLst/>
+          </a:prstGeom>
+          <a:solidFill>
+            <a:srgbClr val="FFFFFF"/>
+          </a:solidFill>
+          <a:ln w="6350">
+            <a:solidFill>
+              <a:srgbClr val="E2E8F0"/>
+            </a:solidFill>
+            <a:prstDash val="solid"/>
+          </a:ln>
+          <a:effectLst>
+            <a:outerShdw blurRad="101600" dist="38100" dir="8100000" algn="bl" rotWithShape="0">
+              <a:srgbClr val="000000">
+                <a:alpha val="12000"/>
+              </a:srgbClr>
+            </a:outerShdw>
+          </a:effectLst>
+        </p:spPr>
+        <p:txBody>
+          <a:bodyPr/>
+          <a:lstStyle/>
+          <a:p>
+            <a:endParaRPr lang="en-US"/>
+          </a:p>
+        </p:txBody>
+      </p:sp>
+      <p:sp>
+        <p:nvSpPr>
+          <p:cNvPr id="6" name="Shape 3"/>
+          <p:cNvSpPr/>
+          <p:nvPr/>
+        </p:nvSpPr>
+        <p:spPr>
+          <a:xfrm>
+            <a:off x="320040" y="4114800"/>
+            <a:ext cx="2651760" cy="64008"/>
+          </a:xfrm>
+          <a:prstGeom prst="rect">
+            <a:avLst/>
+          </a:prstGeom>
+          <a:solidFill>
+            <a:srgbClr val="D85A30"/>
+          </a:solidFill>
+          <a:ln/>
+        </p:spPr>
+        <p:txBody>
+          <a:bodyPr/>
+          <a:lstStyle/>
+          <a:p>
+            <a:endParaRPr lang="en-US"/>
+          </a:p>
+        </p:txBody>
+      </p:sp>
+      <p:sp>
+        <p:nvSpPr>
+          <p:cNvPr id="7" name="Text 4"/>
+          <p:cNvSpPr/>
+          <p:nvPr/>
+        </p:nvSpPr>
+        <p:spPr>
+          <a:xfrm>
+            <a:off x="320040" y="4047526"/>
+            <a:ext cx="2651760" cy="685800"/>
+          </a:xfrm>
+          <a:prstGeom prst="rect">
+            <a:avLst/>
+          </a:prstGeom>
+          <a:noFill/>
+          <a:ln/>
+        </p:spPr>
+        <p:txBody>
+          <a:bodyPr wrap="square" lIns="0" tIns="0" rIns="0" bIns="0" rtlCol="0" anchor="ctr"/>
+          <a:lstStyle/>
+          <a:p>
+            <a:pPr marL="0" indent="0" algn="ctr">
+              <a:buNone/>
+            </a:pPr>
+            <a:r>
+              <a:rPr lang="en-US" sz="3800" b="1" dirty="0">
+                <a:solidFill>
+                  <a:srgbClr val="D85A30"/>
+                </a:solidFill>
+              </a:rPr>
+              <a:t>-30%</a:t>
+            </a:r>
+            <a:endParaRPr lang="en-US" sz="3800" dirty="0"/>
+          </a:p>
+        </p:txBody>
+      </p:sp>
+      <p:sp>
+        <p:nvSpPr>
+          <p:cNvPr id="8" name="Text 5"/>
+          <p:cNvSpPr/>
+          <p:nvPr/>
+        </p:nvSpPr>
+        <p:spPr>
+          <a:xfrm>
+            <a:off x="429768" y="4509298"/>
+            <a:ext cx="2432304" cy="320040"/>
+          </a:xfrm>
+          <a:prstGeom prst="rect">
+            <a:avLst/>
+          </a:prstGeom>
+          <a:noFill/>
+          <a:ln/>
+        </p:spPr>
+        <p:txBody>
+          <a:bodyPr wrap="square" lIns="0" tIns="0" rIns="0" bIns="0" rtlCol="0" anchor="ctr"/>
+          <a:lstStyle/>
+          <a:p>
+            <a:pPr marL="0" indent="0" algn="ctr">
+              <a:buNone/>
+            </a:pPr>
+            <a:r>
+              <a:rPr lang="en-US" sz="1300" b="1" dirty="0">
+                <a:solidFill>
+                  <a:srgbClr val="334155"/>
+                </a:solidFill>
+              </a:rPr>
+              <a:t>Enrollment decline</a:t>
+            </a:r>
+            <a:endParaRPr lang="en-US" sz="1300" dirty="0"/>
+          </a:p>
+        </p:txBody>
+      </p:sp>
+      <p:sp>
+        <p:nvSpPr>
+          <p:cNvPr id="9" name="Text 6"/>
+          <p:cNvSpPr/>
+          <p:nvPr/>
+        </p:nvSpPr>
+        <p:spPr>
+          <a:xfrm>
+            <a:off x="411480" y="4783618"/>
+            <a:ext cx="2468880" cy="228600"/>
+          </a:xfrm>
+          <a:prstGeom prst="rect">
+            <a:avLst/>
+          </a:prstGeom>
+          <a:noFill/>
+          <a:ln/>
+        </p:spPr>
+        <p:txBody>
+          <a:bodyPr wrap="square" lIns="0" tIns="0" rIns="0" bIns="0" rtlCol="0" anchor="ctr"/>
+          <a:lstStyle/>
+          <a:p>
+            <a:pPr marL="0" indent="0" algn="ctr">
+              <a:buNone/>
+            </a:pPr>
+            <a:r>
+              <a:rPr lang="en-US" sz="1000" dirty="0">
+                <a:solidFill>
+                  <a:srgbClr val="64748B"/>
+                </a:solidFill>
+              </a:rPr>
+              <a:t>4,393 (2011) → 3,069 (2025)</a:t>
+            </a:r>
+            <a:endParaRPr lang="en-US" sz="1000" dirty="0"/>
+          </a:p>
+        </p:txBody>
+      </p:sp>
+      <p:sp>
+        <p:nvSpPr>
+          <p:cNvPr id="10" name="Shape 7"/>
+          <p:cNvSpPr/>
+          <p:nvPr/>
+        </p:nvSpPr>
+        <p:spPr>
+          <a:xfrm>
+            <a:off x="3246120" y="4114800"/>
+            <a:ext cx="2651760" cy="914400"/>
+          </a:xfrm>
+          <a:prstGeom prst="rect">
+            <a:avLst/>
+          </a:prstGeom>
+          <a:solidFill>
+            <a:srgbClr val="FFFFFF"/>
+          </a:solidFill>
+          <a:ln w="6350">
+            <a:solidFill>
+              <a:srgbClr val="E2E8F0"/>
+            </a:solidFill>
+            <a:prstDash val="solid"/>
+          </a:ln>
+          <a:effectLst>
+            <a:outerShdw blurRad="101600" dist="38100" dir="8100000" algn="bl" rotWithShape="0">
+              <a:srgbClr val="000000">
+                <a:alpha val="12000"/>
+              </a:srgbClr>
+            </a:outerShdw>
+          </a:effectLst>
+        </p:spPr>
+        <p:txBody>
+          <a:bodyPr/>
+          <a:lstStyle/>
+          <a:p>
+            <a:endParaRPr lang="en-US"/>
+          </a:p>
+        </p:txBody>
+      </p:sp>
+      <p:sp>
+        <p:nvSpPr>
+          <p:cNvPr id="11" name="Shape 8"/>
+          <p:cNvSpPr/>
+          <p:nvPr/>
+        </p:nvSpPr>
+        <p:spPr>
+          <a:xfrm>
+            <a:off x="3246120" y="4114800"/>
+            <a:ext cx="2651760" cy="64008"/>
+          </a:xfrm>
+          <a:prstGeom prst="rect">
+            <a:avLst/>
+          </a:prstGeom>
+          <a:solidFill>
+            <a:srgbClr val="1D9E75"/>
+          </a:solidFill>
+          <a:ln/>
+        </p:spPr>
+        <p:txBody>
+          <a:bodyPr/>
+          <a:lstStyle/>
+          <a:p>
+            <a:endParaRPr lang="en-US"/>
+          </a:p>
+        </p:txBody>
+      </p:sp>
+      <p:sp>
+        <p:nvSpPr>
+          <p:cNvPr id="12" name="Text 9"/>
+          <p:cNvSpPr/>
+          <p:nvPr/>
+        </p:nvSpPr>
+        <p:spPr>
+          <a:xfrm>
+            <a:off x="3246120" y="4046220"/>
+            <a:ext cx="2651760" cy="685800"/>
+          </a:xfrm>
+          <a:prstGeom prst="rect">
+            <a:avLst/>
+          </a:prstGeom>
+          <a:noFill/>
+          <a:ln/>
+        </p:spPr>
+        <p:txBody>
+          <a:bodyPr wrap="square" lIns="0" tIns="0" rIns="0" bIns="0" rtlCol="0" anchor="ctr"/>
+          <a:lstStyle/>
+          <a:p>
+            <a:pPr marL="0" indent="0" algn="ctr">
+              <a:buNone/>
+            </a:pPr>
+            <a:r>
+              <a:rPr lang="en-US" sz="3800" b="1" dirty="0">
+                <a:solidFill>
+                  <a:srgbClr val="1D9E75"/>
+                </a:solidFill>
+              </a:rPr>
+              <a:t>+163%</a:t>
+            </a:r>
+            <a:endParaRPr lang="en-US" sz="3800" dirty="0"/>
+          </a:p>
+        </p:txBody>
+      </p:sp>
+      <p:sp>
+        <p:nvSpPr>
+          <p:cNvPr id="13" name="Text 10"/>
+          <p:cNvSpPr/>
+          <p:nvPr/>
+        </p:nvSpPr>
+        <p:spPr>
+          <a:xfrm>
+            <a:off x="3355848" y="4545874"/>
+            <a:ext cx="2432304" cy="320040"/>
+          </a:xfrm>
+          <a:prstGeom prst="rect">
+            <a:avLst/>
+          </a:prstGeom>
+          <a:noFill/>
+          <a:ln/>
+        </p:spPr>
+        <p:txBody>
+          <a:bodyPr wrap="square" lIns="0" tIns="0" rIns="0" bIns="0" rtlCol="0" anchor="ctr"/>
+          <a:lstStyle/>
+          <a:p>
+            <a:pPr marL="0" indent="0" algn="ctr">
+              <a:buNone/>
+            </a:pPr>
+            <a:r>
+              <a:rPr lang="en-US" sz="1300" b="1" dirty="0">
+                <a:solidFill>
+                  <a:srgbClr val="334155"/>
+                </a:solidFill>
+              </a:rPr>
+              <a:t>Ridership per student</a:t>
+            </a:r>
+            <a:endParaRPr lang="en-US" sz="1300" dirty="0"/>
+          </a:p>
+        </p:txBody>
+      </p:sp>
+      <p:sp>
+        <p:nvSpPr>
+          <p:cNvPr id="14" name="Text 11"/>
+          <p:cNvSpPr/>
+          <p:nvPr/>
+        </p:nvSpPr>
+        <p:spPr>
+          <a:xfrm>
+            <a:off x="3337560" y="4820194"/>
+            <a:ext cx="2468880" cy="228600"/>
+          </a:xfrm>
+          <a:prstGeom prst="rect">
+            <a:avLst/>
+          </a:prstGeom>
+          <a:noFill/>
+          <a:ln/>
+        </p:spPr>
+        <p:txBody>
+          <a:bodyPr wrap="square" lIns="0" tIns="0" rIns="0" bIns="0" rtlCol="0" anchor="ctr"/>
+          <a:lstStyle/>
+          <a:p>
+            <a:pPr marL="0" indent="0" algn="ctr">
+              <a:buNone/>
+            </a:pPr>
+            <a:r>
+              <a:rPr lang="en-US" sz="1000" dirty="0">
+                <a:solidFill>
+                  <a:srgbClr val="64748B"/>
+                </a:solidFill>
+              </a:rPr>
+              <a:t>4.6 (FY11) → 12.1+ (FY26)</a:t>
+            </a:r>
+            <a:endParaRPr lang="en-US" sz="1000" dirty="0"/>
+          </a:p>
+        </p:txBody>
+      </p:sp>
+      <p:sp>
+        <p:nvSpPr>
+          <p:cNvPr id="15" name="Shape 12"/>
+          <p:cNvSpPr/>
+          <p:nvPr/>
+        </p:nvSpPr>
+        <p:spPr>
+          <a:xfrm>
+            <a:off x="6172200" y="4114800"/>
+            <a:ext cx="2651760" cy="914400"/>
+          </a:xfrm>
+          <a:prstGeom prst="rect">
+            <a:avLst/>
+          </a:prstGeom>
+          <a:solidFill>
+            <a:srgbClr val="FFFFFF"/>
+          </a:solidFill>
+          <a:ln w="6350">
+            <a:solidFill>
+              <a:srgbClr val="E2E8F0"/>
+            </a:solidFill>
+            <a:prstDash val="solid"/>
+          </a:ln>
+          <a:effectLst>
+            <a:outerShdw blurRad="101600" dist="38100" dir="8100000" algn="bl" rotWithShape="0">
+              <a:srgbClr val="000000">
+                <a:alpha val="12000"/>
+              </a:srgbClr>
+            </a:outerShdw>
+          </a:effectLst>
+        </p:spPr>
+        <p:txBody>
+          <a:bodyPr/>
+          <a:lstStyle/>
+          <a:p>
+            <a:endParaRPr lang="en-US"/>
+          </a:p>
+        </p:txBody>
+      </p:sp>
+      <p:sp>
+        <p:nvSpPr>
+          <p:cNvPr id="16" name="Shape 13"/>
+          <p:cNvSpPr/>
+          <p:nvPr/>
+        </p:nvSpPr>
+        <p:spPr>
+          <a:xfrm>
+            <a:off x="6172200" y="4114800"/>
+            <a:ext cx="2651760" cy="64008"/>
+          </a:xfrm>
+          <a:prstGeom prst="rect">
+            <a:avLst/>
+          </a:prstGeom>
+          <a:solidFill>
+            <a:srgbClr val="BA7517"/>
+          </a:solidFill>
+          <a:ln/>
+        </p:spPr>
+        <p:txBody>
+          <a:bodyPr/>
+          <a:lstStyle/>
+          <a:p>
+            <a:endParaRPr lang="en-US"/>
+          </a:p>
+        </p:txBody>
+      </p:sp>
+      <p:sp>
+        <p:nvSpPr>
+          <p:cNvPr id="17" name="Text 14"/>
+          <p:cNvSpPr/>
+          <p:nvPr/>
+        </p:nvSpPr>
+        <p:spPr>
+          <a:xfrm>
+            <a:off x="6126480" y="4040995"/>
+            <a:ext cx="2651760" cy="685800"/>
+          </a:xfrm>
+          <a:prstGeom prst="rect">
+            <a:avLst/>
+          </a:prstGeom>
+          <a:noFill/>
+          <a:ln/>
+        </p:spPr>
+        <p:txBody>
+          <a:bodyPr wrap="square" lIns="0" tIns="0" rIns="0" bIns="0" rtlCol="0" anchor="ctr"/>
+          <a:lstStyle/>
+          <a:p>
+            <a:pPr marL="0" indent="0" algn="ctr">
+              <a:buNone/>
+            </a:pPr>
+            <a:r>
+              <a:rPr lang="en-US" sz="3800" b="1" dirty="0">
+                <a:solidFill>
+                  <a:srgbClr val="BA7517"/>
+                </a:solidFill>
+              </a:rPr>
+              <a:t>3,069</a:t>
+            </a:r>
+            <a:endParaRPr lang="en-US" sz="3800" dirty="0"/>
+          </a:p>
+        </p:txBody>
+      </p:sp>
+      <p:sp>
+        <p:nvSpPr>
+          <p:cNvPr id="18" name="Text 15"/>
+          <p:cNvSpPr/>
+          <p:nvPr/>
+        </p:nvSpPr>
+        <p:spPr>
+          <a:xfrm>
+            <a:off x="6327648" y="4512563"/>
+            <a:ext cx="2432304" cy="320040"/>
+          </a:xfrm>
+          <a:prstGeom prst="rect">
+            <a:avLst/>
+          </a:prstGeom>
+          <a:noFill/>
+          <a:ln/>
+        </p:spPr>
+        <p:txBody>
+          <a:bodyPr wrap="square" lIns="0" tIns="0" rIns="0" bIns="0" rtlCol="0" anchor="ctr"/>
+          <a:lstStyle/>
+          <a:p>
+            <a:pPr marL="0" indent="0" algn="ctr">
+              <a:buNone/>
+            </a:pPr>
+            <a:r>
+              <a:rPr lang="en-US" sz="1300" b="1" dirty="0">
+                <a:solidFill>
+                  <a:srgbClr val="334155"/>
+                </a:solidFill>
+              </a:rPr>
+              <a:t>Students enrolled</a:t>
+            </a:r>
+            <a:endParaRPr lang="en-US" sz="1300" dirty="0"/>
+          </a:p>
+        </p:txBody>
+      </p:sp>
+      <p:sp>
+        <p:nvSpPr>
+          <p:cNvPr id="19" name="Text 16"/>
+          <p:cNvSpPr/>
+          <p:nvPr/>
+        </p:nvSpPr>
+        <p:spPr>
+          <a:xfrm>
+            <a:off x="6309360" y="4786883"/>
+            <a:ext cx="2468880" cy="228600"/>
+          </a:xfrm>
+          <a:prstGeom prst="rect">
+            <a:avLst/>
+          </a:prstGeom>
+          <a:noFill/>
+          <a:ln/>
+        </p:spPr>
+        <p:txBody>
+          <a:bodyPr wrap="square" lIns="0" tIns="0" rIns="0" bIns="0" rtlCol="0" anchor="ctr"/>
+          <a:lstStyle/>
+          <a:p>
+            <a:pPr marL="0" indent="0" algn="ctr">
+              <a:buNone/>
+            </a:pPr>
+            <a:r>
+              <a:rPr lang="en-US" sz="1000" dirty="0">
+                <a:solidFill>
+                  <a:srgbClr val="64748B"/>
+                </a:solidFill>
+              </a:rPr>
+              <a:t>Fall 2025 — lowest in 14 years</a:t>
+            </a:r>
+            <a:endParaRPr lang="en-US" sz="1000" dirty="0"/>
+          </a:p>
+        </p:txBody>
+      </p:sp>
+      <p:sp>
+        <p:nvSpPr>
+          <p:cNvPr id="20" name="Shape 0">
+            <a:extLst>
+              <a:ext uri="{FF2B5EF4-FFF2-40B4-BE49-F238E27FC236}">
+                <a16:creationId xmlns:a16="http://schemas.microsoft.com/office/drawing/2014/main" id="{F56D439D-941B-A559-6A06-C72306E6BDE4}"/>
+              </a:ext>
+            </a:extLst>
+          </p:cNvPr>
+          <p:cNvSpPr/>
+          <p:nvPr/>
+        </p:nvSpPr>
+        <p:spPr>
+          <a:xfrm>
+            <a:off x="0" y="0"/>
+            <a:ext cx="54864" cy="5143500"/>
+          </a:xfrm>
+          <a:prstGeom prst="rect">
+            <a:avLst/>
+          </a:prstGeom>
+          <a:solidFill>
+            <a:srgbClr val="1D9E75"/>
+          </a:solidFill>
+          <a:ln/>
+        </p:spPr>
+        <p:txBody>
+          <a:bodyPr/>
+          <a:lstStyle/>
+          <a:p>
+            <a:endParaRPr lang="en-US"/>
+          </a:p>
+        </p:txBody>
+      </p:sp>
+    </p:spTree>
+  </p:cSld>
+  <p:clrMapOvr>
+    <a:masterClrMapping/>
+  </p:clrMapOvr>
+</p:sld>
+</file>
+
+<file path=ppt/slides/slide22.xml><?xml version="1.0" encoding="utf-8"?>
+<p:sld xmlns:a="http://schemas.openxmlformats.org/drawingml/2006/main" xmlns:r="http://schemas.openxmlformats.org/officeDocument/2006/relationships" xmlns:p="http://schemas.openxmlformats.org/presentationml/2006/main">
   <p:cSld name="Slide 20">
     <p:bg>
       <p:bgPr>
@@ -11229,7 +12819,7 @@
         </p:nvSpPr>
         <p:spPr>
           <a:xfrm>
-            <a:off x="457200" y="2743200"/>
+            <a:off x="457200" y="3174274"/>
             <a:ext cx="8229600" cy="548640"/>
           </a:xfrm>
           <a:prstGeom prst="rect">
@@ -11260,6 +12850,37 @@
           </a:p>
         </p:txBody>
       </p:sp>
+      <p:pic>
+        <p:nvPicPr>
+          <p:cNvPr id="5" name="Picture 4">
+            <a:extLst>
+              <a:ext uri="{FF2B5EF4-FFF2-40B4-BE49-F238E27FC236}">
+                <a16:creationId xmlns:a16="http://schemas.microsoft.com/office/drawing/2014/main" id="{8708B585-1C85-0995-25ED-F32791276046}"/>
+              </a:ext>
+            </a:extLst>
+          </p:cNvPr>
+          <p:cNvPicPr>
+            <a:picLocks noChangeAspect="1"/>
+          </p:cNvPicPr>
+          <p:nvPr/>
+        </p:nvPicPr>
+        <p:blipFill>
+          <a:blip r:embed="rId3"/>
+          <a:srcRect b="9684"/>
+          <a:stretch>
+            <a:fillRect/>
+          </a:stretch>
+        </p:blipFill>
+        <p:spPr>
+          <a:xfrm>
+            <a:off x="5636622" y="0"/>
+            <a:ext cx="3507377" cy="3167743"/>
+          </a:xfrm>
+          <a:prstGeom prst="rect">
+            <a:avLst/>
+          </a:prstGeom>
+        </p:spPr>
+      </p:pic>
     </p:spTree>
   </p:cSld>
   <p:clrMapOvr>
@@ -11268,7 +12889,7 @@
 </p:sld>
 </file>
 
-<file path=ppt/slides/slide21.xml><?xml version="1.0" encoding="utf-8"?>
+<file path=ppt/slides/slide23.xml><?xml version="1.0" encoding="utf-8"?>
 <p:sld xmlns:a="http://schemas.openxmlformats.org/drawingml/2006/main" xmlns:r="http://schemas.openxmlformats.org/officeDocument/2006/relationships" xmlns:p="http://schemas.openxmlformats.org/presentationml/2006/main">
   <p:cSld name="Slide 21">
     <p:bg>
@@ -12027,7 +13648,7 @@
 </p:sld>
 </file>
 
-<file path=ppt/slides/slide22.xml><?xml version="1.0" encoding="utf-8"?>
+<file path=ppt/slides/slide24.xml><?xml version="1.0" encoding="utf-8"?>
 <p:sld xmlns:a="http://schemas.openxmlformats.org/drawingml/2006/main" xmlns:r="http://schemas.openxmlformats.org/officeDocument/2006/relationships" xmlns:p="http://schemas.openxmlformats.org/presentationml/2006/main">
   <p:cSld name="Slide 22">
     <p:bg>
@@ -12292,6 +13913,21 @@
               </a:rPr>
               <a:t>93% report satisfaction with service</a:t>
             </a:r>
+          </a:p>
+          <a:p>
+            <a:pPr marL="342900" indent="-342900">
+              <a:buSzPct val="100000"/>
+              <a:buFontTx/>
+              <a:buChar char="•"/>
+            </a:pPr>
+            <a:r>
+              <a:rPr lang="en-US" sz="1200" dirty="0">
+                <a:solidFill>
+                  <a:srgbClr val="C8D8E8"/>
+                </a:solidFill>
+              </a:rPr>
+              <a:t>43% of students support a fee increase to maintain service</a:t>
+            </a:r>
             <a:endParaRPr lang="en-US" sz="1200" dirty="0"/>
           </a:p>
           <a:p>
@@ -12313,90 +13949,6 @@
       </p:sp>
       <p:sp>
         <p:nvSpPr>
-          <p:cNvPr id="8" name="Text 6"/>
-          <p:cNvSpPr/>
-          <p:nvPr/>
-        </p:nvSpPr>
-        <p:spPr>
-          <a:xfrm>
-            <a:off x="6263640" y="1097280"/>
-            <a:ext cx="2743200" cy="2926080"/>
-          </a:xfrm>
-          <a:prstGeom prst="rect">
-            <a:avLst/>
-          </a:prstGeom>
-          <a:noFill/>
-          <a:ln/>
-        </p:spPr>
-        <p:txBody>
-          <a:bodyPr wrap="square" rtlCol="0" anchor="ctr"/>
-          <a:lstStyle/>
-          <a:p>
-            <a:pPr marL="0" indent="0" algn="ctr">
-              <a:buNone/>
-            </a:pPr>
-            <a:r>
-              <a:rPr lang="en-US" sz="1200" i="1" dirty="0">
-                <a:solidFill>
-                  <a:srgbClr val="4A6A8A"/>
-                </a:solidFill>
-              </a:rPr>
-              <a:t>📷</a:t>
-            </a:r>
-            <a:endParaRPr lang="en-US" sz="1200" dirty="0"/>
-          </a:p>
-          <a:p>
-            <a:pPr marL="0" indent="0" algn="ctr">
-              <a:buNone/>
-            </a:pPr>
-            <a:endParaRPr lang="en-US" sz="1200" dirty="0"/>
-          </a:p>
-          <a:p>
-            <a:pPr marL="0" indent="0" algn="ctr">
-              <a:buNone/>
-            </a:pPr>
-            <a:r>
-              <a:rPr lang="en-US" sz="1200" i="1" dirty="0">
-                <a:solidFill>
-                  <a:srgbClr val="4A6A8A"/>
-                </a:solidFill>
-              </a:rPr>
-              <a:t>INSERT PHOTO:</a:t>
-            </a:r>
-            <a:endParaRPr lang="en-US" sz="1200" dirty="0"/>
-          </a:p>
-          <a:p>
-            <a:pPr marL="0" indent="0" algn="ctr">
-              <a:buNone/>
-            </a:pPr>
-            <a:r>
-              <a:rPr lang="en-US" sz="1200" i="1" dirty="0">
-                <a:solidFill>
-                  <a:srgbClr val="4A6A8A"/>
-                </a:solidFill>
-              </a:rPr>
-              <a:t>Bus + students</a:t>
-            </a:r>
-            <a:endParaRPr lang="en-US" sz="1200" dirty="0"/>
-          </a:p>
-          <a:p>
-            <a:pPr marL="0" indent="0" algn="ctr">
-              <a:buNone/>
-            </a:pPr>
-            <a:r>
-              <a:rPr lang="en-US" sz="1200" i="1" dirty="0">
-                <a:solidFill>
-                  <a:srgbClr val="4A6A8A"/>
-                </a:solidFill>
-              </a:rPr>
-              <a:t>key image</a:t>
-            </a:r>
-            <a:endParaRPr lang="en-US" sz="1200" dirty="0"/>
-          </a:p>
-        </p:txBody>
-      </p:sp>
-      <p:sp>
-        <p:nvSpPr>
           <p:cNvPr id="9" name="Shape 7"/>
           <p:cNvSpPr/>
           <p:nvPr/>
@@ -12458,6 +14010,67 @@
           </a:p>
         </p:txBody>
       </p:sp>
+      <p:pic>
+        <p:nvPicPr>
+          <p:cNvPr id="12" name="Picture 11">
+            <a:extLst>
+              <a:ext uri="{FF2B5EF4-FFF2-40B4-BE49-F238E27FC236}">
+                <a16:creationId xmlns:a16="http://schemas.microsoft.com/office/drawing/2014/main" id="{8D44DC81-AE7E-FB76-DE7B-18E5B176BA01}"/>
+              </a:ext>
+            </a:extLst>
+          </p:cNvPr>
+          <p:cNvPicPr>
+            <a:picLocks noChangeAspect="1"/>
+          </p:cNvPicPr>
+          <p:nvPr/>
+        </p:nvPicPr>
+        <p:blipFill>
+          <a:blip r:embed="rId3"/>
+          <a:srcRect l="18900" t="3527" r="24199"/>
+          <a:stretch>
+            <a:fillRect/>
+          </a:stretch>
+        </p:blipFill>
+        <p:spPr>
+          <a:xfrm>
+            <a:off x="6434440" y="1795982"/>
+            <a:ext cx="2493039" cy="2817166"/>
+          </a:xfrm>
+          <a:prstGeom prst="rect">
+            <a:avLst/>
+          </a:prstGeom>
+        </p:spPr>
+      </p:pic>
+      <p:pic>
+        <p:nvPicPr>
+          <p:cNvPr id="14" name="Picture 13">
+            <a:extLst>
+              <a:ext uri="{FF2B5EF4-FFF2-40B4-BE49-F238E27FC236}">
+                <a16:creationId xmlns:a16="http://schemas.microsoft.com/office/drawing/2014/main" id="{3B9C9331-9592-629E-911B-489E92635444}"/>
+              </a:ext>
+            </a:extLst>
+          </p:cNvPr>
+          <p:cNvPicPr>
+            <a:picLocks noChangeAspect="1"/>
+          </p:cNvPicPr>
+          <p:nvPr/>
+        </p:nvPicPr>
+        <p:blipFill>
+          <a:blip r:embed="rId4"/>
+          <a:stretch>
+            <a:fillRect/>
+          </a:stretch>
+        </p:blipFill>
+        <p:spPr>
+          <a:xfrm>
+            <a:off x="6434440" y="602873"/>
+            <a:ext cx="2524212" cy="845741"/>
+          </a:xfrm>
+          <a:prstGeom prst="rect">
+            <a:avLst/>
+          </a:prstGeom>
+        </p:spPr>
+      </p:pic>
     </p:spTree>
   </p:cSld>
   <p:clrMapOvr>
@@ -12565,8 +14178,8 @@
         </p:nvSpPr>
         <p:spPr>
           <a:xfrm>
-            <a:off x="457200" y="2743200"/>
-            <a:ext cx="8229600" cy="548640"/>
+            <a:off x="457200" y="2743199"/>
+            <a:ext cx="9437914" cy="2338251"/>
           </a:xfrm>
           <a:prstGeom prst="rect">
             <a:avLst/>
@@ -12582,7 +14195,7 @@
               <a:buNone/>
             </a:pPr>
             <a:r>
-              <a:rPr lang="en-US" sz="1800" dirty="0">
+              <a:rPr lang="en-US" sz="3200" dirty="0">
                 <a:solidFill>
                   <a:srgbClr val="A0BDD8"/>
                 </a:solidFill>
@@ -12592,10 +14205,41 @@
               </a:rPr>
               <a:t>Two routes. Five days a week. Free to all students.</a:t>
             </a:r>
-            <a:endParaRPr lang="en-US" sz="1800" dirty="0"/>
-          </a:p>
-        </p:txBody>
-      </p:sp>
+            <a:endParaRPr lang="en-US" sz="3200" dirty="0"/>
+          </a:p>
+        </p:txBody>
+      </p:sp>
+      <p:pic>
+        <p:nvPicPr>
+          <p:cNvPr id="6" name="Picture 5">
+            <a:extLst>
+              <a:ext uri="{FF2B5EF4-FFF2-40B4-BE49-F238E27FC236}">
+                <a16:creationId xmlns:a16="http://schemas.microsoft.com/office/drawing/2014/main" id="{74EE5D8D-C889-1CFC-879D-A24A33C6A4B3}"/>
+              </a:ext>
+            </a:extLst>
+          </p:cNvPr>
+          <p:cNvPicPr>
+            <a:picLocks noChangeAspect="1"/>
+          </p:cNvPicPr>
+          <p:nvPr/>
+        </p:nvPicPr>
+        <p:blipFill>
+          <a:blip r:embed="rId3"/>
+          <a:srcRect b="9684"/>
+          <a:stretch>
+            <a:fillRect/>
+          </a:stretch>
+        </p:blipFill>
+        <p:spPr>
+          <a:xfrm>
+            <a:off x="5636622" y="0"/>
+            <a:ext cx="3507377" cy="3167743"/>
+          </a:xfrm>
+          <a:prstGeom prst="rect">
+            <a:avLst/>
+          </a:prstGeom>
+        </p:spPr>
+      </p:pic>
     </p:spTree>
   </p:cSld>
   <p:clrMapOvr>
@@ -12605,6 +14249,484 @@
 </file>
 
 <file path=ppt/slides/slide4.xml><?xml version="1.0" encoding="utf-8"?>
+<p:sld xmlns:a="http://schemas.openxmlformats.org/drawingml/2006/main" xmlns:r="http://schemas.openxmlformats.org/officeDocument/2006/relationships" xmlns:p="http://schemas.openxmlformats.org/presentationml/2006/main">
+  <p:cSld>
+    <p:bg>
+      <p:bgPr>
+        <a:solidFill>
+          <a:schemeClr val="bg1"/>
+        </a:solidFill>
+        <a:effectLst/>
+      </p:bgPr>
+    </p:bg>
+    <p:spTree>
+      <p:nvGrpSpPr>
+        <p:cNvPr id="1" name="">
+          <a:extLst>
+            <a:ext uri="{FF2B5EF4-FFF2-40B4-BE49-F238E27FC236}">
+              <a16:creationId xmlns:a16="http://schemas.microsoft.com/office/drawing/2014/main" id="{23524700-6778-F883-DB1D-D4F92C65BBAA}"/>
+            </a:ext>
+          </a:extLst>
+        </p:cNvPr>
+        <p:cNvGrpSpPr/>
+        <p:nvPr/>
+      </p:nvGrpSpPr>
+      <p:grpSpPr>
+        <a:xfrm>
+          <a:off x="0" y="0"/>
+          <a:ext cx="0" cy="0"/>
+          <a:chOff x="0" y="0"/>
+          <a:chExt cx="0" cy="0"/>
+        </a:xfrm>
+      </p:grpSpPr>
+      <p:sp useBgFill="1">
+        <p:nvSpPr>
+          <p:cNvPr id="10" name="Rectangle 9">
+            <a:extLst>
+              <a:ext uri="{FF2B5EF4-FFF2-40B4-BE49-F238E27FC236}">
+                <a16:creationId xmlns:a16="http://schemas.microsoft.com/office/drawing/2014/main" id="{E91DC736-0EF8-4F87-9146-EBF1D2EE4D3D}"/>
+              </a:ext>
+              <a:ext uri="{C183D7F6-B498-43B3-948B-1728B52AA6E4}">
+                <adec:decorative xmlns:adec="http://schemas.microsoft.com/office/drawing/2017/decorative" val="1"/>
+              </a:ext>
+            </a:extLst>
+          </p:cNvPr>
+          <p:cNvSpPr>
+            <a:spLocks noGrp="1" noRot="1" noChangeAspect="1" noMove="1" noResize="1" noEditPoints="1" noAdjustHandles="1" noChangeArrowheads="1" noChangeShapeType="1" noTextEdit="1"/>
+          </p:cNvSpPr>
+          <p:nvPr>
+            <p:extLst>
+              <p:ext uri="{386F3935-93C4-4BCD-93E2-E3B085C9AB24}">
+                <p16:designElem xmlns:p16="http://schemas.microsoft.com/office/powerpoint/2015/main" val="1"/>
+              </p:ext>
+            </p:extLst>
+          </p:nvPr>
+        </p:nvSpPr>
+        <p:spPr>
+          <a:xfrm>
+            <a:off x="0" y="0"/>
+            <a:ext cx="9144000" cy="5143500"/>
+          </a:xfrm>
+          <a:prstGeom prst="rect">
+            <a:avLst/>
+          </a:prstGeom>
+          <a:ln>
+            <a:noFill/>
+          </a:ln>
+        </p:spPr>
+        <p:style>
+          <a:lnRef idx="2">
+            <a:schemeClr val="accent1">
+              <a:shade val="50000"/>
+            </a:schemeClr>
+          </a:lnRef>
+          <a:fillRef idx="1">
+            <a:schemeClr val="accent1"/>
+          </a:fillRef>
+          <a:effectRef idx="0">
+            <a:schemeClr val="accent1"/>
+          </a:effectRef>
+          <a:fontRef idx="minor">
+            <a:schemeClr val="lt1"/>
+          </a:fontRef>
+        </p:style>
+        <p:txBody>
+          <a:bodyPr rtlCol="0" anchor="ctr"/>
+          <a:lstStyle/>
+          <a:p>
+            <a:pPr algn="ctr"/>
+            <a:endParaRPr lang="en-US"/>
+          </a:p>
+        </p:txBody>
+      </p:sp>
+      <p:pic>
+        <p:nvPicPr>
+          <p:cNvPr id="5" name="Picture 4">
+            <a:extLst>
+              <a:ext uri="{FF2B5EF4-FFF2-40B4-BE49-F238E27FC236}">
+                <a16:creationId xmlns:a16="http://schemas.microsoft.com/office/drawing/2014/main" id="{BD49AC9A-8E04-CB20-FD53-CFBA0B21D731}"/>
+              </a:ext>
+            </a:extLst>
+          </p:cNvPr>
+          <p:cNvPicPr>
+            <a:picLocks noChangeAspect="1"/>
+          </p:cNvPicPr>
+          <p:nvPr/>
+        </p:nvPicPr>
+        <p:blipFill>
+          <a:blip r:embed="rId3"/>
+          <a:srcRect r="9092" b="9534"/>
+          <a:stretch>
+            <a:fillRect/>
+          </a:stretch>
+        </p:blipFill>
+        <p:spPr>
+          <a:xfrm>
+            <a:off x="2642616" y="10"/>
+            <a:ext cx="6501384" cy="5143490"/>
+          </a:xfrm>
+          <a:prstGeom prst="rect">
+            <a:avLst/>
+          </a:prstGeom>
+        </p:spPr>
+      </p:pic>
+      <p:sp>
+        <p:nvSpPr>
+          <p:cNvPr id="12" name="Rectangle 11">
+            <a:extLst>
+              <a:ext uri="{FF2B5EF4-FFF2-40B4-BE49-F238E27FC236}">
+                <a16:creationId xmlns:a16="http://schemas.microsoft.com/office/drawing/2014/main" id="{097CD68E-23E3-4007-8847-CD0944C4F7BE}"/>
+              </a:ext>
+              <a:ext uri="{C183D7F6-B498-43B3-948B-1728B52AA6E4}">
+                <adec:decorative xmlns:adec="http://schemas.microsoft.com/office/drawing/2017/decorative" val="1"/>
+              </a:ext>
+            </a:extLst>
+          </p:cNvPr>
+          <p:cNvSpPr>
+            <a:spLocks noGrp="1" noRot="1" noChangeAspect="1" noMove="1" noResize="1" noEditPoints="1" noAdjustHandles="1" noChangeArrowheads="1" noChangeShapeType="1" noTextEdit="1"/>
+          </p:cNvSpPr>
+          <p:nvPr>
+            <p:extLst>
+              <p:ext uri="{386F3935-93C4-4BCD-93E2-E3B085C9AB24}">
+                <p16:designElem xmlns:p16="http://schemas.microsoft.com/office/powerpoint/2015/main" val="1"/>
+              </p:ext>
+            </p:extLst>
+          </p:nvPr>
+        </p:nvSpPr>
+        <p:spPr>
+          <a:xfrm>
+            <a:off x="0" y="0"/>
+            <a:ext cx="7317450" cy="5143500"/>
+          </a:xfrm>
+          <a:prstGeom prst="rect">
+            <a:avLst/>
+          </a:prstGeom>
+          <a:gradFill>
+            <a:gsLst>
+              <a:gs pos="58000">
+                <a:schemeClr val="bg1"/>
+              </a:gs>
+              <a:gs pos="35000">
+                <a:schemeClr val="bg1">
+                  <a:alpha val="79000"/>
+                </a:schemeClr>
+              </a:gs>
+              <a:gs pos="19000">
+                <a:schemeClr val="bg1">
+                  <a:alpha val="38000"/>
+                </a:schemeClr>
+              </a:gs>
+              <a:gs pos="0">
+                <a:schemeClr val="bg1">
+                  <a:alpha val="0"/>
+                </a:schemeClr>
+              </a:gs>
+              <a:gs pos="100000">
+                <a:schemeClr val="bg1"/>
+              </a:gs>
+            </a:gsLst>
+            <a:lin ang="10800000" scaled="0"/>
+          </a:gradFill>
+          <a:ln>
+            <a:noFill/>
+          </a:ln>
+        </p:spPr>
+        <p:style>
+          <a:lnRef idx="2">
+            <a:schemeClr val="accent1">
+              <a:shade val="50000"/>
+            </a:schemeClr>
+          </a:lnRef>
+          <a:fillRef idx="1">
+            <a:schemeClr val="accent1"/>
+          </a:fillRef>
+          <a:effectRef idx="0">
+            <a:schemeClr val="accent1"/>
+          </a:effectRef>
+          <a:fontRef idx="minor">
+            <a:schemeClr val="lt1"/>
+          </a:fontRef>
+        </p:style>
+        <p:txBody>
+          <a:bodyPr rtlCol="0" anchor="ctr"/>
+          <a:lstStyle/>
+          <a:p>
+            <a:pPr algn="ctr"/>
+            <a:endParaRPr lang="en-US" dirty="0"/>
+          </a:p>
+        </p:txBody>
+      </p:sp>
+      <p:sp>
+        <p:nvSpPr>
+          <p:cNvPr id="2" name="Text 0">
+            <a:extLst>
+              <a:ext uri="{FF2B5EF4-FFF2-40B4-BE49-F238E27FC236}">
+                <a16:creationId xmlns:a16="http://schemas.microsoft.com/office/drawing/2014/main" id="{A4CEE301-429F-58EF-DF36-05EBD7A7D9CD}"/>
+              </a:ext>
+            </a:extLst>
+          </p:cNvPr>
+          <p:cNvSpPr/>
+          <p:nvPr/>
+        </p:nvSpPr>
+        <p:spPr>
+          <a:xfrm>
+            <a:off x="358485" y="841772"/>
+            <a:ext cx="3017520" cy="2403100"/>
+          </a:xfrm>
+          <a:prstGeom prst="rect">
+            <a:avLst/>
+          </a:prstGeom>
+        </p:spPr>
+        <p:txBody>
+          <a:bodyPr vert="horz" lIns="91440" tIns="45720" rIns="91440" bIns="45720" rtlCol="0" anchor="b">
+            <a:normAutofit/>
+          </a:bodyPr>
+          <a:lstStyle/>
+          <a:p>
+            <a:pPr marL="0" indent="0">
+              <a:lnSpc>
+                <a:spcPct val="90000"/>
+              </a:lnSpc>
+              <a:spcBef>
+                <a:spcPct val="0"/>
+              </a:spcBef>
+              <a:spcAft>
+                <a:spcPts val="600"/>
+              </a:spcAft>
+            </a:pPr>
+            <a:r>
+              <a:rPr lang="en-US" sz="3600" b="1">
+                <a:latin typeface="+mj-lt"/>
+                <a:ea typeface="+mj-ea"/>
+                <a:cs typeface="+mj-cs"/>
+              </a:rPr>
+              <a:t>Complete Campus Coverage</a:t>
+            </a:r>
+            <a:endParaRPr lang="en-US" sz="3600">
+              <a:latin typeface="+mj-lt"/>
+              <a:ea typeface="+mj-ea"/>
+              <a:cs typeface="+mj-cs"/>
+            </a:endParaRPr>
+          </a:p>
+        </p:txBody>
+      </p:sp>
+      <p:sp>
+        <p:nvSpPr>
+          <p:cNvPr id="3" name="Text 1">
+            <a:extLst>
+              <a:ext uri="{FF2B5EF4-FFF2-40B4-BE49-F238E27FC236}">
+                <a16:creationId xmlns:a16="http://schemas.microsoft.com/office/drawing/2014/main" id="{94B5F3AD-B89D-E8E5-1B15-325DFD294C22}"/>
+              </a:ext>
+            </a:extLst>
+          </p:cNvPr>
+          <p:cNvSpPr/>
+          <p:nvPr/>
+        </p:nvSpPr>
+        <p:spPr>
+          <a:xfrm>
+            <a:off x="358485" y="3654691"/>
+            <a:ext cx="3017519" cy="906106"/>
+          </a:xfrm>
+          <a:prstGeom prst="rect">
+            <a:avLst/>
+          </a:prstGeom>
+        </p:spPr>
+        <p:txBody>
+          <a:bodyPr vert="horz" lIns="91440" tIns="45720" rIns="91440" bIns="45720" rtlCol="0">
+            <a:normAutofit/>
+          </a:bodyPr>
+          <a:lstStyle/>
+          <a:p>
+            <a:pPr>
+              <a:lnSpc>
+                <a:spcPct val="90000"/>
+              </a:lnSpc>
+              <a:spcBef>
+                <a:spcPts val="1000"/>
+              </a:spcBef>
+            </a:pPr>
+            <a:r>
+              <a:rPr lang="en-US" sz="1500"/>
+              <a:t>Free campus transit for all Shepherd University students, Monday–Friday</a:t>
+            </a:r>
+          </a:p>
+        </p:txBody>
+      </p:sp>
+      <p:sp>
+        <p:nvSpPr>
+          <p:cNvPr id="14" name="Rectangle 13">
+            <a:extLst>
+              <a:ext uri="{FF2B5EF4-FFF2-40B4-BE49-F238E27FC236}">
+                <a16:creationId xmlns:a16="http://schemas.microsoft.com/office/drawing/2014/main" id="{AF2F604E-43BE-4DC3-B983-E071523364F8}"/>
+              </a:ext>
+              <a:ext uri="{C183D7F6-B498-43B3-948B-1728B52AA6E4}">
+                <adec:decorative xmlns:adec="http://schemas.microsoft.com/office/drawing/2017/decorative" val="1"/>
+              </a:ext>
+            </a:extLst>
+          </p:cNvPr>
+          <p:cNvSpPr>
+            <a:spLocks noGrp="1" noRot="1" noChangeAspect="1" noMove="1" noResize="1" noEditPoints="1" noAdjustHandles="1" noChangeArrowheads="1" noChangeShapeType="1" noTextEdit="1"/>
+          </p:cNvSpPr>
+          <p:nvPr>
+            <p:extLst>
+              <p:ext uri="{386F3935-93C4-4BCD-93E2-E3B085C9AB24}">
+                <p16:designElem xmlns:p16="http://schemas.microsoft.com/office/powerpoint/2015/main" val="1"/>
+              </p:ext>
+            </p:extLst>
+          </p:nvPr>
+        </p:nvSpPr>
+        <p:spPr>
+          <a:xfrm rot="5400000">
+            <a:off x="569941" y="260093"/>
+            <a:ext cx="109728" cy="528066"/>
+          </a:xfrm>
+          <a:prstGeom prst="rect">
+            <a:avLst/>
+          </a:prstGeom>
+          <a:solidFill>
+            <a:schemeClr val="accent2"/>
+          </a:solidFill>
+          <a:ln>
+            <a:noFill/>
+          </a:ln>
+        </p:spPr>
+        <p:style>
+          <a:lnRef idx="2">
+            <a:schemeClr val="accent1">
+              <a:shade val="50000"/>
+            </a:schemeClr>
+          </a:lnRef>
+          <a:fillRef idx="1">
+            <a:schemeClr val="accent1"/>
+          </a:fillRef>
+          <a:effectRef idx="0">
+            <a:schemeClr val="accent1"/>
+          </a:effectRef>
+          <a:fontRef idx="minor">
+            <a:schemeClr val="lt1"/>
+          </a:fontRef>
+        </p:style>
+        <p:txBody>
+          <a:bodyPr rtlCol="0" anchor="ctr"/>
+          <a:lstStyle/>
+          <a:p>
+            <a:pPr algn="ctr"/>
+            <a:endParaRPr lang="en-US">
+              <a:solidFill>
+                <a:prstClr val="white"/>
+              </a:solidFill>
+              <a:latin typeface="Calibri" panose="020F0502020204030204"/>
+            </a:endParaRPr>
+          </a:p>
+        </p:txBody>
+      </p:sp>
+      <p:sp>
+        <p:nvSpPr>
+          <p:cNvPr id="16" name="Rectangle 15">
+            <a:extLst>
+              <a:ext uri="{FF2B5EF4-FFF2-40B4-BE49-F238E27FC236}">
+                <a16:creationId xmlns:a16="http://schemas.microsoft.com/office/drawing/2014/main" id="{08C9B587-E65E-4B52-B37C-ABEBB6E87928}"/>
+              </a:ext>
+              <a:ext uri="{C183D7F6-B498-43B3-948B-1728B52AA6E4}">
+                <adec:decorative xmlns:adec="http://schemas.microsoft.com/office/drawing/2017/decorative" val="1"/>
+              </a:ext>
+            </a:extLst>
+          </p:cNvPr>
+          <p:cNvSpPr>
+            <a:spLocks noGrp="1" noRot="1" noChangeAspect="1" noMove="1" noResize="1" noEditPoints="1" noAdjustHandles="1" noChangeArrowheads="1" noChangeShapeType="1" noTextEdit="1"/>
+          </p:cNvSpPr>
+          <p:nvPr>
+            <p:extLst>
+              <p:ext uri="{386F3935-93C4-4BCD-93E2-E3B085C9AB24}">
+                <p16:designElem xmlns:p16="http://schemas.microsoft.com/office/powerpoint/2015/main" val="1"/>
+              </p:ext>
+            </p:extLst>
+          </p:nvPr>
+        </p:nvSpPr>
+        <p:spPr>
+          <a:xfrm>
+            <a:off x="360771" y="3410190"/>
+            <a:ext cx="2983230" cy="13716"/>
+          </a:xfrm>
+          <a:prstGeom prst="rect">
+            <a:avLst/>
+          </a:prstGeom>
+          <a:solidFill>
+            <a:srgbClr val="D5D5D5"/>
+          </a:solidFill>
+          <a:ln w="3175">
+            <a:noFill/>
+          </a:ln>
+          <a:effectLst/>
+        </p:spPr>
+        <p:style>
+          <a:lnRef idx="2">
+            <a:schemeClr val="accent1">
+              <a:shade val="50000"/>
+            </a:schemeClr>
+          </a:lnRef>
+          <a:fillRef idx="1">
+            <a:schemeClr val="accent1"/>
+          </a:fillRef>
+          <a:effectRef idx="0">
+            <a:schemeClr val="accent1"/>
+          </a:effectRef>
+          <a:fontRef idx="minor">
+            <a:schemeClr val="lt1"/>
+          </a:fontRef>
+        </p:style>
+        <p:txBody>
+          <a:bodyPr rtlCol="0" anchor="ctr"/>
+          <a:lstStyle/>
+          <a:p>
+            <a:pPr marL="0" marR="0" lvl="0" indent="0" algn="ctr" defTabSz="914400" rtl="0" eaLnBrk="1" fontAlgn="auto" latinLnBrk="0" hangingPunct="1">
+              <a:lnSpc>
+                <a:spcPct val="100000"/>
+              </a:lnSpc>
+              <a:spcBef>
+                <a:spcPts val="0"/>
+              </a:spcBef>
+              <a:spcAft>
+                <a:spcPts val="0"/>
+              </a:spcAft>
+              <a:buClrTx/>
+              <a:buSzTx/>
+              <a:buFontTx/>
+              <a:buNone/>
+              <a:tabLst/>
+              <a:defRPr/>
+            </a:pPr>
+            <a:endParaRPr kumimoji="0" lang="en-US" sz="1800" b="0" i="0" u="none" strike="noStrike" kern="1200" cap="none" spc="0" normalizeH="0" baseline="0" noProof="0">
+              <a:ln>
+                <a:noFill/>
+              </a:ln>
+              <a:solidFill>
+                <a:prstClr val="white"/>
+              </a:solidFill>
+              <a:effectLst/>
+              <a:uLnTx/>
+              <a:uFillTx/>
+              <a:latin typeface="Calibri" panose="020F0502020204030204"/>
+              <a:ea typeface="+mn-ea"/>
+              <a:cs typeface="+mn-cs"/>
+            </a:endParaRPr>
+          </a:p>
+        </p:txBody>
+      </p:sp>
+    </p:spTree>
+    <p:extLst>
+      <p:ext uri="{BB962C8B-B14F-4D97-AF65-F5344CB8AC3E}">
+        <p14:creationId xmlns:p14="http://schemas.microsoft.com/office/powerpoint/2010/main" val="1692633754"/>
+      </p:ext>
+    </p:extLst>
+  </p:cSld>
+  <p:clrMapOvr>
+    <a:masterClrMapping/>
+  </p:clrMapOvr>
+</p:sld>
+</file>
+
+<file path=ppt/slides/slide5.xml><?xml version="1.0" encoding="utf-8"?>
 <p:sld xmlns:a="http://schemas.openxmlformats.org/drawingml/2006/main" xmlns:r="http://schemas.openxmlformats.org/officeDocument/2006/relationships" xmlns:p="http://schemas.openxmlformats.org/presentationml/2006/main">
   <p:cSld name="Slide 4">
     <p:bg>
@@ -13181,7 +15303,7 @@
                   <a:srgbClr val="FFFFFF"/>
                 </a:solidFill>
               </a:rPr>
-              <a:t>Martinsburg connector</a:t>
+              <a:t>Commuter connector</a:t>
             </a:r>
             <a:endParaRPr lang="en-US" sz="1100" dirty="0"/>
           </a:p>
@@ -13231,8 +15353,8 @@
         </p:nvSpPr>
         <p:spPr>
           <a:xfrm>
-            <a:off x="6080760" y="2103120"/>
-            <a:ext cx="2651760" cy="274320"/>
+            <a:off x="6080760" y="2313432"/>
+            <a:ext cx="2651760" cy="521208"/>
           </a:xfrm>
           <a:prstGeom prst="rect">
             <a:avLst/>
@@ -13253,79 +15375,43 @@
                   <a:srgbClr val="334155"/>
                 </a:solidFill>
               </a:rPr>
-              <a:t>Departs 6:50 AM &amp; 2:50 PM</a:t>
+              <a:t>Departs Caperton Station Martinsburg M-F at </a:t>
             </a:r>
-            <a:endParaRPr lang="en-US" sz="1100" dirty="0"/>
-          </a:p>
-        </p:txBody>
-      </p:sp>
-      <p:sp>
-        <p:nvSpPr>
-          <p:cNvPr id="20" name="Text 18"/>
-          <p:cNvSpPr/>
-          <p:nvPr/>
-        </p:nvSpPr>
-        <p:spPr>
-          <a:xfrm>
-            <a:off x="5029200" y="2697480"/>
-            <a:ext cx="1005840" cy="274320"/>
-          </a:xfrm>
-          <a:prstGeom prst="rect">
-            <a:avLst/>
-          </a:prstGeom>
-          <a:noFill/>
-          <a:ln/>
-        </p:spPr>
-        <p:txBody>
-          <a:bodyPr wrap="square" lIns="0" tIns="0" rIns="0" bIns="0" rtlCol="0" anchor="ctr"/>
-          <a:lstStyle/>
+          </a:p>
           <a:p>
             <a:pPr marL="0" indent="0">
               <a:buNone/>
             </a:pPr>
             <a:r>
-              <a:rPr lang="en-US" sz="1100" b="1" dirty="0">
-                <a:solidFill>
-                  <a:srgbClr val="1D9E75"/>
+              <a:rPr lang="en-US" sz="1100" dirty="0">
+                <a:solidFill>
+                  <a:srgbClr val="334155"/>
                 </a:solidFill>
               </a:rPr>
-              <a:t>📅 Days</a:t>
+              <a:t>6:50 AM &amp; 2:50 PM</a:t>
             </a:r>
-            <a:endParaRPr lang="en-US" sz="1100" dirty="0"/>
-          </a:p>
-        </p:txBody>
-      </p:sp>
-      <p:sp>
-        <p:nvSpPr>
-          <p:cNvPr id="21" name="Text 19"/>
-          <p:cNvSpPr/>
-          <p:nvPr/>
-        </p:nvSpPr>
-        <p:spPr>
-          <a:xfrm>
-            <a:off x="6080760" y="2697480"/>
-            <a:ext cx="2651760" cy="274320"/>
-          </a:xfrm>
-          <a:prstGeom prst="rect">
-            <a:avLst/>
-          </a:prstGeom>
-          <a:noFill/>
-          <a:ln/>
-        </p:spPr>
-        <p:txBody>
-          <a:bodyPr wrap="square" lIns="0" tIns="0" rIns="0" bIns="0" rtlCol="0" anchor="ctr"/>
-          <a:lstStyle/>
+          </a:p>
           <a:p>
             <a:pPr marL="0" indent="0">
               <a:buNone/>
             </a:pPr>
+            <a:endParaRPr lang="en-US" sz="1100" dirty="0">
+              <a:solidFill>
+                <a:srgbClr val="334155"/>
+              </a:solidFill>
+            </a:endParaRPr>
+          </a:p>
+          <a:p>
+            <a:pPr marL="0" indent="0">
+              <a:buNone/>
+            </a:pPr>
             <a:r>
               <a:rPr lang="en-US" sz="1100" dirty="0">
                 <a:solidFill>
                   <a:srgbClr val="334155"/>
                 </a:solidFill>
               </a:rPr>
-              <a:t>Mon – Thu (inbound); Mon – Fri (outbound)</a:t>
+              <a:t>Returns from H-Lot at 3:20 and 8:15pm M-Th and 5:15pm Fridays</a:t>
             </a:r>
             <a:endParaRPr lang="en-US" sz="1100" dirty="0"/>
           </a:p>
@@ -13388,70 +15474,7 @@
                   <a:srgbClr val="64748B"/>
                 </a:solidFill>
               </a:rPr>
-              <a:t>Links Caperton Train Station in Martinsburg directly to campus — a vital link for commuters without cars</a:t>
-            </a:r>
-            <a:endParaRPr lang="en-US" sz="1100" dirty="0"/>
-          </a:p>
-        </p:txBody>
-      </p:sp>
-      <p:sp>
-        <p:nvSpPr>
-          <p:cNvPr id="24" name="Shape 22"/>
-          <p:cNvSpPr/>
-          <p:nvPr/>
-        </p:nvSpPr>
-        <p:spPr>
-          <a:xfrm>
-            <a:off x="0" y="4663440"/>
-            <a:ext cx="9144000" cy="480060"/>
-          </a:xfrm>
-          <a:prstGeom prst="rect">
-            <a:avLst/>
-          </a:prstGeom>
-          <a:solidFill>
-            <a:srgbClr val="E8F0F9"/>
-          </a:solidFill>
-          <a:ln/>
-        </p:spPr>
-        <p:txBody>
-          <a:bodyPr/>
-          <a:lstStyle/>
-          <a:p>
-            <a:endParaRPr lang="en-US"/>
-          </a:p>
-        </p:txBody>
-      </p:sp>
-      <p:sp>
-        <p:nvSpPr>
-          <p:cNvPr id="25" name="Text 23"/>
-          <p:cNvSpPr/>
-          <p:nvPr/>
-        </p:nvSpPr>
-        <p:spPr>
-          <a:xfrm>
-            <a:off x="274320" y="4709160"/>
-            <a:ext cx="8595360" cy="347472"/>
-          </a:xfrm>
-          <a:prstGeom prst="rect">
-            <a:avLst/>
-          </a:prstGeom>
-          <a:noFill/>
-          <a:ln/>
-        </p:spPr>
-        <p:txBody>
-          <a:bodyPr wrap="square" rtlCol="0" anchor="ctr"/>
-          <a:lstStyle/>
-          <a:p>
-            <a:pPr marL="0" indent="0">
-              <a:buNone/>
-            </a:pPr>
-            <a:r>
-              <a:rPr lang="en-US" sz="1100" i="1" dirty="0">
-                <a:solidFill>
-                  <a:srgbClr val="1A5C9C"/>
-                </a:solidFill>
-              </a:rPr>
-              <a:t>📷  INSERT PHOTO: Bus in service / route map</a:t>
+              <a:t>Links Caperton Train Station in Martinsburg directly to campus — a vital link for commuters without cars and then cycles constantly between H-Lot and Knutti Corner</a:t>
             </a:r>
             <a:endParaRPr lang="en-US" sz="1100" dirty="0"/>
           </a:p>
@@ -13465,7 +15488,1143 @@
 </p:sld>
 </file>
 
-<file path=ppt/slides/slide5.xml><?xml version="1.0" encoding="utf-8"?>
+<file path=ppt/slides/slide6.xml><?xml version="1.0" encoding="utf-8"?>
+<p:sld xmlns:a="http://schemas.openxmlformats.org/drawingml/2006/main" xmlns:r="http://schemas.openxmlformats.org/officeDocument/2006/relationships" xmlns:p="http://schemas.openxmlformats.org/presentationml/2006/main">
+  <p:cSld>
+    <p:bg>
+      <p:bgPr>
+        <a:solidFill>
+          <a:schemeClr val="bg1"/>
+        </a:solidFill>
+        <a:effectLst/>
+      </p:bgPr>
+    </p:bg>
+    <p:spTree>
+      <p:nvGrpSpPr>
+        <p:cNvPr id="1" name="">
+          <a:extLst>
+            <a:ext uri="{FF2B5EF4-FFF2-40B4-BE49-F238E27FC236}">
+              <a16:creationId xmlns:a16="http://schemas.microsoft.com/office/drawing/2014/main" id="{D9FAAC17-5904-402D-F1B6-2E5C98A0FDBD}"/>
+            </a:ext>
+          </a:extLst>
+        </p:cNvPr>
+        <p:cNvGrpSpPr/>
+        <p:nvPr/>
+      </p:nvGrpSpPr>
+      <p:grpSpPr>
+        <a:xfrm>
+          <a:off x="0" y="0"/>
+          <a:ext cx="0" cy="0"/>
+          <a:chOff x="0" y="0"/>
+          <a:chExt cx="0" cy="0"/>
+        </a:xfrm>
+      </p:grpSpPr>
+      <p:sp useBgFill="1">
+        <p:nvSpPr>
+          <p:cNvPr id="39" name="Rectangle 38">
+            <a:extLst>
+              <a:ext uri="{FF2B5EF4-FFF2-40B4-BE49-F238E27FC236}">
+                <a16:creationId xmlns:a16="http://schemas.microsoft.com/office/drawing/2014/main" id="{2151139A-886F-4B97-8815-729AD3831BBD}"/>
+              </a:ext>
+              <a:ext uri="{C183D7F6-B498-43B3-948B-1728B52AA6E4}">
+                <adec:decorative xmlns:adec="http://schemas.microsoft.com/office/drawing/2017/decorative" val="1"/>
+              </a:ext>
+            </a:extLst>
+          </p:cNvPr>
+          <p:cNvSpPr>
+            <a:spLocks noGrp="1" noRot="1" noChangeAspect="1" noMove="1" noResize="1" noEditPoints="1" noAdjustHandles="1" noChangeArrowheads="1" noChangeShapeType="1" noTextEdit="1"/>
+          </p:cNvSpPr>
+          <p:nvPr>
+            <p:extLst>
+              <p:ext uri="{386F3935-93C4-4BCD-93E2-E3B085C9AB24}">
+                <p16:designElem xmlns:p16="http://schemas.microsoft.com/office/powerpoint/2015/main" val="1"/>
+              </p:ext>
+            </p:extLst>
+          </p:nvPr>
+        </p:nvSpPr>
+        <p:spPr>
+          <a:xfrm>
+            <a:off x="0" y="0"/>
+            <a:ext cx="9144000" cy="5143500"/>
+          </a:xfrm>
+          <a:prstGeom prst="rect">
+            <a:avLst/>
+          </a:prstGeom>
+          <a:ln w="12700" cap="flat" cmpd="sng" algn="ctr">
+            <a:noFill/>
+            <a:prstDash val="solid"/>
+            <a:miter lim="800000"/>
+          </a:ln>
+          <a:effectLst/>
+          <a:extLst>
+            <a:ext uri="{91240B29-F687-4F45-9708-019B960494DF}">
+              <a14:hiddenLine xmlns:a14="http://schemas.microsoft.com/office/drawing/2010/main" w="12700" cap="flat" cmpd="sng" algn="ctr">
+                <a:solidFill>
+                  <a:schemeClr val="accent1">
+                    <a:shade val="50000"/>
+                  </a:schemeClr>
+                </a:solidFill>
+                <a:prstDash val="solid"/>
+                <a:miter lim="800000"/>
+              </a14:hiddenLine>
+            </a:ext>
+          </a:extLst>
+        </p:spPr>
+        <p:style>
+          <a:lnRef idx="2">
+            <a:schemeClr val="accent1">
+              <a:shade val="50000"/>
+            </a:schemeClr>
+          </a:lnRef>
+          <a:fillRef idx="1">
+            <a:schemeClr val="accent1"/>
+          </a:fillRef>
+          <a:effectRef idx="0">
+            <a:schemeClr val="accent1"/>
+          </a:effectRef>
+          <a:fontRef idx="minor">
+            <a:schemeClr val="lt1"/>
+          </a:fontRef>
+        </p:style>
+        <p:txBody>
+          <a:bodyPr rtlCol="0" anchor="ctr"/>
+          <a:lstStyle/>
+          <a:p>
+            <a:pPr algn="ctr"/>
+            <a:endParaRPr lang="en-US" sz="2000"/>
+          </a:p>
+        </p:txBody>
+      </p:sp>
+      <p:sp>
+        <p:nvSpPr>
+          <p:cNvPr id="41" name="Rectangle 40">
+            <a:extLst>
+              <a:ext uri="{FF2B5EF4-FFF2-40B4-BE49-F238E27FC236}">
+                <a16:creationId xmlns:a16="http://schemas.microsoft.com/office/drawing/2014/main" id="{5428AC11-BFDF-42EF-80FF-717BBF909067}"/>
+              </a:ext>
+              <a:ext uri="{C183D7F6-B498-43B3-948B-1728B52AA6E4}">
+                <adec:decorative xmlns:adec="http://schemas.microsoft.com/office/drawing/2017/decorative" val="1"/>
+              </a:ext>
+            </a:extLst>
+          </p:cNvPr>
+          <p:cNvSpPr>
+            <a:spLocks noGrp="1" noRot="1" noChangeAspect="1" noMove="1" noResize="1" noEditPoints="1" noAdjustHandles="1" noChangeArrowheads="1" noChangeShapeType="1" noTextEdit="1"/>
+          </p:cNvSpPr>
+          <p:nvPr>
+            <p:extLst>
+              <p:ext uri="{386F3935-93C4-4BCD-93E2-E3B085C9AB24}">
+                <p16:designElem xmlns:p16="http://schemas.microsoft.com/office/powerpoint/2015/main" val="1"/>
+              </p:ext>
+            </p:extLst>
+          </p:nvPr>
+        </p:nvSpPr>
+        <p:spPr>
+          <a:xfrm rot="5400000" flipH="1">
+            <a:off x="-1056471" y="1056472"/>
+            <a:ext cx="5143500" cy="3030558"/>
+          </a:xfrm>
+          <a:prstGeom prst="rect">
+            <a:avLst/>
+          </a:prstGeom>
+          <a:gradFill>
+            <a:gsLst>
+              <a:gs pos="11000">
+                <a:srgbClr val="000000"/>
+              </a:gs>
+              <a:gs pos="100000">
+                <a:schemeClr val="accent1">
+                  <a:lumMod val="75000"/>
+                </a:schemeClr>
+              </a:gs>
+            </a:gsLst>
+            <a:lin ang="18600000" scaled="0"/>
+          </a:gradFill>
+          <a:ln>
+            <a:noFill/>
+          </a:ln>
+        </p:spPr>
+        <p:style>
+          <a:lnRef idx="2">
+            <a:schemeClr val="accent1">
+              <a:shade val="50000"/>
+            </a:schemeClr>
+          </a:lnRef>
+          <a:fillRef idx="1">
+            <a:schemeClr val="accent1"/>
+          </a:fillRef>
+          <a:effectRef idx="0">
+            <a:schemeClr val="accent1"/>
+          </a:effectRef>
+          <a:fontRef idx="minor">
+            <a:schemeClr val="lt1"/>
+          </a:fontRef>
+        </p:style>
+        <p:txBody>
+          <a:bodyPr rtlCol="0" anchor="ctr"/>
+          <a:lstStyle/>
+          <a:p>
+            <a:pPr algn="ctr"/>
+            <a:endParaRPr lang="en-US" dirty="0"/>
+          </a:p>
+        </p:txBody>
+      </p:sp>
+      <p:sp>
+        <p:nvSpPr>
+          <p:cNvPr id="43" name="Rectangle 42">
+            <a:extLst>
+              <a:ext uri="{FF2B5EF4-FFF2-40B4-BE49-F238E27FC236}">
+                <a16:creationId xmlns:a16="http://schemas.microsoft.com/office/drawing/2014/main" id="{2CC56AF6-38E4-490B-8E2B-1A1037B4EDD4}"/>
+              </a:ext>
+              <a:ext uri="{C183D7F6-B498-43B3-948B-1728B52AA6E4}">
+                <adec:decorative xmlns:adec="http://schemas.microsoft.com/office/drawing/2017/decorative" val="1"/>
+              </a:ext>
+            </a:extLst>
+          </p:cNvPr>
+          <p:cNvSpPr>
+            <a:spLocks noGrp="1" noRot="1" noChangeAspect="1" noMove="1" noResize="1" noEditPoints="1" noAdjustHandles="1" noChangeArrowheads="1" noChangeShapeType="1" noTextEdit="1"/>
+          </p:cNvSpPr>
+          <p:nvPr>
+            <p:extLst>
+              <p:ext uri="{386F3935-93C4-4BCD-93E2-E3B085C9AB24}">
+                <p16:designElem xmlns:p16="http://schemas.microsoft.com/office/powerpoint/2015/main" val="1"/>
+              </p:ext>
+            </p:extLst>
+          </p:nvPr>
+        </p:nvSpPr>
+        <p:spPr>
+          <a:xfrm rot="16200000">
+            <a:off x="-119674" y="1994874"/>
+            <a:ext cx="3266696" cy="3030557"/>
+          </a:xfrm>
+          <a:prstGeom prst="rect">
+            <a:avLst/>
+          </a:prstGeom>
+          <a:gradFill>
+            <a:gsLst>
+              <a:gs pos="0">
+                <a:schemeClr val="accent1">
+                  <a:alpha val="50000"/>
+                </a:schemeClr>
+              </a:gs>
+              <a:gs pos="100000">
+                <a:schemeClr val="accent1">
+                  <a:lumMod val="50000"/>
+                  <a:alpha val="0"/>
+                </a:schemeClr>
+              </a:gs>
+            </a:gsLst>
+            <a:lin ang="11400000" scaled="0"/>
+          </a:gradFill>
+          <a:ln>
+            <a:noFill/>
+          </a:ln>
+        </p:spPr>
+        <p:style>
+          <a:lnRef idx="2">
+            <a:schemeClr val="accent1">
+              <a:shade val="50000"/>
+            </a:schemeClr>
+          </a:lnRef>
+          <a:fillRef idx="1">
+            <a:schemeClr val="accent1"/>
+          </a:fillRef>
+          <a:effectRef idx="0">
+            <a:schemeClr val="accent1"/>
+          </a:effectRef>
+          <a:fontRef idx="minor">
+            <a:schemeClr val="lt1"/>
+          </a:fontRef>
+        </p:style>
+        <p:txBody>
+          <a:bodyPr rtlCol="0" anchor="ctr"/>
+          <a:lstStyle/>
+          <a:p>
+            <a:pPr algn="ctr"/>
+            <a:endParaRPr lang="en-US"/>
+          </a:p>
+        </p:txBody>
+      </p:sp>
+      <p:sp>
+        <p:nvSpPr>
+          <p:cNvPr id="45" name="Rectangle 44">
+            <a:extLst>
+              <a:ext uri="{FF2B5EF4-FFF2-40B4-BE49-F238E27FC236}">
+                <a16:creationId xmlns:a16="http://schemas.microsoft.com/office/drawing/2014/main" id="{2339A6F5-AD6A-4D80-8AD9-6290D13AC49F}"/>
+              </a:ext>
+              <a:ext uri="{C183D7F6-B498-43B3-948B-1728B52AA6E4}">
+                <adec:decorative xmlns:adec="http://schemas.microsoft.com/office/drawing/2017/decorative" val="1"/>
+              </a:ext>
+            </a:extLst>
+          </p:cNvPr>
+          <p:cNvSpPr>
+            <a:spLocks noGrp="1" noRot="1" noChangeAspect="1" noMove="1" noResize="1" noEditPoints="1" noAdjustHandles="1" noChangeArrowheads="1" noChangeShapeType="1" noTextEdit="1"/>
+          </p:cNvSpPr>
+          <p:nvPr>
+            <p:extLst>
+              <p:ext uri="{386F3935-93C4-4BCD-93E2-E3B085C9AB24}">
+                <p16:designElem xmlns:p16="http://schemas.microsoft.com/office/powerpoint/2015/main" val="1"/>
+              </p:ext>
+            </p:extLst>
+          </p:nvPr>
+        </p:nvSpPr>
+        <p:spPr>
+          <a:xfrm rot="16200000" flipH="1">
+            <a:off x="-885662" y="1228885"/>
+            <a:ext cx="5143179" cy="2686051"/>
+          </a:xfrm>
+          <a:prstGeom prst="rect">
+            <a:avLst/>
+          </a:prstGeom>
+          <a:gradFill>
+            <a:gsLst>
+              <a:gs pos="0">
+                <a:srgbClr val="000000">
+                  <a:alpha val="61000"/>
+                </a:srgbClr>
+              </a:gs>
+              <a:gs pos="95000">
+                <a:schemeClr val="accent5">
+                  <a:alpha val="0"/>
+                </a:schemeClr>
+              </a:gs>
+            </a:gsLst>
+            <a:lin ang="13800000" scaled="0"/>
+          </a:gradFill>
+          <a:ln>
+            <a:noFill/>
+          </a:ln>
+        </p:spPr>
+        <p:style>
+          <a:lnRef idx="2">
+            <a:schemeClr val="accent1">
+              <a:shade val="50000"/>
+            </a:schemeClr>
+          </a:lnRef>
+          <a:fillRef idx="1">
+            <a:schemeClr val="accent1"/>
+          </a:fillRef>
+          <a:effectRef idx="0">
+            <a:schemeClr val="accent1"/>
+          </a:effectRef>
+          <a:fontRef idx="minor">
+            <a:schemeClr val="lt1"/>
+          </a:fontRef>
+        </p:style>
+        <p:txBody>
+          <a:bodyPr rtlCol="0" anchor="ctr"/>
+          <a:lstStyle/>
+          <a:p>
+            <a:pPr algn="ctr"/>
+            <a:endParaRPr lang="en-US" dirty="0"/>
+          </a:p>
+        </p:txBody>
+      </p:sp>
+      <p:sp>
+        <p:nvSpPr>
+          <p:cNvPr id="2" name="Text 0">
+            <a:extLst>
+              <a:ext uri="{FF2B5EF4-FFF2-40B4-BE49-F238E27FC236}">
+                <a16:creationId xmlns:a16="http://schemas.microsoft.com/office/drawing/2014/main" id="{4CB06C3F-C6E4-E9C5-EEFA-2FADF339FCA0}"/>
+              </a:ext>
+            </a:extLst>
+          </p:cNvPr>
+          <p:cNvSpPr/>
+          <p:nvPr/>
+        </p:nvSpPr>
+        <p:spPr>
+          <a:xfrm>
+            <a:off x="495031" y="2208882"/>
+            <a:ext cx="2159016" cy="2068481"/>
+          </a:xfrm>
+          <a:prstGeom prst="rect">
+            <a:avLst/>
+          </a:prstGeom>
+        </p:spPr>
+        <p:txBody>
+          <a:bodyPr vert="horz" lIns="91440" tIns="45720" rIns="91440" bIns="45720" rtlCol="0" anchor="t">
+            <a:normAutofit/>
+          </a:bodyPr>
+          <a:lstStyle/>
+          <a:p>
+            <a:pPr marL="0" indent="0">
+              <a:lnSpc>
+                <a:spcPct val="90000"/>
+              </a:lnSpc>
+              <a:spcBef>
+                <a:spcPct val="0"/>
+              </a:spcBef>
+              <a:spcAft>
+                <a:spcPts val="600"/>
+              </a:spcAft>
+            </a:pPr>
+            <a:r>
+              <a:rPr lang="en-US" sz="3000" b="1">
+                <a:solidFill>
+                  <a:srgbClr val="FFFFFF"/>
+                </a:solidFill>
+                <a:latin typeface="+mj-lt"/>
+                <a:ea typeface="+mj-ea"/>
+                <a:cs typeface="+mj-cs"/>
+              </a:rPr>
+              <a:t>Two Routes, One Mission</a:t>
+            </a:r>
+            <a:endParaRPr lang="en-US" sz="3000">
+              <a:solidFill>
+                <a:srgbClr val="FFFFFF"/>
+              </a:solidFill>
+              <a:latin typeface="+mj-lt"/>
+              <a:ea typeface="+mj-ea"/>
+              <a:cs typeface="+mj-cs"/>
+            </a:endParaRPr>
+          </a:p>
+        </p:txBody>
+      </p:sp>
+      <p:sp>
+        <p:nvSpPr>
+          <p:cNvPr id="3" name="Text 1">
+            <a:extLst>
+              <a:ext uri="{FF2B5EF4-FFF2-40B4-BE49-F238E27FC236}">
+                <a16:creationId xmlns:a16="http://schemas.microsoft.com/office/drawing/2014/main" id="{7B009720-8E7A-56F8-AE00-26A2FA6C74DB}"/>
+              </a:ext>
+            </a:extLst>
+          </p:cNvPr>
+          <p:cNvSpPr/>
+          <p:nvPr/>
+        </p:nvSpPr>
+        <p:spPr>
+          <a:xfrm>
+            <a:off x="495031" y="796880"/>
+            <a:ext cx="2031147" cy="823318"/>
+          </a:xfrm>
+          <a:prstGeom prst="rect">
+            <a:avLst/>
+          </a:prstGeom>
+        </p:spPr>
+        <p:txBody>
+          <a:bodyPr vert="horz" lIns="91440" tIns="45720" rIns="91440" bIns="45720" rtlCol="0" anchor="b">
+            <a:normAutofit/>
+          </a:bodyPr>
+          <a:lstStyle/>
+          <a:p>
+            <a:pPr>
+              <a:lnSpc>
+                <a:spcPct val="90000"/>
+              </a:lnSpc>
+              <a:spcBef>
+                <a:spcPts val="1000"/>
+              </a:spcBef>
+            </a:pPr>
+            <a:r>
+              <a:rPr lang="en-US" sz="1400">
+                <a:solidFill>
+                  <a:srgbClr val="FFFFFF"/>
+                </a:solidFill>
+              </a:rPr>
+              <a:t>Free campus transit for all Shepherd University students, Monday–Friday</a:t>
+            </a:r>
+          </a:p>
+        </p:txBody>
+      </p:sp>
+      <p:pic>
+        <p:nvPicPr>
+          <p:cNvPr id="34" name="Picture 33">
+            <a:extLst>
+              <a:ext uri="{FF2B5EF4-FFF2-40B4-BE49-F238E27FC236}">
+                <a16:creationId xmlns:a16="http://schemas.microsoft.com/office/drawing/2014/main" id="{47793D7A-4F1A-E688-3A02-9B45EA4261FF}"/>
+              </a:ext>
+            </a:extLst>
+          </p:cNvPr>
+          <p:cNvPicPr>
+            <a:picLocks noChangeAspect="1"/>
+          </p:cNvPicPr>
+          <p:nvPr/>
+        </p:nvPicPr>
+        <p:blipFill>
+          <a:blip r:embed="rId3"/>
+          <a:stretch>
+            <a:fillRect/>
+          </a:stretch>
+        </p:blipFill>
+        <p:spPr>
+          <a:xfrm>
+            <a:off x="3181083" y="134086"/>
+            <a:ext cx="5790795" cy="4875328"/>
+          </a:xfrm>
+          <a:prstGeom prst="rect">
+            <a:avLst/>
+          </a:prstGeom>
+        </p:spPr>
+      </p:pic>
+    </p:spTree>
+    <p:extLst>
+      <p:ext uri="{BB962C8B-B14F-4D97-AF65-F5344CB8AC3E}">
+        <p14:creationId xmlns:p14="http://schemas.microsoft.com/office/powerpoint/2010/main" val="3541614323"/>
+      </p:ext>
+    </p:extLst>
+  </p:cSld>
+  <p:clrMapOvr>
+    <a:masterClrMapping/>
+  </p:clrMapOvr>
+</p:sld>
+</file>
+
+<file path=ppt/slides/slide7.xml><?xml version="1.0" encoding="utf-8"?>
+<p:sld xmlns:a="http://schemas.openxmlformats.org/drawingml/2006/main" xmlns:r="http://schemas.openxmlformats.org/officeDocument/2006/relationships" xmlns:p="http://schemas.openxmlformats.org/presentationml/2006/main">
+  <p:cSld>
+    <p:bg>
+      <p:bgPr>
+        <a:solidFill>
+          <a:schemeClr val="bg1"/>
+        </a:solidFill>
+        <a:effectLst/>
+      </p:bgPr>
+    </p:bg>
+    <p:spTree>
+      <p:nvGrpSpPr>
+        <p:cNvPr id="1" name="">
+          <a:extLst>
+            <a:ext uri="{FF2B5EF4-FFF2-40B4-BE49-F238E27FC236}">
+              <a16:creationId xmlns:a16="http://schemas.microsoft.com/office/drawing/2014/main" id="{E16EDEAD-7CC1-45C9-8E69-DE9CDFAAE349}"/>
+            </a:ext>
+          </a:extLst>
+        </p:cNvPr>
+        <p:cNvGrpSpPr/>
+        <p:nvPr/>
+      </p:nvGrpSpPr>
+      <p:grpSpPr>
+        <a:xfrm>
+          <a:off x="0" y="0"/>
+          <a:ext cx="0" cy="0"/>
+          <a:chOff x="0" y="0"/>
+          <a:chExt cx="0" cy="0"/>
+        </a:xfrm>
+      </p:grpSpPr>
+      <p:sp useBgFill="1">
+        <p:nvSpPr>
+          <p:cNvPr id="50" name="Rectangle 49">
+            <a:extLst>
+              <a:ext uri="{FF2B5EF4-FFF2-40B4-BE49-F238E27FC236}">
+                <a16:creationId xmlns:a16="http://schemas.microsoft.com/office/drawing/2014/main" id="{A8384FB5-9ADC-4DDC-881B-597D56F5B15D}"/>
+              </a:ext>
+              <a:ext uri="{C183D7F6-B498-43B3-948B-1728B52AA6E4}">
+                <adec:decorative xmlns:adec="http://schemas.microsoft.com/office/drawing/2017/decorative" val="1"/>
+              </a:ext>
+            </a:extLst>
+          </p:cNvPr>
+          <p:cNvSpPr>
+            <a:spLocks noGrp="1" noRot="1" noChangeAspect="1" noMove="1" noResize="1" noEditPoints="1" noAdjustHandles="1" noChangeArrowheads="1" noChangeShapeType="1" noTextEdit="1"/>
+          </p:cNvSpPr>
+          <p:nvPr>
+            <p:extLst>
+              <p:ext uri="{386F3935-93C4-4BCD-93E2-E3B085C9AB24}">
+                <p16:designElem xmlns:p16="http://schemas.microsoft.com/office/powerpoint/2015/main" val="1"/>
+              </p:ext>
+            </p:extLst>
+          </p:nvPr>
+        </p:nvSpPr>
+        <p:spPr>
+          <a:xfrm>
+            <a:off x="0" y="0"/>
+            <a:ext cx="9144000" cy="5143500"/>
+          </a:xfrm>
+          <a:prstGeom prst="rect">
+            <a:avLst/>
+          </a:prstGeom>
+          <a:ln w="12700" cap="flat" cmpd="sng" algn="ctr">
+            <a:noFill/>
+            <a:prstDash val="solid"/>
+            <a:miter lim="800000"/>
+          </a:ln>
+          <a:effectLst/>
+          <a:extLst>
+            <a:ext uri="{91240B29-F687-4F45-9708-019B960494DF}">
+              <a14:hiddenLine xmlns:a14="http://schemas.microsoft.com/office/drawing/2010/main" w="12700" cap="flat" cmpd="sng" algn="ctr">
+                <a:solidFill>
+                  <a:schemeClr val="accent1">
+                    <a:shade val="50000"/>
+                  </a:schemeClr>
+                </a:solidFill>
+                <a:prstDash val="solid"/>
+                <a:miter lim="800000"/>
+              </a14:hiddenLine>
+            </a:ext>
+          </a:extLst>
+        </p:spPr>
+        <p:style>
+          <a:lnRef idx="2">
+            <a:schemeClr val="accent1">
+              <a:shade val="50000"/>
+            </a:schemeClr>
+          </a:lnRef>
+          <a:fillRef idx="1">
+            <a:schemeClr val="accent1"/>
+          </a:fillRef>
+          <a:effectRef idx="0">
+            <a:schemeClr val="accent1"/>
+          </a:effectRef>
+          <a:fontRef idx="minor">
+            <a:schemeClr val="lt1"/>
+          </a:fontRef>
+        </p:style>
+        <p:txBody>
+          <a:bodyPr rtlCol="0" anchor="ctr"/>
+          <a:lstStyle/>
+          <a:p>
+            <a:pPr algn="ctr"/>
+            <a:endParaRPr lang="en-US"/>
+          </a:p>
+        </p:txBody>
+      </p:sp>
+      <p:sp>
+        <p:nvSpPr>
+          <p:cNvPr id="52" name="Rectangle 51">
+            <a:extLst>
+              <a:ext uri="{FF2B5EF4-FFF2-40B4-BE49-F238E27FC236}">
+                <a16:creationId xmlns:a16="http://schemas.microsoft.com/office/drawing/2014/main" id="{91E5A9A7-95C6-4F4F-B00E-C82E07FE62EF}"/>
+              </a:ext>
+              <a:ext uri="{C183D7F6-B498-43B3-948B-1728B52AA6E4}">
+                <adec:decorative xmlns:adec="http://schemas.microsoft.com/office/drawing/2017/decorative" val="1"/>
+              </a:ext>
+            </a:extLst>
+          </p:cNvPr>
+          <p:cNvSpPr>
+            <a:spLocks noGrp="1" noRot="1" noChangeAspect="1" noMove="1" noResize="1" noEditPoints="1" noAdjustHandles="1" noChangeArrowheads="1" noChangeShapeType="1" noTextEdit="1"/>
+          </p:cNvSpPr>
+          <p:nvPr>
+            <p:extLst>
+              <p:ext uri="{386F3935-93C4-4BCD-93E2-E3B085C9AB24}">
+                <p16:designElem xmlns:p16="http://schemas.microsoft.com/office/powerpoint/2015/main" val="1"/>
+              </p:ext>
+            </p:extLst>
+          </p:nvPr>
+        </p:nvSpPr>
+        <p:spPr>
+          <a:xfrm rot="5400000" flipH="1">
+            <a:off x="-1063154" y="1063154"/>
+            <a:ext cx="5156864" cy="3030558"/>
+          </a:xfrm>
+          <a:prstGeom prst="rect">
+            <a:avLst/>
+          </a:prstGeom>
+          <a:gradFill>
+            <a:gsLst>
+              <a:gs pos="0">
+                <a:srgbClr val="000000"/>
+              </a:gs>
+              <a:gs pos="100000">
+                <a:schemeClr val="accent1">
+                  <a:lumMod val="75000"/>
+                </a:schemeClr>
+              </a:gs>
+            </a:gsLst>
+            <a:lin ang="18600000" scaled="0"/>
+          </a:gradFill>
+          <a:ln>
+            <a:noFill/>
+          </a:ln>
+        </p:spPr>
+        <p:style>
+          <a:lnRef idx="2">
+            <a:schemeClr val="accent1">
+              <a:shade val="50000"/>
+            </a:schemeClr>
+          </a:lnRef>
+          <a:fillRef idx="1">
+            <a:schemeClr val="accent1"/>
+          </a:fillRef>
+          <a:effectRef idx="0">
+            <a:schemeClr val="accent1"/>
+          </a:effectRef>
+          <a:fontRef idx="minor">
+            <a:schemeClr val="lt1"/>
+          </a:fontRef>
+        </p:style>
+        <p:txBody>
+          <a:bodyPr rtlCol="0" anchor="ctr"/>
+          <a:lstStyle/>
+          <a:p>
+            <a:pPr algn="ctr"/>
+            <a:endParaRPr lang="en-US" dirty="0"/>
+          </a:p>
+        </p:txBody>
+      </p:sp>
+      <p:sp>
+        <p:nvSpPr>
+          <p:cNvPr id="54" name="Rectangle 53">
+            <a:extLst>
+              <a:ext uri="{FF2B5EF4-FFF2-40B4-BE49-F238E27FC236}">
+                <a16:creationId xmlns:a16="http://schemas.microsoft.com/office/drawing/2014/main" id="{D07DD2DE-F619-49DD-B5E7-03A290FF4ED1}"/>
+              </a:ext>
+              <a:ext uri="{C183D7F6-B498-43B3-948B-1728B52AA6E4}">
+                <adec:decorative xmlns:adec="http://schemas.microsoft.com/office/drawing/2017/decorative" val="1"/>
+              </a:ext>
+            </a:extLst>
+          </p:cNvPr>
+          <p:cNvSpPr>
+            <a:spLocks noGrp="1" noRot="1" noChangeAspect="1" noMove="1" noResize="1" noEditPoints="1" noAdjustHandles="1" noChangeArrowheads="1" noChangeShapeType="1" noTextEdit="1"/>
+          </p:cNvSpPr>
+          <p:nvPr>
+            <p:extLst>
+              <p:ext uri="{386F3935-93C4-4BCD-93E2-E3B085C9AB24}">
+                <p16:designElem xmlns:p16="http://schemas.microsoft.com/office/powerpoint/2015/main" val="1"/>
+              </p:ext>
+            </p:extLst>
+          </p:nvPr>
+        </p:nvSpPr>
+        <p:spPr>
+          <a:xfrm rot="16200000">
+            <a:off x="-118871" y="1995355"/>
+            <a:ext cx="3266696" cy="3028952"/>
+          </a:xfrm>
+          <a:prstGeom prst="rect">
+            <a:avLst/>
+          </a:prstGeom>
+          <a:gradFill>
+            <a:gsLst>
+              <a:gs pos="0">
+                <a:schemeClr val="accent1">
+                  <a:alpha val="50000"/>
+                </a:schemeClr>
+              </a:gs>
+              <a:gs pos="100000">
+                <a:schemeClr val="accent1">
+                  <a:lumMod val="50000"/>
+                  <a:alpha val="0"/>
+                </a:schemeClr>
+              </a:gs>
+            </a:gsLst>
+            <a:lin ang="11400000" scaled="0"/>
+          </a:gradFill>
+          <a:ln>
+            <a:noFill/>
+          </a:ln>
+        </p:spPr>
+        <p:style>
+          <a:lnRef idx="2">
+            <a:schemeClr val="accent1">
+              <a:shade val="50000"/>
+            </a:schemeClr>
+          </a:lnRef>
+          <a:fillRef idx="1">
+            <a:schemeClr val="accent1"/>
+          </a:fillRef>
+          <a:effectRef idx="0">
+            <a:schemeClr val="accent1"/>
+          </a:effectRef>
+          <a:fontRef idx="minor">
+            <a:schemeClr val="lt1"/>
+          </a:fontRef>
+        </p:style>
+        <p:txBody>
+          <a:bodyPr rtlCol="0" anchor="ctr"/>
+          <a:lstStyle/>
+          <a:p>
+            <a:pPr algn="ctr"/>
+            <a:endParaRPr lang="en-US"/>
+          </a:p>
+        </p:txBody>
+      </p:sp>
+      <p:sp>
+        <p:nvSpPr>
+          <p:cNvPr id="56" name="Rectangle 55">
+            <a:extLst>
+              <a:ext uri="{FF2B5EF4-FFF2-40B4-BE49-F238E27FC236}">
+                <a16:creationId xmlns:a16="http://schemas.microsoft.com/office/drawing/2014/main" id="{85149191-5F60-4A28-AAFF-039F96B0F3EC}"/>
+              </a:ext>
+              <a:ext uri="{C183D7F6-B498-43B3-948B-1728B52AA6E4}">
+                <adec:decorative xmlns:adec="http://schemas.microsoft.com/office/drawing/2017/decorative" val="1"/>
+              </a:ext>
+            </a:extLst>
+          </p:cNvPr>
+          <p:cNvSpPr>
+            <a:spLocks noGrp="1" noRot="1" noChangeAspect="1" noMove="1" noResize="1" noEditPoints="1" noAdjustHandles="1" noChangeArrowheads="1" noChangeShapeType="1" noTextEdit="1"/>
+          </p:cNvSpPr>
+          <p:nvPr>
+            <p:extLst>
+              <p:ext uri="{386F3935-93C4-4BCD-93E2-E3B085C9AB24}">
+                <p16:designElem xmlns:p16="http://schemas.microsoft.com/office/powerpoint/2015/main" val="1"/>
+              </p:ext>
+            </p:extLst>
+          </p:nvPr>
+        </p:nvSpPr>
+        <p:spPr>
+          <a:xfrm rot="16200000" flipH="1">
+            <a:off x="-885662" y="1228564"/>
+            <a:ext cx="5143179" cy="2686051"/>
+          </a:xfrm>
+          <a:prstGeom prst="rect">
+            <a:avLst/>
+          </a:prstGeom>
+          <a:gradFill>
+            <a:gsLst>
+              <a:gs pos="0">
+                <a:srgbClr val="000000">
+                  <a:alpha val="59000"/>
+                </a:srgbClr>
+              </a:gs>
+              <a:gs pos="69000">
+                <a:schemeClr val="accent1">
+                  <a:alpha val="0"/>
+                </a:schemeClr>
+              </a:gs>
+            </a:gsLst>
+            <a:lin ang="13200000" scaled="0"/>
+          </a:gradFill>
+          <a:ln>
+            <a:noFill/>
+          </a:ln>
+        </p:spPr>
+        <p:style>
+          <a:lnRef idx="2">
+            <a:schemeClr val="accent1">
+              <a:shade val="50000"/>
+            </a:schemeClr>
+          </a:lnRef>
+          <a:fillRef idx="1">
+            <a:schemeClr val="accent1"/>
+          </a:fillRef>
+          <a:effectRef idx="0">
+            <a:schemeClr val="accent1"/>
+          </a:effectRef>
+          <a:fontRef idx="minor">
+            <a:schemeClr val="lt1"/>
+          </a:fontRef>
+        </p:style>
+        <p:txBody>
+          <a:bodyPr rtlCol="0" anchor="ctr"/>
+          <a:lstStyle/>
+          <a:p>
+            <a:pPr algn="ctr"/>
+            <a:endParaRPr lang="en-US" dirty="0"/>
+          </a:p>
+        </p:txBody>
+      </p:sp>
+      <p:sp>
+        <p:nvSpPr>
+          <p:cNvPr id="58" name="Freeform: Shape 57">
+            <a:extLst>
+              <a:ext uri="{FF2B5EF4-FFF2-40B4-BE49-F238E27FC236}">
+                <a16:creationId xmlns:a16="http://schemas.microsoft.com/office/drawing/2014/main" id="{F8260ED5-17F7-4158-B241-D51DD4CF1B7E}"/>
+              </a:ext>
+              <a:ext uri="{C183D7F6-B498-43B3-948B-1728B52AA6E4}">
+                <adec:decorative xmlns:adec="http://schemas.microsoft.com/office/drawing/2017/decorative" val="1"/>
+              </a:ext>
+            </a:extLst>
+          </p:cNvPr>
+          <p:cNvSpPr>
+            <a:spLocks noGrp="1" noRot="1" noChangeAspect="1" noMove="1" noResize="1" noEditPoints="1" noAdjustHandles="1" noChangeArrowheads="1" noChangeShapeType="1" noTextEdit="1"/>
+          </p:cNvSpPr>
+          <p:nvPr>
+            <p:extLst>
+              <p:ext uri="{386F3935-93C4-4BCD-93E2-E3B085C9AB24}">
+                <p16:designElem xmlns:p16="http://schemas.microsoft.com/office/powerpoint/2015/main" val="1"/>
+              </p:ext>
+            </p:extLst>
+          </p:nvPr>
+        </p:nvSpPr>
+        <p:spPr>
+          <a:xfrm rot="6097846">
+            <a:off x="-560516" y="900984"/>
+            <a:ext cx="3606227" cy="3066500"/>
+          </a:xfrm>
+          <a:custGeom>
+            <a:avLst/>
+            <a:gdLst>
+              <a:gd name="connsiteX0" fmla="*/ 48844 w 4808302"/>
+              <a:gd name="connsiteY0" fmla="*/ 2888671 h 4088666"/>
+              <a:gd name="connsiteX1" fmla="*/ 0 w 4808302"/>
+              <a:gd name="connsiteY1" fmla="*/ 2404151 h 4088666"/>
+              <a:gd name="connsiteX2" fmla="*/ 2404151 w 4808302"/>
+              <a:gd name="connsiteY2" fmla="*/ 0 h 4088666"/>
+              <a:gd name="connsiteX3" fmla="*/ 4808302 w 4808302"/>
+              <a:gd name="connsiteY3" fmla="*/ 2404151 h 4088666"/>
+              <a:gd name="connsiteX4" fmla="*/ 4700216 w 4808302"/>
+              <a:gd name="connsiteY4" fmla="*/ 3119072 h 4088666"/>
+              <a:gd name="connsiteX5" fmla="*/ 4643143 w 4808302"/>
+              <a:gd name="connsiteY5" fmla="*/ 3275009 h 4088666"/>
+              <a:gd name="connsiteX6" fmla="*/ 690093 w 4808302"/>
+              <a:gd name="connsiteY6" fmla="*/ 4088666 h 4088666"/>
+              <a:gd name="connsiteX7" fmla="*/ 548991 w 4808302"/>
+              <a:gd name="connsiteY7" fmla="*/ 3933414 h 4088666"/>
+              <a:gd name="connsiteX8" fmla="*/ 48844 w 4808302"/>
+              <a:gd name="connsiteY8" fmla="*/ 2888671 h 4088666"/>
+            </a:gdLst>
+            <a:ahLst/>
+            <a:cxnLst>
+              <a:cxn ang="0">
+                <a:pos x="connsiteX0" y="connsiteY0"/>
+              </a:cxn>
+              <a:cxn ang="0">
+                <a:pos x="connsiteX1" y="connsiteY1"/>
+              </a:cxn>
+              <a:cxn ang="0">
+                <a:pos x="connsiteX2" y="connsiteY2"/>
+              </a:cxn>
+              <a:cxn ang="0">
+                <a:pos x="connsiteX3" y="connsiteY3"/>
+              </a:cxn>
+              <a:cxn ang="0">
+                <a:pos x="connsiteX4" y="connsiteY4"/>
+              </a:cxn>
+              <a:cxn ang="0">
+                <a:pos x="connsiteX5" y="connsiteY5"/>
+              </a:cxn>
+              <a:cxn ang="0">
+                <a:pos x="connsiteX6" y="connsiteY6"/>
+              </a:cxn>
+              <a:cxn ang="0">
+                <a:pos x="connsiteX7" y="connsiteY7"/>
+              </a:cxn>
+              <a:cxn ang="0">
+                <a:pos x="connsiteX8" y="connsiteY8"/>
+              </a:cxn>
+            </a:cxnLst>
+            <a:rect l="l" t="t" r="r" b="b"/>
+            <a:pathLst>
+              <a:path w="4808302" h="4088666">
+                <a:moveTo>
+                  <a:pt x="48844" y="2888671"/>
+                </a:moveTo>
+                <a:cubicBezTo>
+                  <a:pt x="16818" y="2732167"/>
+                  <a:pt x="0" y="2570123"/>
+                  <a:pt x="0" y="2404151"/>
+                </a:cubicBezTo>
+                <a:cubicBezTo>
+                  <a:pt x="0" y="1076375"/>
+                  <a:pt x="1076375" y="0"/>
+                  <a:pt x="2404151" y="0"/>
+                </a:cubicBezTo>
+                <a:cubicBezTo>
+                  <a:pt x="3731927" y="0"/>
+                  <a:pt x="4808302" y="1076375"/>
+                  <a:pt x="4808302" y="2404151"/>
+                </a:cubicBezTo>
+                <a:cubicBezTo>
+                  <a:pt x="4808302" y="2653109"/>
+                  <a:pt x="4770461" y="2893229"/>
+                  <a:pt x="4700216" y="3119072"/>
+                </a:cubicBezTo>
+                <a:lnTo>
+                  <a:pt x="4643143" y="3275009"/>
+                </a:lnTo>
+                <a:lnTo>
+                  <a:pt x="690093" y="4088666"/>
+                </a:lnTo>
+                <a:lnTo>
+                  <a:pt x="548991" y="3933414"/>
+                </a:lnTo>
+                <a:cubicBezTo>
+                  <a:pt x="304015" y="3636572"/>
+                  <a:pt x="128908" y="3279932"/>
+                  <a:pt x="48844" y="2888671"/>
+                </a:cubicBezTo>
+                <a:close/>
+              </a:path>
+            </a:pathLst>
+          </a:custGeom>
+          <a:gradFill>
+            <a:gsLst>
+              <a:gs pos="39000">
+                <a:schemeClr val="accent1">
+                  <a:lumMod val="60000"/>
+                  <a:lumOff val="40000"/>
+                  <a:alpha val="0"/>
+                </a:schemeClr>
+              </a:gs>
+              <a:gs pos="100000">
+                <a:schemeClr val="accent1">
+                  <a:lumMod val="75000"/>
+                  <a:alpha val="26000"/>
+                </a:schemeClr>
+              </a:gs>
+            </a:gsLst>
+            <a:lin ang="18600000" scaled="0"/>
+          </a:gradFill>
+          <a:ln>
+            <a:noFill/>
+          </a:ln>
+        </p:spPr>
+        <p:style>
+          <a:lnRef idx="2">
+            <a:schemeClr val="accent1">
+              <a:shade val="50000"/>
+            </a:schemeClr>
+          </a:lnRef>
+          <a:fillRef idx="1">
+            <a:schemeClr val="accent1"/>
+          </a:fillRef>
+          <a:effectRef idx="0">
+            <a:schemeClr val="accent1"/>
+          </a:effectRef>
+          <a:fontRef idx="minor">
+            <a:schemeClr val="lt1"/>
+          </a:fontRef>
+        </p:style>
+        <p:txBody>
+          <a:bodyPr wrap="square" rtlCol="0" anchor="ctr">
+            <a:noAutofit/>
+          </a:bodyPr>
+          <a:lstStyle/>
+          <a:p>
+            <a:pPr algn="ctr"/>
+            <a:endParaRPr lang="en-US" dirty="0"/>
+          </a:p>
+        </p:txBody>
+      </p:sp>
+      <p:sp>
+        <p:nvSpPr>
+          <p:cNvPr id="2" name="Text 0">
+            <a:extLst>
+              <a:ext uri="{FF2B5EF4-FFF2-40B4-BE49-F238E27FC236}">
+                <a16:creationId xmlns:a16="http://schemas.microsoft.com/office/drawing/2014/main" id="{8865ED8E-A088-444C-B867-E20163841D3E}"/>
+              </a:ext>
+            </a:extLst>
+          </p:cNvPr>
+          <p:cNvSpPr/>
+          <p:nvPr/>
+        </p:nvSpPr>
+        <p:spPr>
+          <a:xfrm>
+            <a:off x="495030" y="2075329"/>
+            <a:ext cx="2160621" cy="2303930"/>
+          </a:xfrm>
+          <a:prstGeom prst="rect">
+            <a:avLst/>
+          </a:prstGeom>
+        </p:spPr>
+        <p:txBody>
+          <a:bodyPr vert="horz" lIns="91440" tIns="45720" rIns="91440" bIns="45720" rtlCol="0" anchor="t">
+            <a:normAutofit/>
+          </a:bodyPr>
+          <a:lstStyle/>
+          <a:p>
+            <a:pPr marL="0" indent="0">
+              <a:lnSpc>
+                <a:spcPct val="90000"/>
+              </a:lnSpc>
+              <a:spcBef>
+                <a:spcPct val="0"/>
+              </a:spcBef>
+              <a:spcAft>
+                <a:spcPts val="600"/>
+              </a:spcAft>
+            </a:pPr>
+            <a:r>
+              <a:rPr lang="en-US" sz="3000" b="1" kern="1200">
+                <a:solidFill>
+                  <a:srgbClr val="FFFFFF"/>
+                </a:solidFill>
+                <a:latin typeface="+mj-lt"/>
+                <a:ea typeface="+mj-ea"/>
+                <a:cs typeface="+mj-cs"/>
+              </a:rPr>
+              <a:t>Two Routes, One Mission</a:t>
+            </a:r>
+            <a:endParaRPr lang="en-US" sz="3000" kern="1200">
+              <a:solidFill>
+                <a:srgbClr val="FFFFFF"/>
+              </a:solidFill>
+              <a:latin typeface="+mj-lt"/>
+              <a:ea typeface="+mj-ea"/>
+              <a:cs typeface="+mj-cs"/>
+            </a:endParaRPr>
+          </a:p>
+        </p:txBody>
+      </p:sp>
+      <p:sp>
+        <p:nvSpPr>
+          <p:cNvPr id="3" name="Text 1">
+            <a:extLst>
+              <a:ext uri="{FF2B5EF4-FFF2-40B4-BE49-F238E27FC236}">
+                <a16:creationId xmlns:a16="http://schemas.microsoft.com/office/drawing/2014/main" id="{6B2A3970-D43A-9AD8-FEF4-C81734691940}"/>
+              </a:ext>
+            </a:extLst>
+          </p:cNvPr>
+          <p:cNvSpPr/>
+          <p:nvPr/>
+        </p:nvSpPr>
+        <p:spPr>
+          <a:xfrm>
+            <a:off x="495031" y="605118"/>
+            <a:ext cx="2189804" cy="1120587"/>
+          </a:xfrm>
+          <a:prstGeom prst="rect">
+            <a:avLst/>
+          </a:prstGeom>
+        </p:spPr>
+        <p:txBody>
+          <a:bodyPr vert="horz" lIns="91440" tIns="45720" rIns="91440" bIns="45720" rtlCol="0" anchor="b">
+            <a:normAutofit/>
+          </a:bodyPr>
+          <a:lstStyle/>
+          <a:p>
+            <a:pPr>
+              <a:lnSpc>
+                <a:spcPct val="90000"/>
+              </a:lnSpc>
+              <a:spcBef>
+                <a:spcPts val="1000"/>
+              </a:spcBef>
+            </a:pPr>
+            <a:r>
+              <a:rPr lang="en-US" sz="1500" kern="1200">
+                <a:solidFill>
+                  <a:srgbClr val="FFFFFF"/>
+                </a:solidFill>
+                <a:latin typeface="+mn-lt"/>
+                <a:ea typeface="+mn-ea"/>
+                <a:cs typeface="+mn-cs"/>
+              </a:rPr>
+              <a:t>Free campus transit for all Shepherd University students, Monday–Friday</a:t>
+            </a:r>
+          </a:p>
+        </p:txBody>
+      </p:sp>
+      <p:pic>
+        <p:nvPicPr>
+          <p:cNvPr id="21" name="Picture 20">
+            <a:extLst>
+              <a:ext uri="{FF2B5EF4-FFF2-40B4-BE49-F238E27FC236}">
+                <a16:creationId xmlns:a16="http://schemas.microsoft.com/office/drawing/2014/main" id="{F8BD83E2-52B8-F8E3-8C43-B093D6D62283}"/>
+              </a:ext>
+            </a:extLst>
+          </p:cNvPr>
+          <p:cNvPicPr>
+            <a:picLocks noChangeAspect="1"/>
+          </p:cNvPicPr>
+          <p:nvPr/>
+        </p:nvPicPr>
+        <p:blipFill>
+          <a:blip r:embed="rId3"/>
+          <a:stretch>
+            <a:fillRect/>
+          </a:stretch>
+        </p:blipFill>
+        <p:spPr>
+          <a:xfrm>
+            <a:off x="4370488" y="350406"/>
+            <a:ext cx="3431976" cy="4442688"/>
+          </a:xfrm>
+          <a:prstGeom prst="rect">
+            <a:avLst/>
+          </a:prstGeom>
+        </p:spPr>
+      </p:pic>
+    </p:spTree>
+    <p:extLst>
+      <p:ext uri="{BB962C8B-B14F-4D97-AF65-F5344CB8AC3E}">
+        <p14:creationId xmlns:p14="http://schemas.microsoft.com/office/powerpoint/2010/main" val="1333004857"/>
+      </p:ext>
+    </p:extLst>
+  </p:cSld>
+  <p:clrMapOvr>
+    <a:masterClrMapping/>
+  </p:clrMapOvr>
+</p:sld>
+</file>
+
+<file path=ppt/slides/slide8.xml><?xml version="1.0" encoding="utf-8"?>
 <p:sld xmlns:a="http://schemas.openxmlformats.org/drawingml/2006/main" xmlns:r="http://schemas.openxmlformats.org/officeDocument/2006/relationships" xmlns:p="http://schemas.openxmlformats.org/presentationml/2006/main">
   <p:cSld name="Slide 5">
     <p:bg>
@@ -13595,6 +16754,37 @@
           </a:p>
         </p:txBody>
       </p:sp>
+      <p:pic>
+        <p:nvPicPr>
+          <p:cNvPr id="5" name="Picture 4">
+            <a:extLst>
+              <a:ext uri="{FF2B5EF4-FFF2-40B4-BE49-F238E27FC236}">
+                <a16:creationId xmlns:a16="http://schemas.microsoft.com/office/drawing/2014/main" id="{57713869-5429-B574-2F9B-5BCC58A1A31C}"/>
+              </a:ext>
+            </a:extLst>
+          </p:cNvPr>
+          <p:cNvPicPr>
+            <a:picLocks noChangeAspect="1"/>
+          </p:cNvPicPr>
+          <p:nvPr/>
+        </p:nvPicPr>
+        <p:blipFill>
+          <a:blip r:embed="rId3"/>
+          <a:srcRect b="9684"/>
+          <a:stretch>
+            <a:fillRect/>
+          </a:stretch>
+        </p:blipFill>
+        <p:spPr>
+          <a:xfrm>
+            <a:off x="5636622" y="0"/>
+            <a:ext cx="3507377" cy="3167743"/>
+          </a:xfrm>
+          <a:prstGeom prst="rect">
+            <a:avLst/>
+          </a:prstGeom>
+        </p:spPr>
+      </p:pic>
     </p:spTree>
   </p:cSld>
   <p:clrMapOvr>
@@ -13603,7 +16793,7 @@
 </p:sld>
 </file>
 
-<file path=ppt/slides/slide6.xml><?xml version="1.0" encoding="utf-8"?>
+<file path=ppt/slides/slide9.xml><?xml version="1.0" encoding="utf-8"?>
 <p:sld xmlns:a="http://schemas.openxmlformats.org/drawingml/2006/main" xmlns:r="http://schemas.openxmlformats.org/officeDocument/2006/relationships" xmlns:p="http://schemas.openxmlformats.org/presentationml/2006/main">
   <p:cSld name="Slide 6">
     <p:bg>
@@ -13746,1121 +16936,9 @@
                   <a:srgbClr val="64748B"/>
                 </a:solidFill>
               </a:rPr>
-              <a:t>* FY25-26 partial year through May — already +19% above full FY24-25</a:t>
+              <a:t>* FY25-26 +19% above  FY24-25</a:t>
             </a:r>
             <a:endParaRPr lang="en-US" sz="1000" dirty="0"/>
-          </a:p>
-        </p:txBody>
-      </p:sp>
-    </p:spTree>
-  </p:cSld>
-  <p:clrMapOvr>
-    <a:masterClrMapping/>
-  </p:clrMapOvr>
-</p:sld>
-</file>
-
-<file path=ppt/slides/slide7.xml><?xml version="1.0" encoding="utf-8"?>
-<p:sld xmlns:a="http://schemas.openxmlformats.org/drawingml/2006/main" xmlns:r="http://schemas.openxmlformats.org/officeDocument/2006/relationships" xmlns:p="http://schemas.openxmlformats.org/presentationml/2006/main">
-  <p:cSld name="Slide 7">
-    <p:bg>
-      <p:bgPr>
-        <a:solidFill>
-          <a:srgbClr val="F4F7FB"/>
-        </a:solidFill>
-        <a:effectLst/>
-      </p:bgPr>
-    </p:bg>
-    <p:spTree>
-      <p:nvGrpSpPr>
-        <p:cNvPr id="1" name=""/>
-        <p:cNvGrpSpPr/>
-        <p:nvPr/>
-      </p:nvGrpSpPr>
-      <p:grpSpPr>
-        <a:xfrm>
-          <a:off x="0" y="0"/>
-          <a:ext cx="0" cy="0"/>
-          <a:chOff x="0" y="0"/>
-          <a:chExt cx="0" cy="0"/>
-        </a:xfrm>
-      </p:grpSpPr>
-      <p:sp>
-        <p:nvSpPr>
-          <p:cNvPr id="2" name="Text 0"/>
-          <p:cNvSpPr/>
-          <p:nvPr/>
-        </p:nvSpPr>
-        <p:spPr>
-          <a:xfrm>
-            <a:off x="457200" y="228600"/>
-            <a:ext cx="8229600" cy="594360"/>
-          </a:xfrm>
-          <a:prstGeom prst="rect">
-            <a:avLst/>
-          </a:prstGeom>
-          <a:noFill/>
-          <a:ln/>
-        </p:spPr>
-        <p:txBody>
-          <a:bodyPr wrap="square" rtlCol="0" anchor="ctr"/>
-          <a:lstStyle/>
-          <a:p>
-            <a:pPr marL="0" indent="0">
-              <a:buNone/>
-            </a:pPr>
-            <a:r>
-              <a:rPr lang="en-US" sz="3000" b="1" dirty="0">
-                <a:solidFill>
-                  <a:srgbClr val="0A2342"/>
-                </a:solidFill>
-              </a:rPr>
-              <a:t>FY2025-26: A Record Year</a:t>
-            </a:r>
-            <a:endParaRPr lang="en-US" sz="3000" dirty="0"/>
-          </a:p>
-        </p:txBody>
-      </p:sp>
-      <p:sp>
-        <p:nvSpPr>
-          <p:cNvPr id="3" name="Shape 1"/>
-          <p:cNvSpPr/>
-          <p:nvPr/>
-        </p:nvSpPr>
-        <p:spPr>
-          <a:xfrm>
-            <a:off x="320040" y="1005840"/>
-            <a:ext cx="1965960" cy="1554480"/>
-          </a:xfrm>
-          <a:prstGeom prst="rect">
-            <a:avLst/>
-          </a:prstGeom>
-          <a:solidFill>
-            <a:srgbClr val="FFFFFF"/>
-          </a:solidFill>
-          <a:ln w="6350">
-            <a:solidFill>
-              <a:srgbClr val="E2E8F0"/>
-            </a:solidFill>
-            <a:prstDash val="solid"/>
-          </a:ln>
-          <a:effectLst>
-            <a:outerShdw blurRad="101600" dist="38100" dir="8100000" algn="bl" rotWithShape="0">
-              <a:srgbClr val="000000">
-                <a:alpha val="12000"/>
-              </a:srgbClr>
-            </a:outerShdw>
-          </a:effectLst>
-        </p:spPr>
-        <p:txBody>
-          <a:bodyPr/>
-          <a:lstStyle/>
-          <a:p>
-            <a:endParaRPr lang="en-US"/>
-          </a:p>
-        </p:txBody>
-      </p:sp>
-      <p:sp>
-        <p:nvSpPr>
-          <p:cNvPr id="4" name="Shape 2"/>
-          <p:cNvSpPr/>
-          <p:nvPr/>
-        </p:nvSpPr>
-        <p:spPr>
-          <a:xfrm>
-            <a:off x="320040" y="1005840"/>
-            <a:ext cx="1965960" cy="64008"/>
-          </a:xfrm>
-          <a:prstGeom prst="rect">
-            <a:avLst/>
-          </a:prstGeom>
-          <a:solidFill>
-            <a:srgbClr val="1A5C9C"/>
-          </a:solidFill>
-          <a:ln/>
-        </p:spPr>
-        <p:txBody>
-          <a:bodyPr/>
-          <a:lstStyle/>
-          <a:p>
-            <a:endParaRPr lang="en-US"/>
-          </a:p>
-        </p:txBody>
-      </p:sp>
-      <p:sp>
-        <p:nvSpPr>
-          <p:cNvPr id="5" name="Text 3"/>
-          <p:cNvSpPr/>
-          <p:nvPr/>
-        </p:nvSpPr>
-        <p:spPr>
-          <a:xfrm>
-            <a:off x="320040" y="1170432"/>
-            <a:ext cx="1965960" cy="685800"/>
-          </a:xfrm>
-          <a:prstGeom prst="rect">
-            <a:avLst/>
-          </a:prstGeom>
-          <a:noFill/>
-          <a:ln/>
-        </p:spPr>
-        <p:txBody>
-          <a:bodyPr wrap="square" lIns="0" tIns="0" rIns="0" bIns="0" rtlCol="0" anchor="ctr"/>
-          <a:lstStyle/>
-          <a:p>
-            <a:pPr marL="0" indent="0" algn="ctr">
-              <a:buNone/>
-            </a:pPr>
-            <a:r>
-              <a:rPr lang="en-US" sz="3800" b="1" dirty="0">
-                <a:solidFill>
-                  <a:srgbClr val="1A5C9C"/>
-                </a:solidFill>
-              </a:rPr>
-              <a:t>37,173</a:t>
-            </a:r>
-            <a:endParaRPr lang="en-US" sz="3800" dirty="0"/>
-          </a:p>
-        </p:txBody>
-      </p:sp>
-      <p:sp>
-        <p:nvSpPr>
-          <p:cNvPr id="6" name="Text 4"/>
-          <p:cNvSpPr/>
-          <p:nvPr/>
-        </p:nvSpPr>
-        <p:spPr>
-          <a:xfrm>
-            <a:off x="429768" y="1828800"/>
-            <a:ext cx="1746504" cy="320040"/>
-          </a:xfrm>
-          <a:prstGeom prst="rect">
-            <a:avLst/>
-          </a:prstGeom>
-          <a:noFill/>
-          <a:ln/>
-        </p:spPr>
-        <p:txBody>
-          <a:bodyPr wrap="square" lIns="0" tIns="0" rIns="0" bIns="0" rtlCol="0" anchor="ctr"/>
-          <a:lstStyle/>
-          <a:p>
-            <a:pPr marL="0" indent="0" algn="ctr">
-              <a:buNone/>
-            </a:pPr>
-            <a:r>
-              <a:rPr lang="en-US" sz="1300" b="1" dirty="0">
-                <a:solidFill>
-                  <a:srgbClr val="334155"/>
-                </a:solidFill>
-              </a:rPr>
-              <a:t>Riders to date</a:t>
-            </a:r>
-            <a:endParaRPr lang="en-US" sz="1300" dirty="0"/>
-          </a:p>
-        </p:txBody>
-      </p:sp>
-      <p:sp>
-        <p:nvSpPr>
-          <p:cNvPr id="7" name="Text 5"/>
-          <p:cNvSpPr/>
-          <p:nvPr/>
-        </p:nvSpPr>
-        <p:spPr>
-          <a:xfrm>
-            <a:off x="411480" y="2103120"/>
-            <a:ext cx="1783080" cy="228600"/>
-          </a:xfrm>
-          <a:prstGeom prst="rect">
-            <a:avLst/>
-          </a:prstGeom>
-          <a:noFill/>
-          <a:ln/>
-        </p:spPr>
-        <p:txBody>
-          <a:bodyPr wrap="square" lIns="0" tIns="0" rIns="0" bIns="0" rtlCol="0" anchor="ctr"/>
-          <a:lstStyle/>
-          <a:p>
-            <a:pPr marL="0" indent="0" algn="ctr">
-              <a:buNone/>
-            </a:pPr>
-            <a:r>
-              <a:rPr lang="en-US" sz="1000" dirty="0">
-                <a:solidFill>
-                  <a:srgbClr val="64748B"/>
-                </a:solidFill>
-              </a:rPr>
-              <a:t>Aug 2025 – May 2026</a:t>
-            </a:r>
-            <a:endParaRPr lang="en-US" sz="1000" dirty="0"/>
-          </a:p>
-        </p:txBody>
-      </p:sp>
-      <p:sp>
-        <p:nvSpPr>
-          <p:cNvPr id="8" name="Shape 6"/>
-          <p:cNvSpPr/>
-          <p:nvPr/>
-        </p:nvSpPr>
-        <p:spPr>
-          <a:xfrm>
-            <a:off x="2468880" y="1005840"/>
-            <a:ext cx="1965960" cy="1554480"/>
-          </a:xfrm>
-          <a:prstGeom prst="rect">
-            <a:avLst/>
-          </a:prstGeom>
-          <a:solidFill>
-            <a:srgbClr val="FFFFFF"/>
-          </a:solidFill>
-          <a:ln w="6350">
-            <a:solidFill>
-              <a:srgbClr val="E2E8F0"/>
-            </a:solidFill>
-            <a:prstDash val="solid"/>
-          </a:ln>
-          <a:effectLst>
-            <a:outerShdw blurRad="101600" dist="38100" dir="8100000" algn="bl" rotWithShape="0">
-              <a:srgbClr val="000000">
-                <a:alpha val="12000"/>
-              </a:srgbClr>
-            </a:outerShdw>
-          </a:effectLst>
-        </p:spPr>
-        <p:txBody>
-          <a:bodyPr/>
-          <a:lstStyle/>
-          <a:p>
-            <a:endParaRPr lang="en-US"/>
-          </a:p>
-        </p:txBody>
-      </p:sp>
-      <p:sp>
-        <p:nvSpPr>
-          <p:cNvPr id="9" name="Shape 7"/>
-          <p:cNvSpPr/>
-          <p:nvPr/>
-        </p:nvSpPr>
-        <p:spPr>
-          <a:xfrm>
-            <a:off x="2468880" y="1005840"/>
-            <a:ext cx="1965960" cy="64008"/>
-          </a:xfrm>
-          <a:prstGeom prst="rect">
-            <a:avLst/>
-          </a:prstGeom>
-          <a:solidFill>
-            <a:srgbClr val="1D9E75"/>
-          </a:solidFill>
-          <a:ln/>
-        </p:spPr>
-        <p:txBody>
-          <a:bodyPr/>
-          <a:lstStyle/>
-          <a:p>
-            <a:endParaRPr lang="en-US"/>
-          </a:p>
-        </p:txBody>
-      </p:sp>
-      <p:sp>
-        <p:nvSpPr>
-          <p:cNvPr id="10" name="Text 8"/>
-          <p:cNvSpPr/>
-          <p:nvPr/>
-        </p:nvSpPr>
-        <p:spPr>
-          <a:xfrm>
-            <a:off x="2468880" y="1170432"/>
-            <a:ext cx="1965960" cy="685800"/>
-          </a:xfrm>
-          <a:prstGeom prst="rect">
-            <a:avLst/>
-          </a:prstGeom>
-          <a:noFill/>
-          <a:ln/>
-        </p:spPr>
-        <p:txBody>
-          <a:bodyPr wrap="square" lIns="0" tIns="0" rIns="0" bIns="0" rtlCol="0" anchor="ctr"/>
-          <a:lstStyle/>
-          <a:p>
-            <a:pPr marL="0" indent="0" algn="ctr">
-              <a:buNone/>
-            </a:pPr>
-            <a:r>
-              <a:rPr lang="en-US" sz="3800" b="1" dirty="0">
-                <a:solidFill>
-                  <a:srgbClr val="1D9E75"/>
-                </a:solidFill>
-              </a:rPr>
-              <a:t>+19%</a:t>
-            </a:r>
-            <a:endParaRPr lang="en-US" sz="3800" dirty="0"/>
-          </a:p>
-        </p:txBody>
-      </p:sp>
-      <p:sp>
-        <p:nvSpPr>
-          <p:cNvPr id="11" name="Text 9"/>
-          <p:cNvSpPr/>
-          <p:nvPr/>
-        </p:nvSpPr>
-        <p:spPr>
-          <a:xfrm>
-            <a:off x="2578608" y="1828800"/>
-            <a:ext cx="1746504" cy="320040"/>
-          </a:xfrm>
-          <a:prstGeom prst="rect">
-            <a:avLst/>
-          </a:prstGeom>
-          <a:noFill/>
-          <a:ln/>
-        </p:spPr>
-        <p:txBody>
-          <a:bodyPr wrap="square" lIns="0" tIns="0" rIns="0" bIns="0" rtlCol="0" anchor="ctr"/>
-          <a:lstStyle/>
-          <a:p>
-            <a:pPr marL="0" indent="0" algn="ctr">
-              <a:buNone/>
-            </a:pPr>
-            <a:r>
-              <a:rPr lang="en-US" sz="1300" b="1" dirty="0">
-                <a:solidFill>
-                  <a:srgbClr val="334155"/>
-                </a:solidFill>
-              </a:rPr>
-              <a:t>Growth vs FY24-25</a:t>
-            </a:r>
-            <a:endParaRPr lang="en-US" sz="1300" dirty="0"/>
-          </a:p>
-        </p:txBody>
-      </p:sp>
-      <p:sp>
-        <p:nvSpPr>
-          <p:cNvPr id="12" name="Text 10"/>
-          <p:cNvSpPr/>
-          <p:nvPr/>
-        </p:nvSpPr>
-        <p:spPr>
-          <a:xfrm>
-            <a:off x="2560320" y="2103120"/>
-            <a:ext cx="1783080" cy="228600"/>
-          </a:xfrm>
-          <a:prstGeom prst="rect">
-            <a:avLst/>
-          </a:prstGeom>
-          <a:noFill/>
-          <a:ln/>
-        </p:spPr>
-        <p:txBody>
-          <a:bodyPr wrap="square" lIns="0" tIns="0" rIns="0" bIns="0" rtlCol="0" anchor="ctr"/>
-          <a:lstStyle/>
-          <a:p>
-            <a:pPr marL="0" indent="0" algn="ctr">
-              <a:buNone/>
-            </a:pPr>
-            <a:r>
-              <a:rPr lang="en-US" sz="1000" dirty="0">
-                <a:solidFill>
-                  <a:srgbClr val="64748B"/>
-                </a:solidFill>
-              </a:rPr>
-              <a:t>31,306 full-year prior</a:t>
-            </a:r>
-            <a:endParaRPr lang="en-US" sz="1000" dirty="0"/>
-          </a:p>
-        </p:txBody>
-      </p:sp>
-      <p:sp>
-        <p:nvSpPr>
-          <p:cNvPr id="13" name="Shape 11"/>
-          <p:cNvSpPr/>
-          <p:nvPr/>
-        </p:nvSpPr>
-        <p:spPr>
-          <a:xfrm>
-            <a:off x="4617720" y="1005840"/>
-            <a:ext cx="1965960" cy="1554480"/>
-          </a:xfrm>
-          <a:prstGeom prst="rect">
-            <a:avLst/>
-          </a:prstGeom>
-          <a:solidFill>
-            <a:srgbClr val="FFFFFF"/>
-          </a:solidFill>
-          <a:ln w="6350">
-            <a:solidFill>
-              <a:srgbClr val="E2E8F0"/>
-            </a:solidFill>
-            <a:prstDash val="solid"/>
-          </a:ln>
-          <a:effectLst>
-            <a:outerShdw blurRad="101600" dist="38100" dir="8100000" algn="bl" rotWithShape="0">
-              <a:srgbClr val="000000">
-                <a:alpha val="12000"/>
-              </a:srgbClr>
-            </a:outerShdw>
-          </a:effectLst>
-        </p:spPr>
-        <p:txBody>
-          <a:bodyPr/>
-          <a:lstStyle/>
-          <a:p>
-            <a:endParaRPr lang="en-US"/>
-          </a:p>
-        </p:txBody>
-      </p:sp>
-      <p:sp>
-        <p:nvSpPr>
-          <p:cNvPr id="14" name="Shape 12"/>
-          <p:cNvSpPr/>
-          <p:nvPr/>
-        </p:nvSpPr>
-        <p:spPr>
-          <a:xfrm>
-            <a:off x="4617720" y="1005840"/>
-            <a:ext cx="1965960" cy="64008"/>
-          </a:xfrm>
-          <a:prstGeom prst="rect">
-            <a:avLst/>
-          </a:prstGeom>
-          <a:solidFill>
-            <a:srgbClr val="D85A30"/>
-          </a:solidFill>
-          <a:ln/>
-        </p:spPr>
-        <p:txBody>
-          <a:bodyPr/>
-          <a:lstStyle/>
-          <a:p>
-            <a:endParaRPr lang="en-US"/>
-          </a:p>
-        </p:txBody>
-      </p:sp>
-      <p:sp>
-        <p:nvSpPr>
-          <p:cNvPr id="15" name="Text 13"/>
-          <p:cNvSpPr/>
-          <p:nvPr/>
-        </p:nvSpPr>
-        <p:spPr>
-          <a:xfrm>
-            <a:off x="4617720" y="1170432"/>
-            <a:ext cx="1965960" cy="685800"/>
-          </a:xfrm>
-          <a:prstGeom prst="rect">
-            <a:avLst/>
-          </a:prstGeom>
-          <a:noFill/>
-          <a:ln/>
-        </p:spPr>
-        <p:txBody>
-          <a:bodyPr wrap="square" lIns="0" tIns="0" rIns="0" bIns="0" rtlCol="0" anchor="ctr"/>
-          <a:lstStyle/>
-          <a:p>
-            <a:pPr marL="0" indent="0" algn="ctr">
-              <a:buNone/>
-            </a:pPr>
-            <a:r>
-              <a:rPr lang="en-US" sz="3800" b="1" dirty="0">
-                <a:solidFill>
-                  <a:srgbClr val="D85A30"/>
-                </a:solidFill>
-              </a:rPr>
-              <a:t>6,501</a:t>
-            </a:r>
-            <a:endParaRPr lang="en-US" sz="3800" dirty="0"/>
-          </a:p>
-        </p:txBody>
-      </p:sp>
-      <p:sp>
-        <p:nvSpPr>
-          <p:cNvPr id="16" name="Text 14"/>
-          <p:cNvSpPr/>
-          <p:nvPr/>
-        </p:nvSpPr>
-        <p:spPr>
-          <a:xfrm>
-            <a:off x="4727448" y="1828800"/>
-            <a:ext cx="1746504" cy="320040"/>
-          </a:xfrm>
-          <a:prstGeom prst="rect">
-            <a:avLst/>
-          </a:prstGeom>
-          <a:noFill/>
-          <a:ln/>
-        </p:spPr>
-        <p:txBody>
-          <a:bodyPr wrap="square" lIns="0" tIns="0" rIns="0" bIns="0" rtlCol="0" anchor="ctr"/>
-          <a:lstStyle/>
-          <a:p>
-            <a:pPr marL="0" indent="0" algn="ctr">
-              <a:buNone/>
-            </a:pPr>
-            <a:r>
-              <a:rPr lang="en-US" sz="1300" b="1" dirty="0">
-                <a:solidFill>
-                  <a:srgbClr val="334155"/>
-                </a:solidFill>
-              </a:rPr>
-              <a:t>February 2026</a:t>
-            </a:r>
-            <a:endParaRPr lang="en-US" sz="1300" dirty="0"/>
-          </a:p>
-        </p:txBody>
-      </p:sp>
-      <p:sp>
-        <p:nvSpPr>
-          <p:cNvPr id="17" name="Text 15"/>
-          <p:cNvSpPr/>
-          <p:nvPr/>
-        </p:nvSpPr>
-        <p:spPr>
-          <a:xfrm>
-            <a:off x="4709160" y="2103120"/>
-            <a:ext cx="1783080" cy="228600"/>
-          </a:xfrm>
-          <a:prstGeom prst="rect">
-            <a:avLst/>
-          </a:prstGeom>
-          <a:noFill/>
-          <a:ln/>
-        </p:spPr>
-        <p:txBody>
-          <a:bodyPr wrap="square" lIns="0" tIns="0" rIns="0" bIns="0" rtlCol="0" anchor="ctr"/>
-          <a:lstStyle/>
-          <a:p>
-            <a:pPr marL="0" indent="0" algn="ctr">
-              <a:buNone/>
-            </a:pPr>
-            <a:r>
-              <a:rPr lang="en-US" sz="1000" dirty="0">
-                <a:solidFill>
-                  <a:srgbClr val="64748B"/>
-                </a:solidFill>
-              </a:rPr>
-              <a:t>Highest single month ever</a:t>
-            </a:r>
-            <a:endParaRPr lang="en-US" sz="1000" dirty="0"/>
-          </a:p>
-        </p:txBody>
-      </p:sp>
-      <p:sp>
-        <p:nvSpPr>
-          <p:cNvPr id="18" name="Shape 16"/>
-          <p:cNvSpPr/>
-          <p:nvPr/>
-        </p:nvSpPr>
-        <p:spPr>
-          <a:xfrm>
-            <a:off x="6766560" y="1005840"/>
-            <a:ext cx="1965960" cy="1554480"/>
-          </a:xfrm>
-          <a:prstGeom prst="rect">
-            <a:avLst/>
-          </a:prstGeom>
-          <a:solidFill>
-            <a:srgbClr val="FFFFFF"/>
-          </a:solidFill>
-          <a:ln w="6350">
-            <a:solidFill>
-              <a:srgbClr val="E2E8F0"/>
-            </a:solidFill>
-            <a:prstDash val="solid"/>
-          </a:ln>
-          <a:effectLst>
-            <a:outerShdw blurRad="101600" dist="38100" dir="8100000" algn="bl" rotWithShape="0">
-              <a:srgbClr val="000000">
-                <a:alpha val="12000"/>
-              </a:srgbClr>
-            </a:outerShdw>
-          </a:effectLst>
-        </p:spPr>
-        <p:txBody>
-          <a:bodyPr/>
-          <a:lstStyle/>
-          <a:p>
-            <a:endParaRPr lang="en-US"/>
-          </a:p>
-        </p:txBody>
-      </p:sp>
-      <p:sp>
-        <p:nvSpPr>
-          <p:cNvPr id="19" name="Shape 17"/>
-          <p:cNvSpPr/>
-          <p:nvPr/>
-        </p:nvSpPr>
-        <p:spPr>
-          <a:xfrm>
-            <a:off x="6766560" y="1005840"/>
-            <a:ext cx="1965960" cy="64008"/>
-          </a:xfrm>
-          <a:prstGeom prst="rect">
-            <a:avLst/>
-          </a:prstGeom>
-          <a:solidFill>
-            <a:srgbClr val="BA7517"/>
-          </a:solidFill>
-          <a:ln/>
-        </p:spPr>
-        <p:txBody>
-          <a:bodyPr/>
-          <a:lstStyle/>
-          <a:p>
-            <a:endParaRPr lang="en-US"/>
-          </a:p>
-        </p:txBody>
-      </p:sp>
-      <p:sp>
-        <p:nvSpPr>
-          <p:cNvPr id="20" name="Text 18"/>
-          <p:cNvSpPr/>
-          <p:nvPr/>
-        </p:nvSpPr>
-        <p:spPr>
-          <a:xfrm>
-            <a:off x="6766560" y="1170432"/>
-            <a:ext cx="1965960" cy="685800"/>
-          </a:xfrm>
-          <a:prstGeom prst="rect">
-            <a:avLst/>
-          </a:prstGeom>
-          <a:noFill/>
-          <a:ln/>
-        </p:spPr>
-        <p:txBody>
-          <a:bodyPr wrap="square" lIns="0" tIns="0" rIns="0" bIns="0" rtlCol="0" anchor="ctr"/>
-          <a:lstStyle/>
-          <a:p>
-            <a:pPr marL="0" indent="0" algn="ctr">
-              <a:buNone/>
-            </a:pPr>
-            <a:r>
-              <a:rPr lang="en-US" sz="3800" b="1" dirty="0">
-                <a:solidFill>
-                  <a:srgbClr val="BA7517"/>
-                </a:solidFill>
-              </a:rPr>
-              <a:t>12.1+</a:t>
-            </a:r>
-            <a:endParaRPr lang="en-US" sz="3800" dirty="0"/>
-          </a:p>
-        </p:txBody>
-      </p:sp>
-      <p:sp>
-        <p:nvSpPr>
-          <p:cNvPr id="21" name="Text 19"/>
-          <p:cNvSpPr/>
-          <p:nvPr/>
-        </p:nvSpPr>
-        <p:spPr>
-          <a:xfrm>
-            <a:off x="6876288" y="1828800"/>
-            <a:ext cx="1746504" cy="320040"/>
-          </a:xfrm>
-          <a:prstGeom prst="rect">
-            <a:avLst/>
-          </a:prstGeom>
-          <a:noFill/>
-          <a:ln/>
-        </p:spPr>
-        <p:txBody>
-          <a:bodyPr wrap="square" lIns="0" tIns="0" rIns="0" bIns="0" rtlCol="0" anchor="ctr"/>
-          <a:lstStyle/>
-          <a:p>
-            <a:pPr marL="0" indent="0" algn="ctr">
-              <a:buNone/>
-            </a:pPr>
-            <a:r>
-              <a:rPr lang="en-US" sz="1300" b="1" dirty="0">
-                <a:solidFill>
-                  <a:srgbClr val="334155"/>
-                </a:solidFill>
-              </a:rPr>
-              <a:t>Riders per 100</a:t>
-            </a:r>
-            <a:endParaRPr lang="en-US" sz="1300" dirty="0"/>
-          </a:p>
-        </p:txBody>
-      </p:sp>
-      <p:sp>
-        <p:nvSpPr>
-          <p:cNvPr id="22" name="Text 20"/>
-          <p:cNvSpPr/>
-          <p:nvPr/>
-        </p:nvSpPr>
-        <p:spPr>
-          <a:xfrm>
-            <a:off x="6858000" y="2103120"/>
-            <a:ext cx="1783080" cy="228600"/>
-          </a:xfrm>
-          <a:prstGeom prst="rect">
-            <a:avLst/>
-          </a:prstGeom>
-          <a:noFill/>
-          <a:ln/>
-        </p:spPr>
-        <p:txBody>
-          <a:bodyPr wrap="square" lIns="0" tIns="0" rIns="0" bIns="0" rtlCol="0" anchor="ctr"/>
-          <a:lstStyle/>
-          <a:p>
-            <a:pPr marL="0" indent="0" algn="ctr">
-              <a:buNone/>
-            </a:pPr>
-            <a:r>
-              <a:rPr lang="en-US" sz="1000" dirty="0">
-                <a:solidFill>
-                  <a:srgbClr val="64748B"/>
-                </a:solidFill>
-              </a:rPr>
-              <a:t>Students enrolled</a:t>
-            </a:r>
-            <a:endParaRPr lang="en-US" sz="1000" dirty="0"/>
-          </a:p>
-        </p:txBody>
-      </p:sp>
-      <p:sp>
-        <p:nvSpPr>
-          <p:cNvPr id="23" name="Text 21"/>
-          <p:cNvSpPr/>
-          <p:nvPr/>
-        </p:nvSpPr>
-        <p:spPr>
-          <a:xfrm>
-            <a:off x="457200" y="2697480"/>
-            <a:ext cx="8229600" cy="320040"/>
-          </a:xfrm>
-          <a:prstGeom prst="rect">
-            <a:avLst/>
-          </a:prstGeom>
-          <a:noFill/>
-          <a:ln/>
-        </p:spPr>
-        <p:txBody>
-          <a:bodyPr wrap="square" rtlCol="0" anchor="ctr"/>
-          <a:lstStyle/>
-          <a:p>
-            <a:pPr marL="0" indent="0">
-              <a:buNone/>
-            </a:pPr>
-            <a:r>
-              <a:rPr lang="en-US" sz="1300" b="1" dirty="0">
-                <a:solidFill>
-                  <a:srgbClr val="334155"/>
-                </a:solidFill>
-              </a:rPr>
-              <a:t>Every month in FY25-26 exceeded the same month last year</a:t>
-            </a:r>
-            <a:endParaRPr lang="en-US" sz="1300" dirty="0"/>
-          </a:p>
-        </p:txBody>
-      </p:sp>
-      <p:graphicFrame>
-        <p:nvGraphicFramePr>
-          <p:cNvPr id="24" name="Chart 0"/>
-          <p:cNvGraphicFramePr/>
-          <p:nvPr/>
-        </p:nvGraphicFramePr>
-        <p:xfrm>
-          <a:off x="365760" y="3017520"/>
-          <a:ext cx="8412480" cy="1920240"/>
-        </p:xfrm>
-        <a:graphic>
-          <a:graphicData uri="http://schemas.openxmlformats.org/drawingml/2006/chart">
-            <c:chart xmlns:c="http://schemas.openxmlformats.org/drawingml/2006/chart" xmlns:r="http://schemas.openxmlformats.org/officeDocument/2006/relationships" r:id="rId3"/>
-          </a:graphicData>
-        </a:graphic>
-      </p:graphicFrame>
-    </p:spTree>
-  </p:cSld>
-  <p:clrMapOvr>
-    <a:masterClrMapping/>
-  </p:clrMapOvr>
-</p:sld>
-</file>
-
-<file path=ppt/slides/slide8.xml><?xml version="1.0" encoding="utf-8"?>
-<p:sld xmlns:a="http://schemas.openxmlformats.org/drawingml/2006/main" xmlns:r="http://schemas.openxmlformats.org/officeDocument/2006/relationships" xmlns:p="http://schemas.openxmlformats.org/presentationml/2006/main">
-  <p:cSld name="Slide 8">
-    <p:bg>
-      <p:bgPr>
-        <a:solidFill>
-          <a:srgbClr val="F4F7FB"/>
-        </a:solidFill>
-        <a:effectLst/>
-      </p:bgPr>
-    </p:bg>
-    <p:spTree>
-      <p:nvGrpSpPr>
-        <p:cNvPr id="1" name=""/>
-        <p:cNvGrpSpPr/>
-        <p:nvPr/>
-      </p:nvGrpSpPr>
-      <p:grpSpPr>
-        <a:xfrm>
-          <a:off x="0" y="0"/>
-          <a:ext cx="0" cy="0"/>
-          <a:chOff x="0" y="0"/>
-          <a:chExt cx="0" cy="0"/>
-        </a:xfrm>
-      </p:grpSpPr>
-      <p:sp>
-        <p:nvSpPr>
-          <p:cNvPr id="2" name="Text 0"/>
-          <p:cNvSpPr/>
-          <p:nvPr/>
-        </p:nvSpPr>
-        <p:spPr>
-          <a:xfrm>
-            <a:off x="457200" y="228600"/>
-            <a:ext cx="8229600" cy="548640"/>
-          </a:xfrm>
-          <a:prstGeom prst="rect">
-            <a:avLst/>
-          </a:prstGeom>
-          <a:noFill/>
-          <a:ln/>
-        </p:spPr>
-        <p:txBody>
-          <a:bodyPr wrap="square" rtlCol="0" anchor="ctr"/>
-          <a:lstStyle/>
-          <a:p>
-            <a:pPr marL="0" indent="0">
-              <a:buNone/>
-            </a:pPr>
-            <a:r>
-              <a:rPr lang="en-US" sz="2800" b="1" dirty="0">
-                <a:solidFill>
-                  <a:srgbClr val="0A2342"/>
-                </a:solidFill>
-              </a:rPr>
-              <a:t>Service Demand Across All Three Routes</a:t>
-            </a:r>
-            <a:endParaRPr lang="en-US" sz="2800" dirty="0"/>
-          </a:p>
-        </p:txBody>
-      </p:sp>
-      <p:sp>
-        <p:nvSpPr>
-          <p:cNvPr id="3" name="Text 1"/>
-          <p:cNvSpPr/>
-          <p:nvPr/>
-        </p:nvSpPr>
-        <p:spPr>
-          <a:xfrm>
-            <a:off x="457200" y="777240"/>
-            <a:ext cx="8229600" cy="274320"/>
-          </a:xfrm>
-          <a:prstGeom prst="rect">
-            <a:avLst/>
-          </a:prstGeom>
-          <a:noFill/>
-          <a:ln/>
-        </p:spPr>
-        <p:txBody>
-          <a:bodyPr wrap="square" rtlCol="0" anchor="ctr"/>
-          <a:lstStyle/>
-          <a:p>
-            <a:pPr marL="0" indent="0">
-              <a:buNone/>
-            </a:pPr>
-            <a:r>
-              <a:rPr lang="en-US" sz="1200" dirty="0">
-                <a:solidFill>
-                  <a:srgbClr val="64748B"/>
-                </a:solidFill>
-              </a:rPr>
-              <a:t>Monthly ridership by route — FY2024-25 (Aug–Feb, full data)</a:t>
-            </a:r>
-            <a:endParaRPr lang="en-US" sz="1200" dirty="0"/>
-          </a:p>
-        </p:txBody>
-      </p:sp>
-      <p:graphicFrame>
-        <p:nvGraphicFramePr>
-          <p:cNvPr id="4" name="Chart 0"/>
-          <p:cNvGraphicFramePr/>
-          <p:nvPr/>
-        </p:nvGraphicFramePr>
-        <p:xfrm>
-          <a:off x="365760" y="1097280"/>
-          <a:ext cx="8412480" cy="3383280"/>
-        </p:xfrm>
-        <a:graphic>
-          <a:graphicData uri="http://schemas.openxmlformats.org/drawingml/2006/chart">
-            <c:chart xmlns:c="http://schemas.openxmlformats.org/drawingml/2006/chart" xmlns:r="http://schemas.openxmlformats.org/officeDocument/2006/relationships" r:id="rId3"/>
-          </a:graphicData>
-        </a:graphic>
-      </p:graphicFrame>
-      <p:sp>
-        <p:nvSpPr>
-          <p:cNvPr id="5" name="Text 2"/>
-          <p:cNvSpPr/>
-          <p:nvPr/>
-        </p:nvSpPr>
-        <p:spPr>
-          <a:xfrm>
-            <a:off x="457200" y="4617720"/>
-            <a:ext cx="8229600" cy="411480"/>
-          </a:xfrm>
-          <a:prstGeom prst="rect">
-            <a:avLst/>
-          </a:prstGeom>
-          <a:noFill/>
-          <a:ln/>
-        </p:spPr>
-        <p:txBody>
-          <a:bodyPr wrap="square" rtlCol="0" anchor="ctr"/>
-          <a:lstStyle/>
-          <a:p>
-            <a:pPr marL="0" indent="0">
-              <a:buNone/>
-            </a:pPr>
-            <a:r>
-              <a:rPr lang="en-US" sz="1100" i="1" dirty="0">
-                <a:solidFill>
-                  <a:srgbClr val="64748B"/>
-                </a:solidFill>
-              </a:rPr>
-              <a:t>Ram Force One AM carries the majority of riders — but all three routes show consistent demand throughout the semester.</a:t>
-            </a:r>
-            <a:endParaRPr lang="en-US" sz="1100" dirty="0"/>
-          </a:p>
-        </p:txBody>
-      </p:sp>
-    </p:spTree>
-  </p:cSld>
-  <p:clrMapOvr>
-    <a:masterClrMapping/>
-  </p:clrMapOvr>
-</p:sld>
-</file>
-
-<file path=ppt/slides/slide9.xml><?xml version="1.0" encoding="utf-8"?>
-<p:sld xmlns:a="http://schemas.openxmlformats.org/drawingml/2006/main" xmlns:r="http://schemas.openxmlformats.org/officeDocument/2006/relationships" xmlns:p="http://schemas.openxmlformats.org/presentationml/2006/main">
-  <p:cSld name="Slide 9">
-    <p:bg>
-      <p:bgPr>
-        <a:solidFill>
-          <a:srgbClr val="0A2342"/>
-        </a:solidFill>
-        <a:effectLst/>
-      </p:bgPr>
-    </p:bg>
-    <p:spTree>
-      <p:nvGrpSpPr>
-        <p:cNvPr id="1" name=""/>
-        <p:cNvGrpSpPr/>
-        <p:nvPr/>
-      </p:nvGrpSpPr>
-      <p:grpSpPr>
-        <a:xfrm>
-          <a:off x="0" y="0"/>
-          <a:ext cx="0" cy="0"/>
-          <a:chOff x="0" y="0"/>
-          <a:chExt cx="0" cy="0"/>
-        </a:xfrm>
-      </p:grpSpPr>
-      <p:sp>
-        <p:nvSpPr>
-          <p:cNvPr id="2" name="Shape 0"/>
-          <p:cNvSpPr/>
-          <p:nvPr/>
-        </p:nvSpPr>
-        <p:spPr>
-          <a:xfrm>
-            <a:off x="0" y="0"/>
-            <a:ext cx="54864" cy="5143500"/>
-          </a:xfrm>
-          <a:prstGeom prst="rect">
-            <a:avLst/>
-          </a:prstGeom>
-          <a:solidFill>
-            <a:srgbClr val="1D9E75"/>
-          </a:solidFill>
-          <a:ln/>
-        </p:spPr>
-        <p:txBody>
-          <a:bodyPr/>
-          <a:lstStyle/>
-          <a:p>
-            <a:endParaRPr lang="en-US"/>
-          </a:p>
-        </p:txBody>
-      </p:sp>
-      <p:sp>
-        <p:nvSpPr>
-          <p:cNvPr id="3" name="Text 1"/>
-          <p:cNvSpPr/>
-          <p:nvPr/>
-        </p:nvSpPr>
-        <p:spPr>
-          <a:xfrm>
-            <a:off x="457200" y="1645920"/>
-            <a:ext cx="8229600" cy="1097280"/>
-          </a:xfrm>
-          <a:prstGeom prst="rect">
-            <a:avLst/>
-          </a:prstGeom>
-          <a:noFill/>
-          <a:ln/>
-        </p:spPr>
-        <p:txBody>
-          <a:bodyPr wrap="square" rtlCol="0" anchor="ctr"/>
-          <a:lstStyle/>
-          <a:p>
-            <a:pPr marL="0" indent="0">
-              <a:buNone/>
-            </a:pPr>
-            <a:r>
-              <a:rPr lang="en-US" sz="4000" b="1" dirty="0">
-                <a:solidFill>
-                  <a:srgbClr val="FFFFFF"/>
-                </a:solidFill>
-                <a:latin typeface="Calibri" pitchFamily="34" charset="0"/>
-                <a:ea typeface="Calibri" pitchFamily="34" charset="-122"/>
-                <a:cs typeface="Calibri" pitchFamily="34" charset="-120"/>
-              </a:rPr>
-              <a:t>Student Voice</a:t>
-            </a:r>
-            <a:endParaRPr lang="en-US" sz="4000" dirty="0"/>
-          </a:p>
-        </p:txBody>
-      </p:sp>
-      <p:sp>
-        <p:nvSpPr>
-          <p:cNvPr id="4" name="Text 2"/>
-          <p:cNvSpPr/>
-          <p:nvPr/>
-        </p:nvSpPr>
-        <p:spPr>
-          <a:xfrm>
-            <a:off x="457200" y="2743200"/>
-            <a:ext cx="8229600" cy="548640"/>
-          </a:xfrm>
-          <a:prstGeom prst="rect">
-            <a:avLst/>
-          </a:prstGeom>
-          <a:noFill/>
-          <a:ln/>
-        </p:spPr>
-        <p:txBody>
-          <a:bodyPr wrap="square" rtlCol="0" anchor="ctr"/>
-          <a:lstStyle/>
-          <a:p>
-            <a:pPr marL="0" indent="0">
-              <a:buNone/>
-            </a:pPr>
-            <a:r>
-              <a:rPr lang="en-US" sz="1800" dirty="0">
-                <a:solidFill>
-                  <a:srgbClr val="A0BDD8"/>
-                </a:solidFill>
-                <a:latin typeface="Calibri" pitchFamily="34" charset="0"/>
-                <a:ea typeface="Calibri" pitchFamily="34" charset="-122"/>
-                <a:cs typeface="Calibri" pitchFamily="34" charset="-120"/>
-              </a:rPr>
-              <a:t>445 students surveyed — Feb 17 through Mar 5, 2025.</a:t>
-            </a:r>
-            <a:endParaRPr lang="en-US" sz="1800" dirty="0"/>
           </a:p>
         </p:txBody>
       </p:sp>

--- a/EPTA/EPTA_Funding_Case_2025.pptx
+++ b/EPTA/EPTA_Funding_Case_2025.pptx
@@ -11386,7 +11386,7 @@
                   <a:srgbClr val="64748B"/>
                 </a:solidFill>
               </a:rPr>
-              <a:t>Photos and voices from the people who depend on EPTA</a:t>
+              <a:t>Voices of the people who depend on EPTA</a:t>
             </a:r>
             <a:endParaRPr lang="en-US" sz="1100" dirty="0"/>
           </a:p>
